--- a/artefatos/gerente_de_projetos/report_templates/template_sprint_review_interno.pptx
+++ b/artefatos/gerente_de_projetos/report_templates/template_sprint_review_interno.pptx
@@ -1,34 +1,137 @@
 
 <file path=ppt/presentation.xml><?xml version="1.0" encoding="utf-8"?>
-<p:presentation xmlns:a="http://schemas.openxmlformats.org/drawingml/2006/main" xmlns:p="http://schemas.openxmlformats.org/presentationml/2006/main" xmlns:r="http://schemas.openxmlformats.org/officeDocument/2006/relationships" xmlns:p14="http://schemas.microsoft.com/office/powerpoint/2010/main" xmlns:p15="http://schemas.microsoft.com/office/powerpoint/2012/main" xmlns:mc="http://schemas.openxmlformats.org/markup-compatibility/2006">
+<p:presentation xmlns:a="http://schemas.openxmlformats.org/drawingml/2006/main" xmlns:r="http://schemas.openxmlformats.org/officeDocument/2006/relationships" xmlns:p="http://schemas.openxmlformats.org/presentationml/2006/main">
   <p:sldMasterIdLst>
-    <p:sldMasterId id="2147483648" r:id="rId2"/>
+    <p:sldMasterId id="2147483648" r:id="rId1"/>
   </p:sldMasterIdLst>
   <p:sldIdLst>
-    <p:sldId id="256" r:id="rId3"/>
-    <p:sldId id="257" r:id="rId4"/>
-    <p:sldId id="258" r:id="rId5"/>
-    <p:sldId id="259" r:id="rId6"/>
-    <p:sldId id="260" r:id="rId7"/>
-    <p:sldId id="261" r:id="rId8"/>
-    <p:sldId id="262" r:id="rId9"/>
-    <p:sldId id="263" r:id="rId10"/>
-    <p:sldId id="264" r:id="rId11"/>
-    <p:sldId id="265" r:id="rId12"/>
+    <p:sldId id="256" r:id="rId2"/>
+    <p:sldId id="257" r:id="rId3"/>
+    <p:sldId id="258" r:id="rId4"/>
+    <p:sldId id="266" r:id="rId5"/>
+    <p:sldId id="267" r:id="rId6"/>
+    <p:sldId id="259" r:id="rId7"/>
+    <p:sldId id="260" r:id="rId8"/>
+    <p:sldId id="261" r:id="rId9"/>
+    <p:sldId id="262" r:id="rId10"/>
+    <p:sldId id="263" r:id="rId11"/>
+    <p:sldId id="264" r:id="rId12"/>
+    <p:sldId id="265" r:id="rId13"/>
   </p:sldIdLst>
-  <p:sldSz cx="9144000" cy="6858000"/>
+  <p:sldSz cx="9144000" cy="6858000" type="screen4x3"/>
   <p:notesSz cx="7559675" cy="10691813"/>
+  <p:defaultTextStyle>
+    <a:defPPr>
+      <a:defRPr lang="pt-BR"/>
+    </a:defPPr>
+    <a:lvl1pPr marL="0" algn="l" defTabSz="914400" rtl="0" eaLnBrk="1" latinLnBrk="0" hangingPunct="1">
+      <a:defRPr sz="1800" kern="1200">
+        <a:solidFill>
+          <a:schemeClr val="tx1"/>
+        </a:solidFill>
+        <a:latin typeface="+mn-lt"/>
+        <a:ea typeface="+mn-ea"/>
+        <a:cs typeface="+mn-cs"/>
+      </a:defRPr>
+    </a:lvl1pPr>
+    <a:lvl2pPr marL="457200" algn="l" defTabSz="914400" rtl="0" eaLnBrk="1" latinLnBrk="0" hangingPunct="1">
+      <a:defRPr sz="1800" kern="1200">
+        <a:solidFill>
+          <a:schemeClr val="tx1"/>
+        </a:solidFill>
+        <a:latin typeface="+mn-lt"/>
+        <a:ea typeface="+mn-ea"/>
+        <a:cs typeface="+mn-cs"/>
+      </a:defRPr>
+    </a:lvl2pPr>
+    <a:lvl3pPr marL="914400" algn="l" defTabSz="914400" rtl="0" eaLnBrk="1" latinLnBrk="0" hangingPunct="1">
+      <a:defRPr sz="1800" kern="1200">
+        <a:solidFill>
+          <a:schemeClr val="tx1"/>
+        </a:solidFill>
+        <a:latin typeface="+mn-lt"/>
+        <a:ea typeface="+mn-ea"/>
+        <a:cs typeface="+mn-cs"/>
+      </a:defRPr>
+    </a:lvl3pPr>
+    <a:lvl4pPr marL="1371600" algn="l" defTabSz="914400" rtl="0" eaLnBrk="1" latinLnBrk="0" hangingPunct="1">
+      <a:defRPr sz="1800" kern="1200">
+        <a:solidFill>
+          <a:schemeClr val="tx1"/>
+        </a:solidFill>
+        <a:latin typeface="+mn-lt"/>
+        <a:ea typeface="+mn-ea"/>
+        <a:cs typeface="+mn-cs"/>
+      </a:defRPr>
+    </a:lvl4pPr>
+    <a:lvl5pPr marL="1828800" algn="l" defTabSz="914400" rtl="0" eaLnBrk="1" latinLnBrk="0" hangingPunct="1">
+      <a:defRPr sz="1800" kern="1200">
+        <a:solidFill>
+          <a:schemeClr val="tx1"/>
+        </a:solidFill>
+        <a:latin typeface="+mn-lt"/>
+        <a:ea typeface="+mn-ea"/>
+        <a:cs typeface="+mn-cs"/>
+      </a:defRPr>
+    </a:lvl5pPr>
+    <a:lvl6pPr marL="2286000" algn="l" defTabSz="914400" rtl="0" eaLnBrk="1" latinLnBrk="0" hangingPunct="1">
+      <a:defRPr sz="1800" kern="1200">
+        <a:solidFill>
+          <a:schemeClr val="tx1"/>
+        </a:solidFill>
+        <a:latin typeface="+mn-lt"/>
+        <a:ea typeface="+mn-ea"/>
+        <a:cs typeface="+mn-cs"/>
+      </a:defRPr>
+    </a:lvl6pPr>
+    <a:lvl7pPr marL="2743200" algn="l" defTabSz="914400" rtl="0" eaLnBrk="1" latinLnBrk="0" hangingPunct="1">
+      <a:defRPr sz="1800" kern="1200">
+        <a:solidFill>
+          <a:schemeClr val="tx1"/>
+        </a:solidFill>
+        <a:latin typeface="+mn-lt"/>
+        <a:ea typeface="+mn-ea"/>
+        <a:cs typeface="+mn-cs"/>
+      </a:defRPr>
+    </a:lvl7pPr>
+    <a:lvl8pPr marL="3200400" algn="l" defTabSz="914400" rtl="0" eaLnBrk="1" latinLnBrk="0" hangingPunct="1">
+      <a:defRPr sz="1800" kern="1200">
+        <a:solidFill>
+          <a:schemeClr val="tx1"/>
+        </a:solidFill>
+        <a:latin typeface="+mn-lt"/>
+        <a:ea typeface="+mn-ea"/>
+        <a:cs typeface="+mn-cs"/>
+      </a:defRPr>
+    </a:lvl8pPr>
+    <a:lvl9pPr marL="3657600" algn="l" defTabSz="914400" rtl="0" eaLnBrk="1" latinLnBrk="0" hangingPunct="1">
+      <a:defRPr sz="1800" kern="1200">
+        <a:solidFill>
+          <a:schemeClr val="tx1"/>
+        </a:solidFill>
+        <a:latin typeface="+mn-lt"/>
+        <a:ea typeface="+mn-ea"/>
+        <a:cs typeface="+mn-cs"/>
+      </a:defRPr>
+    </a:lvl9pPr>
+  </p:defaultTextStyle>
+  <p:extLst>
+    <p:ext uri="{EFAFB233-063F-42B5-8137-9DF3F51BA10A}">
+      <p15:sldGuideLst xmlns:p15="http://schemas.microsoft.com/office/powerpoint/2012/main"/>
+    </p:ext>
+  </p:extLst>
 </p:presentation>
 </file>
 
 <file path=ppt/slideLayouts/slideLayout1.xml><?xml version="1.0" encoding="utf-8"?>
-<p:sldLayout xmlns:a="http://schemas.openxmlformats.org/drawingml/2006/main" xmlns:p="http://schemas.openxmlformats.org/presentationml/2006/main" xmlns:r="http://schemas.openxmlformats.org/officeDocument/2006/relationships" xmlns:p14="http://schemas.microsoft.com/office/powerpoint/2010/main" xmlns:p15="http://schemas.microsoft.com/office/powerpoint/2012/main" xmlns:mc="http://schemas.openxmlformats.org/markup-compatibility/2006" type="tx" preserve="1">
+<p:sldLayout xmlns:a="http://schemas.openxmlformats.org/drawingml/2006/main" xmlns:r="http://schemas.openxmlformats.org/officeDocument/2006/relationships" xmlns:p="http://schemas.openxmlformats.org/presentationml/2006/main" type="tx" preserve="1">
   <p:cSld name="Padrão">
     <p:bg>
       <p:bgPr>
         <a:solidFill>
           <a:srgbClr val="FFFFFF"/>
         </a:solidFill>
+        <a:effectLst/>
       </p:bgPr>
     </p:bg>
     <p:spTree>
@@ -112,14 +215,6 @@
               </a:rPr>
               <a:t>Click to edit Master title style</a:t>
             </a:r>
-            <a:endParaRPr lang="en-US" sz="4400" b="0" u="none" strike="noStrike">
-              <a:solidFill>
-                <a:schemeClr val="dk1"/>
-              </a:solidFill>
-              <a:effectLst/>
-              <a:uFillTx/>
-              <a:latin typeface="Calibri"/>
-            </a:endParaRPr>
           </a:p>
         </p:txBody>
       </p:sp>
@@ -272,14 +367,6 @@
               </a:rPr>
               <a:t>&lt;rodapé&gt;</a:t>
             </a:r>
-            <a:endParaRPr lang="pt-BR" sz="1400" b="0" u="none" strike="noStrike">
-              <a:solidFill>
-                <a:srgbClr val="000000"/>
-              </a:solidFill>
-              <a:effectLst/>
-              <a:uFillTx/>
-              <a:latin typeface="Times New Roman"/>
-            </a:endParaRPr>
           </a:p>
         </p:txBody>
       </p:sp>
@@ -352,7 +439,7 @@
                 <a:uFillTx/>
                 <a:latin typeface="Calibri"/>
               </a:rPr>
-              <a:t>&lt;número&gt;</a:t>
+              <a:t>‹nº›</a:t>
             </a:fld>
             <a:endParaRPr lang="pt-BR" sz="1200" b="0" u="none" strike="noStrike">
               <a:solidFill>
@@ -572,14 +659,6 @@
               </a:rPr>
               <a:t>Clique para editar o formato de texto dos tópicos</a:t>
             </a:r>
-            <a:endParaRPr lang="en-US" sz="3200" b="0" u="none" strike="noStrike">
-              <a:solidFill>
-                <a:schemeClr val="dk1"/>
-              </a:solidFill>
-              <a:effectLst/>
-              <a:uFillTx/>
-              <a:latin typeface="Calibri"/>
-            </a:endParaRPr>
           </a:p>
           <a:p>
             <a:pPr marL="864000" lvl="1" indent="-324000" algn="l" defTabSz="457200">
@@ -607,14 +686,6 @@
               </a:rPr>
               <a:t>2.º nível de tópicos</a:t>
             </a:r>
-            <a:endParaRPr lang="en-US" sz="2800" b="0" u="none" strike="noStrike">
-              <a:solidFill>
-                <a:schemeClr val="dk1"/>
-              </a:solidFill>
-              <a:effectLst/>
-              <a:uFillTx/>
-              <a:latin typeface="Calibri"/>
-            </a:endParaRPr>
           </a:p>
           <a:p>
             <a:pPr marL="1296000" lvl="2" indent="-288000" algn="l" defTabSz="457200">
@@ -642,14 +713,6 @@
               </a:rPr>
               <a:t>3.º nível de tópicos</a:t>
             </a:r>
-            <a:endParaRPr lang="en-US" sz="2400" b="0" u="none" strike="noStrike">
-              <a:solidFill>
-                <a:schemeClr val="dk1"/>
-              </a:solidFill>
-              <a:effectLst/>
-              <a:uFillTx/>
-              <a:latin typeface="Calibri"/>
-            </a:endParaRPr>
           </a:p>
           <a:p>
             <a:pPr marL="1728000" lvl="3" indent="-216000" algn="l" defTabSz="457200">
@@ -677,14 +740,6 @@
               </a:rPr>
               <a:t>4.º nível de tópicos</a:t>
             </a:r>
-            <a:endParaRPr lang="en-US" sz="2000" b="0" u="none" strike="noStrike">
-              <a:solidFill>
-                <a:schemeClr val="dk1"/>
-              </a:solidFill>
-              <a:effectLst/>
-              <a:uFillTx/>
-              <a:latin typeface="Calibri"/>
-            </a:endParaRPr>
           </a:p>
           <a:p>
             <a:pPr marL="2160000" lvl="4" indent="-216000" algn="l" defTabSz="457200">
@@ -712,14 +767,6 @@
               </a:rPr>
               <a:t>5.º nível de tópicos</a:t>
             </a:r>
-            <a:endParaRPr lang="en-US" sz="2000" b="0" u="none" strike="noStrike">
-              <a:solidFill>
-                <a:schemeClr val="dk1"/>
-              </a:solidFill>
-              <a:effectLst/>
-              <a:uFillTx/>
-              <a:latin typeface="Calibri"/>
-            </a:endParaRPr>
           </a:p>
           <a:p>
             <a:pPr marL="2592000" lvl="5" indent="-216000" algn="l" defTabSz="457200">
@@ -747,14 +794,6 @@
               </a:rPr>
               <a:t>6.º nível de tópicos</a:t>
             </a:r>
-            <a:endParaRPr lang="en-US" sz="2000" b="0" u="none" strike="noStrike">
-              <a:solidFill>
-                <a:schemeClr val="dk1"/>
-              </a:solidFill>
-              <a:effectLst/>
-              <a:uFillTx/>
-              <a:latin typeface="Calibri"/>
-            </a:endParaRPr>
           </a:p>
           <a:p>
             <a:pPr marL="3024000" lvl="6" indent="-216000" algn="l" defTabSz="457200">
@@ -782,30 +821,26 @@
               </a:rPr>
               <a:t>7.º nível de tópicos</a:t>
             </a:r>
-            <a:endParaRPr lang="en-US" sz="2000" b="0" u="none" strike="noStrike">
-              <a:solidFill>
-                <a:schemeClr val="dk1"/>
-              </a:solidFill>
-              <a:effectLst/>
-              <a:uFillTx/>
-              <a:latin typeface="Calibri"/>
-            </a:endParaRPr>
           </a:p>
         </p:txBody>
       </p:sp>
     </p:spTree>
   </p:cSld>
+  <p:clrMapOvr>
+    <a:masterClrMapping/>
+  </p:clrMapOvr>
 </p:sldLayout>
 </file>
 
 <file path=ppt/slideLayouts/slideLayout10.xml><?xml version="1.0" encoding="utf-8"?>
-<p:sldLayout xmlns:a="http://schemas.openxmlformats.org/drawingml/2006/main" xmlns:p="http://schemas.openxmlformats.org/presentationml/2006/main" xmlns:r="http://schemas.openxmlformats.org/officeDocument/2006/relationships" xmlns:p14="http://schemas.microsoft.com/office/powerpoint/2010/main" xmlns:p15="http://schemas.microsoft.com/office/powerpoint/2012/main" xmlns:mc="http://schemas.openxmlformats.org/markup-compatibility/2006" type="blank" preserve="1">
+<p:sldLayout xmlns:a="http://schemas.openxmlformats.org/drawingml/2006/main" xmlns:r="http://schemas.openxmlformats.org/officeDocument/2006/relationships" xmlns:p="http://schemas.openxmlformats.org/presentationml/2006/main" type="blank" preserve="1">
   <p:cSld name="Content with Caption">
     <p:bg>
       <p:bgPr>
         <a:solidFill>
           <a:srgbClr val="FFFFFF"/>
         </a:solidFill>
+        <a:effectLst/>
       </p:bgPr>
     </p:bg>
     <p:spTree>
@@ -889,14 +924,6 @@
               </a:rPr>
               <a:t>Click to edit Master title style</a:t>
             </a:r>
-            <a:endParaRPr lang="en-US" sz="2000" b="1" u="none" strike="noStrike">
-              <a:solidFill>
-                <a:schemeClr val="dk1"/>
-              </a:solidFill>
-              <a:effectLst/>
-              <a:uFillTx/>
-              <a:latin typeface="Calibri"/>
-            </a:endParaRPr>
           </a:p>
         </p:txBody>
       </p:sp>
@@ -1059,14 +1086,6 @@
               </a:rPr>
               <a:t>Click to edit Master text styles</a:t>
             </a:r>
-            <a:endParaRPr lang="en-US" sz="3200" b="0" u="none" strike="noStrike">
-              <a:solidFill>
-                <a:schemeClr val="dk1"/>
-              </a:solidFill>
-              <a:effectLst/>
-              <a:uFillTx/>
-              <a:latin typeface="Calibri"/>
-            </a:endParaRPr>
           </a:p>
           <a:p>
             <a:pPr marL="743040" lvl="1" indent="-285840" algn="l" defTabSz="457200">
@@ -1093,14 +1112,6 @@
               </a:rPr>
               <a:t>Second level</a:t>
             </a:r>
-            <a:endParaRPr lang="en-US" sz="2800" b="0" u="none" strike="noStrike">
-              <a:solidFill>
-                <a:schemeClr val="dk1"/>
-              </a:solidFill>
-              <a:effectLst/>
-              <a:uFillTx/>
-              <a:latin typeface="Calibri"/>
-            </a:endParaRPr>
           </a:p>
           <a:p>
             <a:pPr marL="1143000" lvl="2" indent="-228600" algn="l" defTabSz="457200">
@@ -1127,14 +1138,6 @@
               </a:rPr>
               <a:t>Third level</a:t>
             </a:r>
-            <a:endParaRPr lang="en-US" sz="2400" b="0" u="none" strike="noStrike">
-              <a:solidFill>
-                <a:schemeClr val="dk1"/>
-              </a:solidFill>
-              <a:effectLst/>
-              <a:uFillTx/>
-              <a:latin typeface="Calibri"/>
-            </a:endParaRPr>
           </a:p>
           <a:p>
             <a:pPr marL="1600200" lvl="3" indent="-228600" algn="l" defTabSz="457200">
@@ -1161,14 +1164,6 @@
               </a:rPr>
               <a:t>Fourth level</a:t>
             </a:r>
-            <a:endParaRPr lang="en-US" sz="2000" b="0" u="none" strike="noStrike">
-              <a:solidFill>
-                <a:schemeClr val="dk1"/>
-              </a:solidFill>
-              <a:effectLst/>
-              <a:uFillTx/>
-              <a:latin typeface="Calibri"/>
-            </a:endParaRPr>
           </a:p>
           <a:p>
             <a:pPr marL="2057400" lvl="4" indent="-228600" algn="l" defTabSz="457200">
@@ -1195,14 +1190,6 @@
               </a:rPr>
               <a:t>Fifth level</a:t>
             </a:r>
-            <a:endParaRPr lang="en-US" sz="2000" b="0" u="none" strike="noStrike">
-              <a:solidFill>
-                <a:schemeClr val="dk1"/>
-              </a:solidFill>
-              <a:effectLst/>
-              <a:uFillTx/>
-              <a:latin typeface="Calibri"/>
-            </a:endParaRPr>
           </a:p>
         </p:txBody>
       </p:sp>
@@ -1279,14 +1266,6 @@
               </a:rPr>
               <a:t>Click to edit Master text styles</a:t>
             </a:r>
-            <a:endParaRPr lang="en-US" sz="1400" b="0" u="none" strike="noStrike">
-              <a:solidFill>
-                <a:schemeClr val="dk1"/>
-              </a:solidFill>
-              <a:effectLst/>
-              <a:uFillTx/>
-              <a:latin typeface="Calibri"/>
-            </a:endParaRPr>
           </a:p>
         </p:txBody>
       </p:sp>
@@ -1439,14 +1418,6 @@
               </a:rPr>
               <a:t>&lt;rodapé&gt;</a:t>
             </a:r>
-            <a:endParaRPr lang="pt-BR" sz="1400" b="0" u="none" strike="noStrike">
-              <a:solidFill>
-                <a:srgbClr val="000000"/>
-              </a:solidFill>
-              <a:effectLst/>
-              <a:uFillTx/>
-              <a:latin typeface="Times New Roman"/>
-            </a:endParaRPr>
           </a:p>
         </p:txBody>
       </p:sp>
@@ -1519,7 +1490,7 @@
                 <a:uFillTx/>
                 <a:latin typeface="Calibri"/>
               </a:rPr>
-              <a:t>&lt;número&gt;</a:t>
+              <a:t>‹nº›</a:t>
             </a:fld>
             <a:endParaRPr lang="pt-BR" sz="1200" b="0" u="none" strike="noStrike">
               <a:solidFill>
@@ -1534,17 +1505,21 @@
       </p:sp>
     </p:spTree>
   </p:cSld>
+  <p:clrMapOvr>
+    <a:masterClrMapping/>
+  </p:clrMapOvr>
 </p:sldLayout>
 </file>
 
 <file path=ppt/slideLayouts/slideLayout11.xml><?xml version="1.0" encoding="utf-8"?>
-<p:sldLayout xmlns:a="http://schemas.openxmlformats.org/drawingml/2006/main" xmlns:p="http://schemas.openxmlformats.org/presentationml/2006/main" xmlns:r="http://schemas.openxmlformats.org/officeDocument/2006/relationships" xmlns:p14="http://schemas.microsoft.com/office/powerpoint/2010/main" xmlns:p15="http://schemas.microsoft.com/office/powerpoint/2012/main" xmlns:mc="http://schemas.openxmlformats.org/markup-compatibility/2006" type="blank" preserve="1">
+<p:sldLayout xmlns:a="http://schemas.openxmlformats.org/drawingml/2006/main" xmlns:r="http://schemas.openxmlformats.org/officeDocument/2006/relationships" xmlns:p="http://schemas.openxmlformats.org/presentationml/2006/main" type="blank" preserve="1">
   <p:cSld name="Picture with Caption">
     <p:bg>
       <p:bgPr>
         <a:solidFill>
           <a:srgbClr val="FFFFFF"/>
         </a:solidFill>
+        <a:effectLst/>
       </p:bgPr>
     </p:bg>
     <p:spTree>
@@ -1628,14 +1603,6 @@
               </a:rPr>
               <a:t>Click to edit Master title style</a:t>
             </a:r>
-            <a:endParaRPr lang="en-US" sz="2000" b="1" u="none" strike="noStrike">
-              <a:solidFill>
-                <a:schemeClr val="dk1"/>
-              </a:solidFill>
-              <a:effectLst/>
-              <a:uFillTx/>
-              <a:latin typeface="Calibri"/>
-            </a:endParaRPr>
           </a:p>
         </p:txBody>
       </p:sp>
@@ -1870,14 +1837,6 @@
               </a:rPr>
               <a:t>Clique para editar o formato de texto dos tópicos</a:t>
             </a:r>
-            <a:endParaRPr lang="en-US" sz="3200" b="0" u="none" strike="noStrike">
-              <a:solidFill>
-                <a:schemeClr val="dk1"/>
-              </a:solidFill>
-              <a:effectLst/>
-              <a:uFillTx/>
-              <a:latin typeface="Calibri"/>
-            </a:endParaRPr>
           </a:p>
           <a:p>
             <a:pPr marL="457200" lvl="1" indent="-324000" algn="l" defTabSz="457200">
@@ -1908,14 +1867,6 @@
               </a:rPr>
               <a:t>2.º nível de tópicos</a:t>
             </a:r>
-            <a:endParaRPr lang="en-US" sz="3200" b="0" u="none" strike="noStrike">
-              <a:solidFill>
-                <a:schemeClr val="dk1"/>
-              </a:solidFill>
-              <a:effectLst/>
-              <a:uFillTx/>
-              <a:latin typeface="Calibri"/>
-            </a:endParaRPr>
           </a:p>
           <a:p>
             <a:pPr marL="914400" lvl="2" indent="-288000" algn="l" defTabSz="457200">
@@ -1946,14 +1897,6 @@
               </a:rPr>
               <a:t>3.º nível de tópicos</a:t>
             </a:r>
-            <a:endParaRPr lang="en-US" sz="3200" b="0" u="none" strike="noStrike">
-              <a:solidFill>
-                <a:schemeClr val="dk1"/>
-              </a:solidFill>
-              <a:effectLst/>
-              <a:uFillTx/>
-              <a:latin typeface="Calibri"/>
-            </a:endParaRPr>
           </a:p>
           <a:p>
             <a:pPr marL="1371600" lvl="3" indent="-216000" algn="l" defTabSz="457200">
@@ -1984,14 +1927,6 @@
               </a:rPr>
               <a:t>4.º nível de tópicos</a:t>
             </a:r>
-            <a:endParaRPr lang="en-US" sz="3200" b="0" u="none" strike="noStrike">
-              <a:solidFill>
-                <a:schemeClr val="dk1"/>
-              </a:solidFill>
-              <a:effectLst/>
-              <a:uFillTx/>
-              <a:latin typeface="Calibri"/>
-            </a:endParaRPr>
           </a:p>
           <a:p>
             <a:pPr marL="1828800" lvl="4" indent="-216000" algn="l" defTabSz="457200">
@@ -2022,14 +1957,6 @@
               </a:rPr>
               <a:t>5.º nível de tópicos</a:t>
             </a:r>
-            <a:endParaRPr lang="en-US" sz="3200" b="0" u="none" strike="noStrike">
-              <a:solidFill>
-                <a:schemeClr val="dk1"/>
-              </a:solidFill>
-              <a:effectLst/>
-              <a:uFillTx/>
-              <a:latin typeface="Calibri"/>
-            </a:endParaRPr>
           </a:p>
           <a:p>
             <a:pPr marL="2286000" lvl="5" indent="-216000" algn="l" defTabSz="457200">
@@ -2060,14 +1987,6 @@
               </a:rPr>
               <a:t>6.º nível de tópicos</a:t>
             </a:r>
-            <a:endParaRPr lang="en-US" sz="3200" b="0" u="none" strike="noStrike">
-              <a:solidFill>
-                <a:schemeClr val="dk1"/>
-              </a:solidFill>
-              <a:effectLst/>
-              <a:uFillTx/>
-              <a:latin typeface="Calibri"/>
-            </a:endParaRPr>
           </a:p>
           <a:p>
             <a:pPr marL="2743200" lvl="6" indent="-216000" algn="l" defTabSz="457200">
@@ -2098,14 +2017,6 @@
               </a:rPr>
               <a:t>7.º nível de tópicos</a:t>
             </a:r>
-            <a:endParaRPr lang="en-US" sz="3200" b="0" u="none" strike="noStrike">
-              <a:solidFill>
-                <a:schemeClr val="dk1"/>
-              </a:solidFill>
-              <a:effectLst/>
-              <a:uFillTx/>
-              <a:latin typeface="Calibri"/>
-            </a:endParaRPr>
           </a:p>
         </p:txBody>
       </p:sp>
@@ -2182,14 +2093,6 @@
               </a:rPr>
               <a:t>Click to edit Master text styles</a:t>
             </a:r>
-            <a:endParaRPr lang="en-US" sz="1400" b="0" u="none" strike="noStrike">
-              <a:solidFill>
-                <a:schemeClr val="dk1"/>
-              </a:solidFill>
-              <a:effectLst/>
-              <a:uFillTx/>
-              <a:latin typeface="Calibri"/>
-            </a:endParaRPr>
           </a:p>
         </p:txBody>
       </p:sp>
@@ -2342,14 +2245,6 @@
               </a:rPr>
               <a:t>&lt;rodapé&gt;</a:t>
             </a:r>
-            <a:endParaRPr lang="pt-BR" sz="1400" b="0" u="none" strike="noStrike">
-              <a:solidFill>
-                <a:srgbClr val="000000"/>
-              </a:solidFill>
-              <a:effectLst/>
-              <a:uFillTx/>
-              <a:latin typeface="Times New Roman"/>
-            </a:endParaRPr>
           </a:p>
         </p:txBody>
       </p:sp>
@@ -2422,7 +2317,7 @@
                 <a:uFillTx/>
                 <a:latin typeface="Calibri"/>
               </a:rPr>
-              <a:t>&lt;número&gt;</a:t>
+              <a:t>‹nº›</a:t>
             </a:fld>
             <a:endParaRPr lang="pt-BR" sz="1200" b="0" u="none" strike="noStrike">
               <a:solidFill>
@@ -2437,17 +2332,21 @@
       </p:sp>
     </p:spTree>
   </p:cSld>
+  <p:clrMapOvr>
+    <a:masterClrMapping/>
+  </p:clrMapOvr>
 </p:sldLayout>
 </file>
 
 <file path=ppt/slideLayouts/slideLayout12.xml><?xml version="1.0" encoding="utf-8"?>
-<p:sldLayout xmlns:a="http://schemas.openxmlformats.org/drawingml/2006/main" xmlns:p="http://schemas.openxmlformats.org/presentationml/2006/main" xmlns:r="http://schemas.openxmlformats.org/officeDocument/2006/relationships" xmlns:p14="http://schemas.microsoft.com/office/powerpoint/2010/main" xmlns:p15="http://schemas.microsoft.com/office/powerpoint/2012/main" xmlns:mc="http://schemas.openxmlformats.org/markup-compatibility/2006" type="title" preserve="1">
+<p:sldLayout xmlns:a="http://schemas.openxmlformats.org/drawingml/2006/main" xmlns:r="http://schemas.openxmlformats.org/officeDocument/2006/relationships" xmlns:p="http://schemas.openxmlformats.org/presentationml/2006/main" type="title" preserve="1">
   <p:cSld name="Title Slide">
     <p:bg>
       <p:bgPr>
         <a:solidFill>
           <a:srgbClr val="FFFFFF"/>
         </a:solidFill>
+        <a:effectLst/>
       </p:bgPr>
     </p:bg>
     <p:spTree>
@@ -2531,14 +2430,6 @@
               </a:rPr>
               <a:t>Click to edit Master title style</a:t>
             </a:r>
-            <a:endParaRPr lang="en-US" sz="4400" b="0" u="none" strike="noStrike">
-              <a:solidFill>
-                <a:schemeClr val="dk1"/>
-              </a:solidFill>
-              <a:effectLst/>
-              <a:uFillTx/>
-              <a:latin typeface="Calibri"/>
-            </a:endParaRPr>
           </a:p>
         </p:txBody>
       </p:sp>
@@ -2691,14 +2582,6 @@
               </a:rPr>
               <a:t>&lt;rodapé&gt;</a:t>
             </a:r>
-            <a:endParaRPr lang="pt-BR" sz="1400" b="0" u="none" strike="noStrike">
-              <a:solidFill>
-                <a:srgbClr val="000000"/>
-              </a:solidFill>
-              <a:effectLst/>
-              <a:uFillTx/>
-              <a:latin typeface="Times New Roman"/>
-            </a:endParaRPr>
           </a:p>
         </p:txBody>
       </p:sp>
@@ -2771,7 +2654,7 @@
                 <a:uFillTx/>
                 <a:latin typeface="Calibri"/>
               </a:rPr>
-              <a:t>&lt;número&gt;</a:t>
+              <a:t>‹nº›</a:t>
             </a:fld>
             <a:endParaRPr lang="pt-BR" sz="1200" b="0" u="none" strike="noStrike">
               <a:solidFill>
@@ -2991,14 +2874,6 @@
               </a:rPr>
               <a:t>Clique para editar o formato de texto dos tópicos</a:t>
             </a:r>
-            <a:endParaRPr lang="en-US" sz="3200" b="0" u="none" strike="noStrike">
-              <a:solidFill>
-                <a:schemeClr val="dk1"/>
-              </a:solidFill>
-              <a:effectLst/>
-              <a:uFillTx/>
-              <a:latin typeface="Calibri"/>
-            </a:endParaRPr>
           </a:p>
           <a:p>
             <a:pPr marL="864000" lvl="1" indent="-324000" algn="l" defTabSz="457200">
@@ -3026,14 +2901,6 @@
               </a:rPr>
               <a:t>2.º nível de tópicos</a:t>
             </a:r>
-            <a:endParaRPr lang="en-US" sz="2800" b="0" u="none" strike="noStrike">
-              <a:solidFill>
-                <a:schemeClr val="dk1"/>
-              </a:solidFill>
-              <a:effectLst/>
-              <a:uFillTx/>
-              <a:latin typeface="Calibri"/>
-            </a:endParaRPr>
           </a:p>
           <a:p>
             <a:pPr marL="1296000" lvl="2" indent="-288000" algn="l" defTabSz="457200">
@@ -3061,14 +2928,6 @@
               </a:rPr>
               <a:t>3.º nível de tópicos</a:t>
             </a:r>
-            <a:endParaRPr lang="en-US" sz="2400" b="0" u="none" strike="noStrike">
-              <a:solidFill>
-                <a:schemeClr val="dk1"/>
-              </a:solidFill>
-              <a:effectLst/>
-              <a:uFillTx/>
-              <a:latin typeface="Calibri"/>
-            </a:endParaRPr>
           </a:p>
           <a:p>
             <a:pPr marL="1728000" lvl="3" indent="-216000" algn="l" defTabSz="457200">
@@ -3096,14 +2955,6 @@
               </a:rPr>
               <a:t>4.º nível de tópicos</a:t>
             </a:r>
-            <a:endParaRPr lang="en-US" sz="2000" b="0" u="none" strike="noStrike">
-              <a:solidFill>
-                <a:schemeClr val="dk1"/>
-              </a:solidFill>
-              <a:effectLst/>
-              <a:uFillTx/>
-              <a:latin typeface="Calibri"/>
-            </a:endParaRPr>
           </a:p>
           <a:p>
             <a:pPr marL="2160000" lvl="4" indent="-216000" algn="l" defTabSz="457200">
@@ -3131,14 +2982,6 @@
               </a:rPr>
               <a:t>5.º nível de tópicos</a:t>
             </a:r>
-            <a:endParaRPr lang="en-US" sz="2000" b="0" u="none" strike="noStrike">
-              <a:solidFill>
-                <a:schemeClr val="dk1"/>
-              </a:solidFill>
-              <a:effectLst/>
-              <a:uFillTx/>
-              <a:latin typeface="Calibri"/>
-            </a:endParaRPr>
           </a:p>
           <a:p>
             <a:pPr marL="2592000" lvl="5" indent="-216000" algn="l" defTabSz="457200">
@@ -3166,14 +3009,6 @@
               </a:rPr>
               <a:t>6.º nível de tópicos</a:t>
             </a:r>
-            <a:endParaRPr lang="en-US" sz="2000" b="0" u="none" strike="noStrike">
-              <a:solidFill>
-                <a:schemeClr val="dk1"/>
-              </a:solidFill>
-              <a:effectLst/>
-              <a:uFillTx/>
-              <a:latin typeface="Calibri"/>
-            </a:endParaRPr>
           </a:p>
           <a:p>
             <a:pPr marL="3024000" lvl="6" indent="-216000" algn="l" defTabSz="457200">
@@ -3201,30 +3036,26 @@
               </a:rPr>
               <a:t>7.º nível de tópicos</a:t>
             </a:r>
-            <a:endParaRPr lang="en-US" sz="2000" b="0" u="none" strike="noStrike">
-              <a:solidFill>
-                <a:schemeClr val="dk1"/>
-              </a:solidFill>
-              <a:effectLst/>
-              <a:uFillTx/>
-              <a:latin typeface="Calibri"/>
-            </a:endParaRPr>
           </a:p>
         </p:txBody>
       </p:sp>
     </p:spTree>
   </p:cSld>
+  <p:clrMapOvr>
+    <a:masterClrMapping/>
+  </p:clrMapOvr>
 </p:sldLayout>
 </file>
 
 <file path=ppt/slideLayouts/slideLayout2.xml><?xml version="1.0" encoding="utf-8"?>
-<p:sldLayout xmlns:a="http://schemas.openxmlformats.org/drawingml/2006/main" xmlns:p="http://schemas.openxmlformats.org/presentationml/2006/main" xmlns:r="http://schemas.openxmlformats.org/officeDocument/2006/relationships" xmlns:p14="http://schemas.microsoft.com/office/powerpoint/2010/main" xmlns:p15="http://schemas.microsoft.com/office/powerpoint/2012/main" xmlns:mc="http://schemas.openxmlformats.org/markup-compatibility/2006" type="vertTx" preserve="1">
+<p:sldLayout xmlns:a="http://schemas.openxmlformats.org/drawingml/2006/main" xmlns:r="http://schemas.openxmlformats.org/officeDocument/2006/relationships" xmlns:p="http://schemas.openxmlformats.org/presentationml/2006/main" type="vertTx" preserve="1">
   <p:cSld name="Title and Vertical Text">
     <p:bg>
       <p:bgPr>
         <a:solidFill>
           <a:srgbClr val="FFFFFF"/>
         </a:solidFill>
+        <a:effectLst/>
       </p:bgPr>
     </p:bg>
     <p:spTree>
@@ -3308,14 +3139,6 @@
               </a:rPr>
               <a:t>Click to edit Master title style</a:t>
             </a:r>
-            <a:endParaRPr lang="en-US" sz="4400" b="0" u="none" strike="noStrike">
-              <a:solidFill>
-                <a:schemeClr val="dk1"/>
-              </a:solidFill>
-              <a:effectLst/>
-              <a:uFillTx/>
-              <a:latin typeface="Calibri"/>
-            </a:endParaRPr>
           </a:p>
         </p:txBody>
       </p:sp>
@@ -3343,7 +3166,7 @@
           </a:ln>
         </p:spPr>
         <p:txBody>
-          <a:bodyPr lIns="91440" tIns="45720" rIns="91440" bIns="45720" anchor="t" vert="eaVert">
+          <a:bodyPr vert="eaVert" lIns="91440" tIns="45720" rIns="91440" bIns="45720" anchor="t">
             <a:noAutofit/>
           </a:bodyPr>
           <a:lstStyle>
@@ -3478,14 +3301,6 @@
               </a:rPr>
               <a:t>Click to edit Master text styles</a:t>
             </a:r>
-            <a:endParaRPr lang="en-US" sz="3200" b="0" u="none" strike="noStrike">
-              <a:solidFill>
-                <a:schemeClr val="dk1"/>
-              </a:solidFill>
-              <a:effectLst/>
-              <a:uFillTx/>
-              <a:latin typeface="Calibri"/>
-            </a:endParaRPr>
           </a:p>
           <a:p>
             <a:pPr marL="743040" lvl="1" indent="-285840" algn="l" defTabSz="457200">
@@ -3512,14 +3327,6 @@
               </a:rPr>
               <a:t>Second level</a:t>
             </a:r>
-            <a:endParaRPr lang="en-US" sz="2800" b="0" u="none" strike="noStrike">
-              <a:solidFill>
-                <a:schemeClr val="dk1"/>
-              </a:solidFill>
-              <a:effectLst/>
-              <a:uFillTx/>
-              <a:latin typeface="Calibri"/>
-            </a:endParaRPr>
           </a:p>
           <a:p>
             <a:pPr marL="1143000" lvl="2" indent="-228600" algn="l" defTabSz="457200">
@@ -3546,14 +3353,6 @@
               </a:rPr>
               <a:t>Third level</a:t>
             </a:r>
-            <a:endParaRPr lang="en-US" sz="2400" b="0" u="none" strike="noStrike">
-              <a:solidFill>
-                <a:schemeClr val="dk1"/>
-              </a:solidFill>
-              <a:effectLst/>
-              <a:uFillTx/>
-              <a:latin typeface="Calibri"/>
-            </a:endParaRPr>
           </a:p>
           <a:p>
             <a:pPr marL="1600200" lvl="3" indent="-228600" algn="l" defTabSz="457200">
@@ -3580,14 +3379,6 @@
               </a:rPr>
               <a:t>Fourth level</a:t>
             </a:r>
-            <a:endParaRPr lang="en-US" sz="2000" b="0" u="none" strike="noStrike">
-              <a:solidFill>
-                <a:schemeClr val="dk1"/>
-              </a:solidFill>
-              <a:effectLst/>
-              <a:uFillTx/>
-              <a:latin typeface="Calibri"/>
-            </a:endParaRPr>
           </a:p>
           <a:p>
             <a:pPr marL="2057400" lvl="4" indent="-228600" algn="l" defTabSz="457200">
@@ -3614,14 +3405,6 @@
               </a:rPr>
               <a:t>Fifth level</a:t>
             </a:r>
-            <a:endParaRPr lang="en-US" sz="2000" b="0" u="none" strike="noStrike">
-              <a:solidFill>
-                <a:schemeClr val="dk1"/>
-              </a:solidFill>
-              <a:effectLst/>
-              <a:uFillTx/>
-              <a:latin typeface="Calibri"/>
-            </a:endParaRPr>
           </a:p>
         </p:txBody>
       </p:sp>
@@ -3774,14 +3557,6 @@
               </a:rPr>
               <a:t>&lt;rodapé&gt;</a:t>
             </a:r>
-            <a:endParaRPr lang="pt-BR" sz="1400" b="0" u="none" strike="noStrike">
-              <a:solidFill>
-                <a:srgbClr val="000000"/>
-              </a:solidFill>
-              <a:effectLst/>
-              <a:uFillTx/>
-              <a:latin typeface="Times New Roman"/>
-            </a:endParaRPr>
           </a:p>
         </p:txBody>
       </p:sp>
@@ -3854,7 +3629,7 @@
                 <a:uFillTx/>
                 <a:latin typeface="Calibri"/>
               </a:rPr>
-              <a:t>&lt;número&gt;</a:t>
+              <a:t>‹nº›</a:t>
             </a:fld>
             <a:endParaRPr lang="pt-BR" sz="1200" b="0" u="none" strike="noStrike">
               <a:solidFill>
@@ -3869,17 +3644,21 @@
       </p:sp>
     </p:spTree>
   </p:cSld>
+  <p:clrMapOvr>
+    <a:masterClrMapping/>
+  </p:clrMapOvr>
 </p:sldLayout>
 </file>
 
 <file path=ppt/slideLayouts/slideLayout3.xml><?xml version="1.0" encoding="utf-8"?>
-<p:sldLayout xmlns:a="http://schemas.openxmlformats.org/drawingml/2006/main" xmlns:p="http://schemas.openxmlformats.org/presentationml/2006/main" xmlns:r="http://schemas.openxmlformats.org/officeDocument/2006/relationships" xmlns:p14="http://schemas.microsoft.com/office/powerpoint/2010/main" xmlns:p15="http://schemas.microsoft.com/office/powerpoint/2012/main" xmlns:mc="http://schemas.openxmlformats.org/markup-compatibility/2006" type="vertTitleAndTx" preserve="1">
+<p:sldLayout xmlns:a="http://schemas.openxmlformats.org/drawingml/2006/main" xmlns:r="http://schemas.openxmlformats.org/officeDocument/2006/relationships" xmlns:p="http://schemas.openxmlformats.org/presentationml/2006/main" type="vertTitleAndTx" preserve="1">
   <p:cSld name="Vertical Title and Text">
     <p:bg>
       <p:bgPr>
         <a:solidFill>
           <a:srgbClr val="FFFFFF"/>
         </a:solidFill>
+        <a:effectLst/>
       </p:bgPr>
     </p:bg>
     <p:spTree>
@@ -3920,7 +3699,7 @@
           </a:ln>
         </p:spPr>
         <p:txBody>
-          <a:bodyPr lIns="91440" tIns="45720" rIns="91440" bIns="45720" anchor="ctr" vert="eaVert">
+          <a:bodyPr vert="eaVert" lIns="91440" tIns="45720" rIns="91440" bIns="45720" anchor="ctr">
             <a:noAutofit/>
           </a:bodyPr>
           <a:lstStyle>
@@ -3963,14 +3742,6 @@
               </a:rPr>
               <a:t>Click to edit Master title style</a:t>
             </a:r>
-            <a:endParaRPr lang="en-US" sz="4400" b="0" u="none" strike="noStrike">
-              <a:solidFill>
-                <a:schemeClr val="dk1"/>
-              </a:solidFill>
-              <a:effectLst/>
-              <a:uFillTx/>
-              <a:latin typeface="Calibri"/>
-            </a:endParaRPr>
           </a:p>
         </p:txBody>
       </p:sp>
@@ -3998,7 +3769,7 @@
           </a:ln>
         </p:spPr>
         <p:txBody>
-          <a:bodyPr lIns="91440" tIns="45720" rIns="91440" bIns="45720" anchor="t" vert="eaVert">
+          <a:bodyPr vert="eaVert" lIns="91440" tIns="45720" rIns="91440" bIns="45720" anchor="t">
             <a:noAutofit/>
           </a:bodyPr>
           <a:lstStyle>
@@ -4133,14 +3904,6 @@
               </a:rPr>
               <a:t>Click to edit Master text styles</a:t>
             </a:r>
-            <a:endParaRPr lang="en-US" sz="3200" b="0" u="none" strike="noStrike">
-              <a:solidFill>
-                <a:schemeClr val="dk1"/>
-              </a:solidFill>
-              <a:effectLst/>
-              <a:uFillTx/>
-              <a:latin typeface="Calibri"/>
-            </a:endParaRPr>
           </a:p>
           <a:p>
             <a:pPr marL="743040" lvl="1" indent="-285840" algn="l" defTabSz="457200">
@@ -4167,14 +3930,6 @@
               </a:rPr>
               <a:t>Second level</a:t>
             </a:r>
-            <a:endParaRPr lang="en-US" sz="2800" b="0" u="none" strike="noStrike">
-              <a:solidFill>
-                <a:schemeClr val="dk1"/>
-              </a:solidFill>
-              <a:effectLst/>
-              <a:uFillTx/>
-              <a:latin typeface="Calibri"/>
-            </a:endParaRPr>
           </a:p>
           <a:p>
             <a:pPr marL="1143000" lvl="2" indent="-228600" algn="l" defTabSz="457200">
@@ -4201,14 +3956,6 @@
               </a:rPr>
               <a:t>Third level</a:t>
             </a:r>
-            <a:endParaRPr lang="en-US" sz="2400" b="0" u="none" strike="noStrike">
-              <a:solidFill>
-                <a:schemeClr val="dk1"/>
-              </a:solidFill>
-              <a:effectLst/>
-              <a:uFillTx/>
-              <a:latin typeface="Calibri"/>
-            </a:endParaRPr>
           </a:p>
           <a:p>
             <a:pPr marL="1600200" lvl="3" indent="-228600" algn="l" defTabSz="457200">
@@ -4235,14 +3982,6 @@
               </a:rPr>
               <a:t>Fourth level</a:t>
             </a:r>
-            <a:endParaRPr lang="en-US" sz="2000" b="0" u="none" strike="noStrike">
-              <a:solidFill>
-                <a:schemeClr val="dk1"/>
-              </a:solidFill>
-              <a:effectLst/>
-              <a:uFillTx/>
-              <a:latin typeface="Calibri"/>
-            </a:endParaRPr>
           </a:p>
           <a:p>
             <a:pPr marL="2057400" lvl="4" indent="-228600" algn="l" defTabSz="457200">
@@ -4269,14 +4008,6 @@
               </a:rPr>
               <a:t>Fifth level</a:t>
             </a:r>
-            <a:endParaRPr lang="en-US" sz="2000" b="0" u="none" strike="noStrike">
-              <a:solidFill>
-                <a:schemeClr val="dk1"/>
-              </a:solidFill>
-              <a:effectLst/>
-              <a:uFillTx/>
-              <a:latin typeface="Calibri"/>
-            </a:endParaRPr>
           </a:p>
         </p:txBody>
       </p:sp>
@@ -4429,14 +4160,6 @@
               </a:rPr>
               <a:t>&lt;rodapé&gt;</a:t>
             </a:r>
-            <a:endParaRPr lang="pt-BR" sz="1400" b="0" u="none" strike="noStrike">
-              <a:solidFill>
-                <a:srgbClr val="000000"/>
-              </a:solidFill>
-              <a:effectLst/>
-              <a:uFillTx/>
-              <a:latin typeface="Times New Roman"/>
-            </a:endParaRPr>
           </a:p>
         </p:txBody>
       </p:sp>
@@ -4509,7 +4232,7 @@
                 <a:uFillTx/>
                 <a:latin typeface="Calibri"/>
               </a:rPr>
-              <a:t>&lt;número&gt;</a:t>
+              <a:t>‹nº›</a:t>
             </a:fld>
             <a:endParaRPr lang="pt-BR" sz="1200" b="0" u="none" strike="noStrike">
               <a:solidFill>
@@ -4524,17 +4247,21 @@
       </p:sp>
     </p:spTree>
   </p:cSld>
+  <p:clrMapOvr>
+    <a:masterClrMapping/>
+  </p:clrMapOvr>
 </p:sldLayout>
 </file>
 
 <file path=ppt/slideLayouts/slideLayout4.xml><?xml version="1.0" encoding="utf-8"?>
-<p:sldLayout xmlns:a="http://schemas.openxmlformats.org/drawingml/2006/main" xmlns:p="http://schemas.openxmlformats.org/presentationml/2006/main" xmlns:r="http://schemas.openxmlformats.org/officeDocument/2006/relationships" xmlns:p14="http://schemas.microsoft.com/office/powerpoint/2010/main" xmlns:p15="http://schemas.microsoft.com/office/powerpoint/2012/main" xmlns:mc="http://schemas.openxmlformats.org/markup-compatibility/2006" type="obj" preserve="1">
+<p:sldLayout xmlns:a="http://schemas.openxmlformats.org/drawingml/2006/main" xmlns:r="http://schemas.openxmlformats.org/officeDocument/2006/relationships" xmlns:p="http://schemas.openxmlformats.org/presentationml/2006/main" type="obj" preserve="1">
   <p:cSld name="Title and Content">
     <p:bg>
       <p:bgPr>
         <a:solidFill>
           <a:srgbClr val="FFFFFF"/>
         </a:solidFill>
+        <a:effectLst/>
       </p:bgPr>
     </p:bg>
     <p:spTree>
@@ -4618,14 +4345,6 @@
               </a:rPr>
               <a:t>Click to edit Master title style</a:t>
             </a:r>
-            <a:endParaRPr lang="en-US" sz="4400" b="0" u="none" strike="noStrike">
-              <a:solidFill>
-                <a:schemeClr val="dk1"/>
-              </a:solidFill>
-              <a:effectLst/>
-              <a:uFillTx/>
-              <a:latin typeface="Calibri"/>
-            </a:endParaRPr>
           </a:p>
         </p:txBody>
       </p:sp>
@@ -4788,14 +4507,6 @@
               </a:rPr>
               <a:t>Click to edit Master text styles</a:t>
             </a:r>
-            <a:endParaRPr lang="en-US" sz="3200" b="0" u="none" strike="noStrike">
-              <a:solidFill>
-                <a:schemeClr val="dk1"/>
-              </a:solidFill>
-              <a:effectLst/>
-              <a:uFillTx/>
-              <a:latin typeface="Calibri"/>
-            </a:endParaRPr>
           </a:p>
           <a:p>
             <a:pPr marL="743040" lvl="1" indent="-285840" algn="l" defTabSz="457200">
@@ -4822,14 +4533,6 @@
               </a:rPr>
               <a:t>Second level</a:t>
             </a:r>
-            <a:endParaRPr lang="en-US" sz="2800" b="0" u="none" strike="noStrike">
-              <a:solidFill>
-                <a:schemeClr val="dk1"/>
-              </a:solidFill>
-              <a:effectLst/>
-              <a:uFillTx/>
-              <a:latin typeface="Calibri"/>
-            </a:endParaRPr>
           </a:p>
           <a:p>
             <a:pPr marL="1143000" lvl="2" indent="-228600" algn="l" defTabSz="457200">
@@ -4856,14 +4559,6 @@
               </a:rPr>
               <a:t>Third level</a:t>
             </a:r>
-            <a:endParaRPr lang="en-US" sz="2400" b="0" u="none" strike="noStrike">
-              <a:solidFill>
-                <a:schemeClr val="dk1"/>
-              </a:solidFill>
-              <a:effectLst/>
-              <a:uFillTx/>
-              <a:latin typeface="Calibri"/>
-            </a:endParaRPr>
           </a:p>
           <a:p>
             <a:pPr marL="1600200" lvl="3" indent="-228600" algn="l" defTabSz="457200">
@@ -4890,14 +4585,6 @@
               </a:rPr>
               <a:t>Fourth level</a:t>
             </a:r>
-            <a:endParaRPr lang="en-US" sz="2000" b="0" u="none" strike="noStrike">
-              <a:solidFill>
-                <a:schemeClr val="dk1"/>
-              </a:solidFill>
-              <a:effectLst/>
-              <a:uFillTx/>
-              <a:latin typeface="Calibri"/>
-            </a:endParaRPr>
           </a:p>
           <a:p>
             <a:pPr marL="2057400" lvl="4" indent="-228600" algn="l" defTabSz="457200">
@@ -4924,14 +4611,6 @@
               </a:rPr>
               <a:t>Fifth level</a:t>
             </a:r>
-            <a:endParaRPr lang="en-US" sz="2000" b="0" u="none" strike="noStrike">
-              <a:solidFill>
-                <a:schemeClr val="dk1"/>
-              </a:solidFill>
-              <a:effectLst/>
-              <a:uFillTx/>
-              <a:latin typeface="Calibri"/>
-            </a:endParaRPr>
           </a:p>
         </p:txBody>
       </p:sp>
@@ -5084,14 +4763,6 @@
               </a:rPr>
               <a:t>&lt;rodapé&gt;</a:t>
             </a:r>
-            <a:endParaRPr lang="pt-BR" sz="1400" b="0" u="none" strike="noStrike">
-              <a:solidFill>
-                <a:srgbClr val="000000"/>
-              </a:solidFill>
-              <a:effectLst/>
-              <a:uFillTx/>
-              <a:latin typeface="Times New Roman"/>
-            </a:endParaRPr>
           </a:p>
         </p:txBody>
       </p:sp>
@@ -5164,7 +4835,7 @@
                 <a:uFillTx/>
                 <a:latin typeface="Calibri"/>
               </a:rPr>
-              <a:t>&lt;número&gt;</a:t>
+              <a:t>‹nº›</a:t>
             </a:fld>
             <a:endParaRPr lang="pt-BR" sz="1200" b="0" u="none" strike="noStrike">
               <a:solidFill>
@@ -5179,17 +4850,21 @@
       </p:sp>
     </p:spTree>
   </p:cSld>
+  <p:clrMapOvr>
+    <a:masterClrMapping/>
+  </p:clrMapOvr>
 </p:sldLayout>
 </file>
 
 <file path=ppt/slideLayouts/slideLayout5.xml><?xml version="1.0" encoding="utf-8"?>
-<p:sldLayout xmlns:a="http://schemas.openxmlformats.org/drawingml/2006/main" xmlns:p="http://schemas.openxmlformats.org/presentationml/2006/main" xmlns:r="http://schemas.openxmlformats.org/officeDocument/2006/relationships" xmlns:p14="http://schemas.microsoft.com/office/powerpoint/2010/main" xmlns:p15="http://schemas.microsoft.com/office/powerpoint/2012/main" xmlns:mc="http://schemas.openxmlformats.org/markup-compatibility/2006" type="blank" preserve="1">
+<p:sldLayout xmlns:a="http://schemas.openxmlformats.org/drawingml/2006/main" xmlns:r="http://schemas.openxmlformats.org/officeDocument/2006/relationships" xmlns:p="http://schemas.openxmlformats.org/presentationml/2006/main" type="blank" preserve="1">
   <p:cSld name="Section Header">
     <p:bg>
       <p:bgPr>
         <a:solidFill>
           <a:srgbClr val="FFFFFF"/>
         </a:solidFill>
+        <a:effectLst/>
       </p:bgPr>
     </p:bg>
     <p:spTree>
@@ -5273,14 +4948,6 @@
               </a:rPr>
               <a:t>Click to edit Master title style</a:t>
             </a:r>
-            <a:endParaRPr lang="en-US" sz="4000" b="1" u="none" strike="noStrike" cap="all">
-              <a:solidFill>
-                <a:schemeClr val="dk1"/>
-              </a:solidFill>
-              <a:effectLst/>
-              <a:uFillTx/>
-              <a:latin typeface="Calibri"/>
-            </a:endParaRPr>
           </a:p>
         </p:txBody>
       </p:sp>
@@ -5361,16 +5028,6 @@
               </a:rPr>
               <a:t>Click to edit Master text styles</a:t>
             </a:r>
-            <a:endParaRPr lang="en-US" sz="2000" b="0" u="none" strike="noStrike">
-              <a:solidFill>
-                <a:schemeClr val="dk1">
-                  <a:tint val="75000"/>
-                </a:schemeClr>
-              </a:solidFill>
-              <a:effectLst/>
-              <a:uFillTx/>
-              <a:latin typeface="Calibri"/>
-            </a:endParaRPr>
           </a:p>
         </p:txBody>
       </p:sp>
@@ -5523,14 +5180,6 @@
               </a:rPr>
               <a:t>&lt;rodapé&gt;</a:t>
             </a:r>
-            <a:endParaRPr lang="pt-BR" sz="1400" b="0" u="none" strike="noStrike">
-              <a:solidFill>
-                <a:srgbClr val="000000"/>
-              </a:solidFill>
-              <a:effectLst/>
-              <a:uFillTx/>
-              <a:latin typeface="Times New Roman"/>
-            </a:endParaRPr>
           </a:p>
         </p:txBody>
       </p:sp>
@@ -5603,7 +5252,7 @@
                 <a:uFillTx/>
                 <a:latin typeface="Calibri"/>
               </a:rPr>
-              <a:t>&lt;número&gt;</a:t>
+              <a:t>‹nº›</a:t>
             </a:fld>
             <a:endParaRPr lang="pt-BR" sz="1200" b="0" u="none" strike="noStrike">
               <a:solidFill>
@@ -5618,17 +5267,21 @@
       </p:sp>
     </p:spTree>
   </p:cSld>
+  <p:clrMapOvr>
+    <a:masterClrMapping/>
+  </p:clrMapOvr>
 </p:sldLayout>
 </file>
 
 <file path=ppt/slideLayouts/slideLayout6.xml><?xml version="1.0" encoding="utf-8"?>
-<p:sldLayout xmlns:a="http://schemas.openxmlformats.org/drawingml/2006/main" xmlns:p="http://schemas.openxmlformats.org/presentationml/2006/main" xmlns:r="http://schemas.openxmlformats.org/officeDocument/2006/relationships" xmlns:p14="http://schemas.microsoft.com/office/powerpoint/2010/main" xmlns:p15="http://schemas.microsoft.com/office/powerpoint/2012/main" xmlns:mc="http://schemas.openxmlformats.org/markup-compatibility/2006" type="twoObj" preserve="1">
+<p:sldLayout xmlns:a="http://schemas.openxmlformats.org/drawingml/2006/main" xmlns:r="http://schemas.openxmlformats.org/officeDocument/2006/relationships" xmlns:p="http://schemas.openxmlformats.org/presentationml/2006/main" type="twoObj" preserve="1">
   <p:cSld name="Two Content">
     <p:bg>
       <p:bgPr>
         <a:solidFill>
           <a:srgbClr val="FFFFFF"/>
         </a:solidFill>
+        <a:effectLst/>
       </p:bgPr>
     </p:bg>
     <p:spTree>
@@ -5712,14 +5365,6 @@
               </a:rPr>
               <a:t>Click to edit Master title style</a:t>
             </a:r>
-            <a:endParaRPr lang="en-US" sz="4400" b="0" u="none" strike="noStrike">
-              <a:solidFill>
-                <a:schemeClr val="dk1"/>
-              </a:solidFill>
-              <a:effectLst/>
-              <a:uFillTx/>
-              <a:latin typeface="Calibri"/>
-            </a:endParaRPr>
           </a:p>
         </p:txBody>
       </p:sp>
@@ -5882,14 +5527,6 @@
               </a:rPr>
               <a:t>Click to edit Master text styles</a:t>
             </a:r>
-            <a:endParaRPr lang="en-US" sz="2800" b="0" u="none" strike="noStrike">
-              <a:solidFill>
-                <a:schemeClr val="dk1"/>
-              </a:solidFill>
-              <a:effectLst/>
-              <a:uFillTx/>
-              <a:latin typeface="Calibri"/>
-            </a:endParaRPr>
           </a:p>
           <a:p>
             <a:pPr marL="743040" lvl="1" indent="-285840" algn="l" defTabSz="457200">
@@ -5916,14 +5553,6 @@
               </a:rPr>
               <a:t>Second level</a:t>
             </a:r>
-            <a:endParaRPr lang="en-US" sz="2400" b="0" u="none" strike="noStrike">
-              <a:solidFill>
-                <a:schemeClr val="dk1"/>
-              </a:solidFill>
-              <a:effectLst/>
-              <a:uFillTx/>
-              <a:latin typeface="Calibri"/>
-            </a:endParaRPr>
           </a:p>
           <a:p>
             <a:pPr marL="1143000" lvl="2" indent="-228600" algn="l" defTabSz="457200">
@@ -5950,14 +5579,6 @@
               </a:rPr>
               <a:t>Third level</a:t>
             </a:r>
-            <a:endParaRPr lang="en-US" sz="2000" b="0" u="none" strike="noStrike">
-              <a:solidFill>
-                <a:schemeClr val="dk1"/>
-              </a:solidFill>
-              <a:effectLst/>
-              <a:uFillTx/>
-              <a:latin typeface="Calibri"/>
-            </a:endParaRPr>
           </a:p>
           <a:p>
             <a:pPr marL="1600200" lvl="3" indent="-228600" algn="l" defTabSz="457200">
@@ -5984,14 +5605,6 @@
               </a:rPr>
               <a:t>Fourth level</a:t>
             </a:r>
-            <a:endParaRPr lang="en-US" sz="1800" b="0" u="none" strike="noStrike">
-              <a:solidFill>
-                <a:schemeClr val="dk1"/>
-              </a:solidFill>
-              <a:effectLst/>
-              <a:uFillTx/>
-              <a:latin typeface="Calibri"/>
-            </a:endParaRPr>
           </a:p>
           <a:p>
             <a:pPr marL="2057400" lvl="4" indent="-228600" algn="l" defTabSz="457200">
@@ -6018,14 +5631,6 @@
               </a:rPr>
               <a:t>Fifth level</a:t>
             </a:r>
-            <a:endParaRPr lang="en-US" sz="1800" b="0" u="none" strike="noStrike">
-              <a:solidFill>
-                <a:schemeClr val="dk1"/>
-              </a:solidFill>
-              <a:effectLst/>
-              <a:uFillTx/>
-              <a:latin typeface="Calibri"/>
-            </a:endParaRPr>
           </a:p>
         </p:txBody>
       </p:sp>
@@ -6188,14 +5793,6 @@
               </a:rPr>
               <a:t>Click to edit Master text styles</a:t>
             </a:r>
-            <a:endParaRPr lang="en-US" sz="2800" b="0" u="none" strike="noStrike">
-              <a:solidFill>
-                <a:schemeClr val="dk1"/>
-              </a:solidFill>
-              <a:effectLst/>
-              <a:uFillTx/>
-              <a:latin typeface="Calibri"/>
-            </a:endParaRPr>
           </a:p>
           <a:p>
             <a:pPr marL="743040" lvl="1" indent="-285840" algn="l" defTabSz="457200">
@@ -6222,14 +5819,6 @@
               </a:rPr>
               <a:t>Second level</a:t>
             </a:r>
-            <a:endParaRPr lang="en-US" sz="2400" b="0" u="none" strike="noStrike">
-              <a:solidFill>
-                <a:schemeClr val="dk1"/>
-              </a:solidFill>
-              <a:effectLst/>
-              <a:uFillTx/>
-              <a:latin typeface="Calibri"/>
-            </a:endParaRPr>
           </a:p>
           <a:p>
             <a:pPr marL="1143000" lvl="2" indent="-228600" algn="l" defTabSz="457200">
@@ -6256,14 +5845,6 @@
               </a:rPr>
               <a:t>Third level</a:t>
             </a:r>
-            <a:endParaRPr lang="en-US" sz="2000" b="0" u="none" strike="noStrike">
-              <a:solidFill>
-                <a:schemeClr val="dk1"/>
-              </a:solidFill>
-              <a:effectLst/>
-              <a:uFillTx/>
-              <a:latin typeface="Calibri"/>
-            </a:endParaRPr>
           </a:p>
           <a:p>
             <a:pPr marL="1600200" lvl="3" indent="-228600" algn="l" defTabSz="457200">
@@ -6290,14 +5871,6 @@
               </a:rPr>
               <a:t>Fourth level</a:t>
             </a:r>
-            <a:endParaRPr lang="en-US" sz="1800" b="0" u="none" strike="noStrike">
-              <a:solidFill>
-                <a:schemeClr val="dk1"/>
-              </a:solidFill>
-              <a:effectLst/>
-              <a:uFillTx/>
-              <a:latin typeface="Calibri"/>
-            </a:endParaRPr>
           </a:p>
           <a:p>
             <a:pPr marL="2057400" lvl="4" indent="-228600" algn="l" defTabSz="457200">
@@ -6324,14 +5897,6 @@
               </a:rPr>
               <a:t>Fifth level</a:t>
             </a:r>
-            <a:endParaRPr lang="en-US" sz="1800" b="0" u="none" strike="noStrike">
-              <a:solidFill>
-                <a:schemeClr val="dk1"/>
-              </a:solidFill>
-              <a:effectLst/>
-              <a:uFillTx/>
-              <a:latin typeface="Calibri"/>
-            </a:endParaRPr>
           </a:p>
         </p:txBody>
       </p:sp>
@@ -6484,14 +6049,6 @@
               </a:rPr>
               <a:t>&lt;rodapé&gt;</a:t>
             </a:r>
-            <a:endParaRPr lang="pt-BR" sz="1400" b="0" u="none" strike="noStrike">
-              <a:solidFill>
-                <a:srgbClr val="000000"/>
-              </a:solidFill>
-              <a:effectLst/>
-              <a:uFillTx/>
-              <a:latin typeface="Times New Roman"/>
-            </a:endParaRPr>
           </a:p>
         </p:txBody>
       </p:sp>
@@ -6564,7 +6121,7 @@
                 <a:uFillTx/>
                 <a:latin typeface="Calibri"/>
               </a:rPr>
-              <a:t>&lt;número&gt;</a:t>
+              <a:t>‹nº›</a:t>
             </a:fld>
             <a:endParaRPr lang="pt-BR" sz="1200" b="0" u="none" strike="noStrike">
               <a:solidFill>
@@ -6579,17 +6136,21 @@
       </p:sp>
     </p:spTree>
   </p:cSld>
+  <p:clrMapOvr>
+    <a:masterClrMapping/>
+  </p:clrMapOvr>
 </p:sldLayout>
 </file>
 
 <file path=ppt/slideLayouts/slideLayout7.xml><?xml version="1.0" encoding="utf-8"?>
-<p:sldLayout xmlns:a="http://schemas.openxmlformats.org/drawingml/2006/main" xmlns:p="http://schemas.openxmlformats.org/presentationml/2006/main" xmlns:r="http://schemas.openxmlformats.org/officeDocument/2006/relationships" xmlns:p14="http://schemas.microsoft.com/office/powerpoint/2010/main" xmlns:p15="http://schemas.microsoft.com/office/powerpoint/2012/main" xmlns:mc="http://schemas.openxmlformats.org/markup-compatibility/2006" type="blank" preserve="1">
+<p:sldLayout xmlns:a="http://schemas.openxmlformats.org/drawingml/2006/main" xmlns:r="http://schemas.openxmlformats.org/officeDocument/2006/relationships" xmlns:p="http://schemas.openxmlformats.org/presentationml/2006/main" type="blank" preserve="1">
   <p:cSld name="Comparison">
     <p:bg>
       <p:bgPr>
         <a:solidFill>
           <a:srgbClr val="FFFFFF"/>
         </a:solidFill>
+        <a:effectLst/>
       </p:bgPr>
     </p:bg>
     <p:spTree>
@@ -6673,14 +6234,6 @@
               </a:rPr>
               <a:t>Click to edit Master title style</a:t>
             </a:r>
-            <a:endParaRPr lang="en-US" sz="4400" b="0" u="none" strike="noStrike">
-              <a:solidFill>
-                <a:schemeClr val="dk1"/>
-              </a:solidFill>
-              <a:effectLst/>
-              <a:uFillTx/>
-              <a:latin typeface="Calibri"/>
-            </a:endParaRPr>
           </a:p>
         </p:txBody>
       </p:sp>
@@ -6945,14 +6498,6 @@
               </a:rPr>
               <a:t>Click to edit Master text styles</a:t>
             </a:r>
-            <a:endParaRPr lang="en-US" sz="2400" b="0" u="none" strike="noStrike">
-              <a:solidFill>
-                <a:schemeClr val="dk1"/>
-              </a:solidFill>
-              <a:effectLst/>
-              <a:uFillTx/>
-              <a:latin typeface="Calibri"/>
-            </a:endParaRPr>
           </a:p>
           <a:p>
             <a:pPr marL="743040" lvl="1" indent="-285840" algn="l" defTabSz="457200">
@@ -6982,14 +6527,6 @@
               </a:rPr>
               <a:t>Second level</a:t>
             </a:r>
-            <a:endParaRPr lang="en-US" sz="2000" b="0" u="none" strike="noStrike">
-              <a:solidFill>
-                <a:schemeClr val="dk1"/>
-              </a:solidFill>
-              <a:effectLst/>
-              <a:uFillTx/>
-              <a:latin typeface="Calibri"/>
-            </a:endParaRPr>
           </a:p>
           <a:p>
             <a:pPr marL="1143000" lvl="2" indent="-228600" algn="l" defTabSz="457200">
@@ -7019,14 +6556,6 @@
               </a:rPr>
               <a:t>Third level</a:t>
             </a:r>
-            <a:endParaRPr lang="en-US" sz="1800" b="0" u="none" strike="noStrike">
-              <a:solidFill>
-                <a:schemeClr val="dk1"/>
-              </a:solidFill>
-              <a:effectLst/>
-              <a:uFillTx/>
-              <a:latin typeface="Calibri"/>
-            </a:endParaRPr>
           </a:p>
           <a:p>
             <a:pPr marL="1600200" lvl="3" indent="-228600" algn="l" defTabSz="457200">
@@ -7056,14 +6585,6 @@
               </a:rPr>
               <a:t>Fourth level</a:t>
             </a:r>
-            <a:endParaRPr lang="en-US" sz="1600" b="0" u="none" strike="noStrike">
-              <a:solidFill>
-                <a:schemeClr val="dk1"/>
-              </a:solidFill>
-              <a:effectLst/>
-              <a:uFillTx/>
-              <a:latin typeface="Calibri"/>
-            </a:endParaRPr>
           </a:p>
           <a:p>
             <a:pPr marL="2057400" lvl="4" indent="-228600" algn="l" defTabSz="457200">
@@ -7093,14 +6614,6 @@
               </a:rPr>
               <a:t>Fifth level</a:t>
             </a:r>
-            <a:endParaRPr lang="en-US" sz="1600" b="0" u="none" strike="noStrike">
-              <a:solidFill>
-                <a:schemeClr val="dk1"/>
-              </a:solidFill>
-              <a:effectLst/>
-              <a:uFillTx/>
-              <a:latin typeface="Calibri"/>
-            </a:endParaRPr>
           </a:p>
         </p:txBody>
       </p:sp>
@@ -7365,14 +6878,6 @@
               </a:rPr>
               <a:t>Click to edit Master text styles</a:t>
             </a:r>
-            <a:endParaRPr lang="en-US" sz="2400" b="0" u="none" strike="noStrike">
-              <a:solidFill>
-                <a:schemeClr val="dk1"/>
-              </a:solidFill>
-              <a:effectLst/>
-              <a:uFillTx/>
-              <a:latin typeface="Calibri"/>
-            </a:endParaRPr>
           </a:p>
           <a:p>
             <a:pPr marL="743040" lvl="1" indent="-285840" algn="l" defTabSz="457200">
@@ -7402,14 +6907,6 @@
               </a:rPr>
               <a:t>Second level</a:t>
             </a:r>
-            <a:endParaRPr lang="en-US" sz="2000" b="0" u="none" strike="noStrike">
-              <a:solidFill>
-                <a:schemeClr val="dk1"/>
-              </a:solidFill>
-              <a:effectLst/>
-              <a:uFillTx/>
-              <a:latin typeface="Calibri"/>
-            </a:endParaRPr>
           </a:p>
           <a:p>
             <a:pPr marL="1143000" lvl="2" indent="-228600" algn="l" defTabSz="457200">
@@ -7439,14 +6936,6 @@
               </a:rPr>
               <a:t>Third level</a:t>
             </a:r>
-            <a:endParaRPr lang="en-US" sz="1800" b="0" u="none" strike="noStrike">
-              <a:solidFill>
-                <a:schemeClr val="dk1"/>
-              </a:solidFill>
-              <a:effectLst/>
-              <a:uFillTx/>
-              <a:latin typeface="Calibri"/>
-            </a:endParaRPr>
           </a:p>
           <a:p>
             <a:pPr marL="1600200" lvl="3" indent="-228600" algn="l" defTabSz="457200">
@@ -7476,14 +6965,6 @@
               </a:rPr>
               <a:t>Fourth level</a:t>
             </a:r>
-            <a:endParaRPr lang="en-US" sz="1600" b="0" u="none" strike="noStrike">
-              <a:solidFill>
-                <a:schemeClr val="dk1"/>
-              </a:solidFill>
-              <a:effectLst/>
-              <a:uFillTx/>
-              <a:latin typeface="Calibri"/>
-            </a:endParaRPr>
           </a:p>
           <a:p>
             <a:pPr marL="2057400" lvl="4" indent="-228600" algn="l" defTabSz="457200">
@@ -7513,14 +6994,6 @@
               </a:rPr>
               <a:t>Fifth level</a:t>
             </a:r>
-            <a:endParaRPr lang="en-US" sz="1600" b="0" u="none" strike="noStrike">
-              <a:solidFill>
-                <a:schemeClr val="dk1"/>
-              </a:solidFill>
-              <a:effectLst/>
-              <a:uFillTx/>
-              <a:latin typeface="Calibri"/>
-            </a:endParaRPr>
           </a:p>
         </p:txBody>
       </p:sp>
@@ -7673,14 +7146,6 @@
               </a:rPr>
               <a:t>&lt;rodapé&gt;</a:t>
             </a:r>
-            <a:endParaRPr lang="pt-BR" sz="1400" b="0" u="none" strike="noStrike">
-              <a:solidFill>
-                <a:srgbClr val="000000"/>
-              </a:solidFill>
-              <a:effectLst/>
-              <a:uFillTx/>
-              <a:latin typeface="Times New Roman"/>
-            </a:endParaRPr>
           </a:p>
         </p:txBody>
       </p:sp>
@@ -7753,7 +7218,7 @@
                 <a:uFillTx/>
                 <a:latin typeface="Calibri"/>
               </a:rPr>
-              <a:t>&lt;número&gt;</a:t>
+              <a:t>‹nº›</a:t>
             </a:fld>
             <a:endParaRPr lang="pt-BR" sz="1200" b="0" u="none" strike="noStrike">
               <a:solidFill>
@@ -7768,17 +7233,21 @@
       </p:sp>
     </p:spTree>
   </p:cSld>
+  <p:clrMapOvr>
+    <a:masterClrMapping/>
+  </p:clrMapOvr>
 </p:sldLayout>
 </file>
 
 <file path=ppt/slideLayouts/slideLayout8.xml><?xml version="1.0" encoding="utf-8"?>
-<p:sldLayout xmlns:a="http://schemas.openxmlformats.org/drawingml/2006/main" xmlns:p="http://schemas.openxmlformats.org/presentationml/2006/main" xmlns:r="http://schemas.openxmlformats.org/officeDocument/2006/relationships" xmlns:p14="http://schemas.microsoft.com/office/powerpoint/2010/main" xmlns:p15="http://schemas.microsoft.com/office/powerpoint/2012/main" xmlns:mc="http://schemas.openxmlformats.org/markup-compatibility/2006" type="titleOnly" preserve="1">
+<p:sldLayout xmlns:a="http://schemas.openxmlformats.org/drawingml/2006/main" xmlns:r="http://schemas.openxmlformats.org/officeDocument/2006/relationships" xmlns:p="http://schemas.openxmlformats.org/presentationml/2006/main" type="titleOnly" preserve="1">
   <p:cSld name="Title Only">
     <p:bg>
       <p:bgPr>
         <a:solidFill>
           <a:srgbClr val="FFFFFF"/>
         </a:solidFill>
+        <a:effectLst/>
       </p:bgPr>
     </p:bg>
     <p:spTree>
@@ -7862,14 +7331,6 @@
               </a:rPr>
               <a:t>Click to edit Master title style</a:t>
             </a:r>
-            <a:endParaRPr lang="en-US" sz="4400" b="0" u="none" strike="noStrike">
-              <a:solidFill>
-                <a:schemeClr val="dk1"/>
-              </a:solidFill>
-              <a:effectLst/>
-              <a:uFillTx/>
-              <a:latin typeface="Calibri"/>
-            </a:endParaRPr>
           </a:p>
         </p:txBody>
       </p:sp>
@@ -8022,14 +7483,6 @@
               </a:rPr>
               <a:t>&lt;rodapé&gt;</a:t>
             </a:r>
-            <a:endParaRPr lang="pt-BR" sz="1400" b="0" u="none" strike="noStrike">
-              <a:solidFill>
-                <a:srgbClr val="000000"/>
-              </a:solidFill>
-              <a:effectLst/>
-              <a:uFillTx/>
-              <a:latin typeface="Times New Roman"/>
-            </a:endParaRPr>
           </a:p>
         </p:txBody>
       </p:sp>
@@ -8102,7 +7555,7 @@
                 <a:uFillTx/>
                 <a:latin typeface="Calibri"/>
               </a:rPr>
-              <a:t>&lt;número&gt;</a:t>
+              <a:t>‹nº›</a:t>
             </a:fld>
             <a:endParaRPr lang="pt-BR" sz="1200" b="0" u="none" strike="noStrike">
               <a:solidFill>
@@ -8117,17 +7570,21 @@
       </p:sp>
     </p:spTree>
   </p:cSld>
+  <p:clrMapOvr>
+    <a:masterClrMapping/>
+  </p:clrMapOvr>
 </p:sldLayout>
 </file>
 
 <file path=ppt/slideLayouts/slideLayout9.xml><?xml version="1.0" encoding="utf-8"?>
-<p:sldLayout xmlns:a="http://schemas.openxmlformats.org/drawingml/2006/main" xmlns:p="http://schemas.openxmlformats.org/presentationml/2006/main" xmlns:r="http://schemas.openxmlformats.org/officeDocument/2006/relationships" xmlns:p14="http://schemas.microsoft.com/office/powerpoint/2010/main" xmlns:p15="http://schemas.microsoft.com/office/powerpoint/2012/main" xmlns:mc="http://schemas.openxmlformats.org/markup-compatibility/2006" type="blank" preserve="1">
+<p:sldLayout xmlns:a="http://schemas.openxmlformats.org/drawingml/2006/main" xmlns:r="http://schemas.openxmlformats.org/officeDocument/2006/relationships" xmlns:p="http://schemas.openxmlformats.org/presentationml/2006/main" type="blank" preserve="1">
   <p:cSld name="Blank">
     <p:bg>
       <p:bgPr>
         <a:solidFill>
           <a:srgbClr val="FFFFFF"/>
         </a:solidFill>
+        <a:effectLst/>
       </p:bgPr>
     </p:bg>
     <p:spTree>
@@ -8293,14 +7750,6 @@
               </a:rPr>
               <a:t>&lt;rodapé&gt;</a:t>
             </a:r>
-            <a:endParaRPr lang="pt-BR" sz="1400" b="0" u="none" strike="noStrike">
-              <a:solidFill>
-                <a:srgbClr val="000000"/>
-              </a:solidFill>
-              <a:effectLst/>
-              <a:uFillTx/>
-              <a:latin typeface="Times New Roman"/>
-            </a:endParaRPr>
           </a:p>
         </p:txBody>
       </p:sp>
@@ -8373,7 +7822,7 @@
                 <a:uFillTx/>
                 <a:latin typeface="Calibri"/>
               </a:rPr>
-              <a:t>&lt;número&gt;</a:t>
+              <a:t>‹nº›</a:t>
             </a:fld>
             <a:endParaRPr lang="pt-BR" sz="1200" b="0" u="none" strike="noStrike">
               <a:solidFill>
@@ -8388,12 +7837,20 @@
       </p:sp>
     </p:spTree>
   </p:cSld>
+  <p:clrMapOvr>
+    <a:masterClrMapping/>
+  </p:clrMapOvr>
 </p:sldLayout>
 </file>
 
 <file path=ppt/slideMasters/slideMaster1.xml><?xml version="1.0" encoding="utf-8"?>
-<p:sldMaster xmlns:a="http://schemas.openxmlformats.org/drawingml/2006/main" xmlns:p="http://schemas.openxmlformats.org/presentationml/2006/main" xmlns:r="http://schemas.openxmlformats.org/officeDocument/2006/relationships" xmlns:p14="http://schemas.microsoft.com/office/powerpoint/2010/main" xmlns:p15="http://schemas.microsoft.com/office/powerpoint/2012/main" xmlns:mc="http://schemas.openxmlformats.org/markup-compatibility/2006">
+<p:sldMaster xmlns:a="http://schemas.openxmlformats.org/drawingml/2006/main" xmlns:r="http://schemas.openxmlformats.org/officeDocument/2006/relationships" xmlns:p="http://schemas.openxmlformats.org/presentationml/2006/main">
   <p:cSld>
+    <p:bg>
+      <p:bgRef idx="1001">
+        <a:schemeClr val="bg1"/>
+      </p:bgRef>
+    </p:bg>
     <p:spTree>
       <p:nvGrpSpPr>
         <p:cNvPr id="1" name=""/>
@@ -8412,24 +7869,304 @@
   </p:cSld>
   <p:clrMap bg1="lt1" tx1="dk1" bg2="lt2" tx2="dk2" accent1="accent1" accent2="accent2" accent3="accent3" accent4="accent4" accent5="accent5" accent6="accent6" hlink="hlink" folHlink="folHlink"/>
   <p:sldLayoutIdLst>
-    <p:sldLayoutId id="2147483649" r:id="rId2"/>
-    <p:sldLayoutId id="2147483650" r:id="rId3"/>
-    <p:sldLayoutId id="2147483651" r:id="rId4"/>
-    <p:sldLayoutId id="2147483652" r:id="rId5"/>
-    <p:sldLayoutId id="2147483653" r:id="rId6"/>
-    <p:sldLayoutId id="2147483654" r:id="rId7"/>
-    <p:sldLayoutId id="2147483655" r:id="rId8"/>
-    <p:sldLayoutId id="2147483656" r:id="rId9"/>
-    <p:sldLayoutId id="2147483657" r:id="rId10"/>
-    <p:sldLayoutId id="2147483658" r:id="rId11"/>
-    <p:sldLayoutId id="2147483659" r:id="rId12"/>
-    <p:sldLayoutId id="2147483660" r:id="rId13"/>
+    <p:sldLayoutId id="2147483649" r:id="rId1"/>
+    <p:sldLayoutId id="2147483650" r:id="rId2"/>
+    <p:sldLayoutId id="2147483651" r:id="rId3"/>
+    <p:sldLayoutId id="2147483652" r:id="rId4"/>
+    <p:sldLayoutId id="2147483653" r:id="rId5"/>
+    <p:sldLayoutId id="2147483654" r:id="rId6"/>
+    <p:sldLayoutId id="2147483655" r:id="rId7"/>
+    <p:sldLayoutId id="2147483656" r:id="rId8"/>
+    <p:sldLayoutId id="2147483657" r:id="rId9"/>
+    <p:sldLayoutId id="2147483658" r:id="rId10"/>
+    <p:sldLayoutId id="2147483659" r:id="rId11"/>
+    <p:sldLayoutId id="2147483660" r:id="rId12"/>
   </p:sldLayoutIdLst>
+  <p:txStyles>
+    <p:titleStyle>
+      <a:lvl1pPr algn="l" defTabSz="914400" rtl="0" eaLnBrk="1" latinLnBrk="0" hangingPunct="1">
+        <a:lnSpc>
+          <a:spcPct val="90000"/>
+        </a:lnSpc>
+        <a:spcBef>
+          <a:spcPct val="0"/>
+        </a:spcBef>
+        <a:buNone/>
+        <a:defRPr sz="4400" kern="1200">
+          <a:solidFill>
+            <a:schemeClr val="tx1"/>
+          </a:solidFill>
+          <a:latin typeface="+mj-lt"/>
+          <a:ea typeface="+mj-ea"/>
+          <a:cs typeface="+mj-cs"/>
+        </a:defRPr>
+      </a:lvl1pPr>
+    </p:titleStyle>
+    <p:bodyStyle>
+      <a:lvl1pPr marL="228600" indent="-228600" algn="l" defTabSz="914400" rtl="0" eaLnBrk="1" latinLnBrk="0" hangingPunct="1">
+        <a:lnSpc>
+          <a:spcPct val="90000"/>
+        </a:lnSpc>
+        <a:spcBef>
+          <a:spcPts val="1000"/>
+        </a:spcBef>
+        <a:buFont typeface="Arial" panose="020B0604020202020204" pitchFamily="34" charset="0"/>
+        <a:buChar char="•"/>
+        <a:defRPr sz="2800" kern="1200">
+          <a:solidFill>
+            <a:schemeClr val="tx1"/>
+          </a:solidFill>
+          <a:latin typeface="+mn-lt"/>
+          <a:ea typeface="+mn-ea"/>
+          <a:cs typeface="+mn-cs"/>
+        </a:defRPr>
+      </a:lvl1pPr>
+      <a:lvl2pPr marL="685800" indent="-228600" algn="l" defTabSz="914400" rtl="0" eaLnBrk="1" latinLnBrk="0" hangingPunct="1">
+        <a:lnSpc>
+          <a:spcPct val="90000"/>
+        </a:lnSpc>
+        <a:spcBef>
+          <a:spcPts val="500"/>
+        </a:spcBef>
+        <a:buFont typeface="Arial" panose="020B0604020202020204" pitchFamily="34" charset="0"/>
+        <a:buChar char="•"/>
+        <a:defRPr sz="2400" kern="1200">
+          <a:solidFill>
+            <a:schemeClr val="tx1"/>
+          </a:solidFill>
+          <a:latin typeface="+mn-lt"/>
+          <a:ea typeface="+mn-ea"/>
+          <a:cs typeface="+mn-cs"/>
+        </a:defRPr>
+      </a:lvl2pPr>
+      <a:lvl3pPr marL="1143000" indent="-228600" algn="l" defTabSz="914400" rtl="0" eaLnBrk="1" latinLnBrk="0" hangingPunct="1">
+        <a:lnSpc>
+          <a:spcPct val="90000"/>
+        </a:lnSpc>
+        <a:spcBef>
+          <a:spcPts val="500"/>
+        </a:spcBef>
+        <a:buFont typeface="Arial" panose="020B0604020202020204" pitchFamily="34" charset="0"/>
+        <a:buChar char="•"/>
+        <a:defRPr sz="2000" kern="1200">
+          <a:solidFill>
+            <a:schemeClr val="tx1"/>
+          </a:solidFill>
+          <a:latin typeface="+mn-lt"/>
+          <a:ea typeface="+mn-ea"/>
+          <a:cs typeface="+mn-cs"/>
+        </a:defRPr>
+      </a:lvl3pPr>
+      <a:lvl4pPr marL="1600200" indent="-228600" algn="l" defTabSz="914400" rtl="0" eaLnBrk="1" latinLnBrk="0" hangingPunct="1">
+        <a:lnSpc>
+          <a:spcPct val="90000"/>
+        </a:lnSpc>
+        <a:spcBef>
+          <a:spcPts val="500"/>
+        </a:spcBef>
+        <a:buFont typeface="Arial" panose="020B0604020202020204" pitchFamily="34" charset="0"/>
+        <a:buChar char="•"/>
+        <a:defRPr sz="1800" kern="1200">
+          <a:solidFill>
+            <a:schemeClr val="tx1"/>
+          </a:solidFill>
+          <a:latin typeface="+mn-lt"/>
+          <a:ea typeface="+mn-ea"/>
+          <a:cs typeface="+mn-cs"/>
+        </a:defRPr>
+      </a:lvl4pPr>
+      <a:lvl5pPr marL="2057400" indent="-228600" algn="l" defTabSz="914400" rtl="0" eaLnBrk="1" latinLnBrk="0" hangingPunct="1">
+        <a:lnSpc>
+          <a:spcPct val="90000"/>
+        </a:lnSpc>
+        <a:spcBef>
+          <a:spcPts val="500"/>
+        </a:spcBef>
+        <a:buFont typeface="Arial" panose="020B0604020202020204" pitchFamily="34" charset="0"/>
+        <a:buChar char="•"/>
+        <a:defRPr sz="1800" kern="1200">
+          <a:solidFill>
+            <a:schemeClr val="tx1"/>
+          </a:solidFill>
+          <a:latin typeface="+mn-lt"/>
+          <a:ea typeface="+mn-ea"/>
+          <a:cs typeface="+mn-cs"/>
+        </a:defRPr>
+      </a:lvl5pPr>
+      <a:lvl6pPr marL="2514600" indent="-228600" algn="l" defTabSz="914400" rtl="0" eaLnBrk="1" latinLnBrk="0" hangingPunct="1">
+        <a:lnSpc>
+          <a:spcPct val="90000"/>
+        </a:lnSpc>
+        <a:spcBef>
+          <a:spcPts val="500"/>
+        </a:spcBef>
+        <a:buFont typeface="Arial" panose="020B0604020202020204" pitchFamily="34" charset="0"/>
+        <a:buChar char="•"/>
+        <a:defRPr sz="1800" kern="1200">
+          <a:solidFill>
+            <a:schemeClr val="tx1"/>
+          </a:solidFill>
+          <a:latin typeface="+mn-lt"/>
+          <a:ea typeface="+mn-ea"/>
+          <a:cs typeface="+mn-cs"/>
+        </a:defRPr>
+      </a:lvl6pPr>
+      <a:lvl7pPr marL="2971800" indent="-228600" algn="l" defTabSz="914400" rtl="0" eaLnBrk="1" latinLnBrk="0" hangingPunct="1">
+        <a:lnSpc>
+          <a:spcPct val="90000"/>
+        </a:lnSpc>
+        <a:spcBef>
+          <a:spcPts val="500"/>
+        </a:spcBef>
+        <a:buFont typeface="Arial" panose="020B0604020202020204" pitchFamily="34" charset="0"/>
+        <a:buChar char="•"/>
+        <a:defRPr sz="1800" kern="1200">
+          <a:solidFill>
+            <a:schemeClr val="tx1"/>
+          </a:solidFill>
+          <a:latin typeface="+mn-lt"/>
+          <a:ea typeface="+mn-ea"/>
+          <a:cs typeface="+mn-cs"/>
+        </a:defRPr>
+      </a:lvl7pPr>
+      <a:lvl8pPr marL="3429000" indent="-228600" algn="l" defTabSz="914400" rtl="0" eaLnBrk="1" latinLnBrk="0" hangingPunct="1">
+        <a:lnSpc>
+          <a:spcPct val="90000"/>
+        </a:lnSpc>
+        <a:spcBef>
+          <a:spcPts val="500"/>
+        </a:spcBef>
+        <a:buFont typeface="Arial" panose="020B0604020202020204" pitchFamily="34" charset="0"/>
+        <a:buChar char="•"/>
+        <a:defRPr sz="1800" kern="1200">
+          <a:solidFill>
+            <a:schemeClr val="tx1"/>
+          </a:solidFill>
+          <a:latin typeface="+mn-lt"/>
+          <a:ea typeface="+mn-ea"/>
+          <a:cs typeface="+mn-cs"/>
+        </a:defRPr>
+      </a:lvl8pPr>
+      <a:lvl9pPr marL="3886200" indent="-228600" algn="l" defTabSz="914400" rtl="0" eaLnBrk="1" latinLnBrk="0" hangingPunct="1">
+        <a:lnSpc>
+          <a:spcPct val="90000"/>
+        </a:lnSpc>
+        <a:spcBef>
+          <a:spcPts val="500"/>
+        </a:spcBef>
+        <a:buFont typeface="Arial" panose="020B0604020202020204" pitchFamily="34" charset="0"/>
+        <a:buChar char="•"/>
+        <a:defRPr sz="1800" kern="1200">
+          <a:solidFill>
+            <a:schemeClr val="tx1"/>
+          </a:solidFill>
+          <a:latin typeface="+mn-lt"/>
+          <a:ea typeface="+mn-ea"/>
+          <a:cs typeface="+mn-cs"/>
+        </a:defRPr>
+      </a:lvl9pPr>
+    </p:bodyStyle>
+    <p:otherStyle>
+      <a:defPPr>
+        <a:defRPr lang="pt-BR"/>
+      </a:defPPr>
+      <a:lvl1pPr marL="0" algn="l" defTabSz="914400" rtl="0" eaLnBrk="1" latinLnBrk="0" hangingPunct="1">
+        <a:defRPr sz="1800" kern="1200">
+          <a:solidFill>
+            <a:schemeClr val="tx1"/>
+          </a:solidFill>
+          <a:latin typeface="+mn-lt"/>
+          <a:ea typeface="+mn-ea"/>
+          <a:cs typeface="+mn-cs"/>
+        </a:defRPr>
+      </a:lvl1pPr>
+      <a:lvl2pPr marL="457200" algn="l" defTabSz="914400" rtl="0" eaLnBrk="1" latinLnBrk="0" hangingPunct="1">
+        <a:defRPr sz="1800" kern="1200">
+          <a:solidFill>
+            <a:schemeClr val="tx1"/>
+          </a:solidFill>
+          <a:latin typeface="+mn-lt"/>
+          <a:ea typeface="+mn-ea"/>
+          <a:cs typeface="+mn-cs"/>
+        </a:defRPr>
+      </a:lvl2pPr>
+      <a:lvl3pPr marL="914400" algn="l" defTabSz="914400" rtl="0" eaLnBrk="1" latinLnBrk="0" hangingPunct="1">
+        <a:defRPr sz="1800" kern="1200">
+          <a:solidFill>
+            <a:schemeClr val="tx1"/>
+          </a:solidFill>
+          <a:latin typeface="+mn-lt"/>
+          <a:ea typeface="+mn-ea"/>
+          <a:cs typeface="+mn-cs"/>
+        </a:defRPr>
+      </a:lvl3pPr>
+      <a:lvl4pPr marL="1371600" algn="l" defTabSz="914400" rtl="0" eaLnBrk="1" latinLnBrk="0" hangingPunct="1">
+        <a:defRPr sz="1800" kern="1200">
+          <a:solidFill>
+            <a:schemeClr val="tx1"/>
+          </a:solidFill>
+          <a:latin typeface="+mn-lt"/>
+          <a:ea typeface="+mn-ea"/>
+          <a:cs typeface="+mn-cs"/>
+        </a:defRPr>
+      </a:lvl4pPr>
+      <a:lvl5pPr marL="1828800" algn="l" defTabSz="914400" rtl="0" eaLnBrk="1" latinLnBrk="0" hangingPunct="1">
+        <a:defRPr sz="1800" kern="1200">
+          <a:solidFill>
+            <a:schemeClr val="tx1"/>
+          </a:solidFill>
+          <a:latin typeface="+mn-lt"/>
+          <a:ea typeface="+mn-ea"/>
+          <a:cs typeface="+mn-cs"/>
+        </a:defRPr>
+      </a:lvl5pPr>
+      <a:lvl6pPr marL="2286000" algn="l" defTabSz="914400" rtl="0" eaLnBrk="1" latinLnBrk="0" hangingPunct="1">
+        <a:defRPr sz="1800" kern="1200">
+          <a:solidFill>
+            <a:schemeClr val="tx1"/>
+          </a:solidFill>
+          <a:latin typeface="+mn-lt"/>
+          <a:ea typeface="+mn-ea"/>
+          <a:cs typeface="+mn-cs"/>
+        </a:defRPr>
+      </a:lvl6pPr>
+      <a:lvl7pPr marL="2743200" algn="l" defTabSz="914400" rtl="0" eaLnBrk="1" latinLnBrk="0" hangingPunct="1">
+        <a:defRPr sz="1800" kern="1200">
+          <a:solidFill>
+            <a:schemeClr val="tx1"/>
+          </a:solidFill>
+          <a:latin typeface="+mn-lt"/>
+          <a:ea typeface="+mn-ea"/>
+          <a:cs typeface="+mn-cs"/>
+        </a:defRPr>
+      </a:lvl7pPr>
+      <a:lvl8pPr marL="3200400" algn="l" defTabSz="914400" rtl="0" eaLnBrk="1" latinLnBrk="0" hangingPunct="1">
+        <a:defRPr sz="1800" kern="1200">
+          <a:solidFill>
+            <a:schemeClr val="tx1"/>
+          </a:solidFill>
+          <a:latin typeface="+mn-lt"/>
+          <a:ea typeface="+mn-ea"/>
+          <a:cs typeface="+mn-cs"/>
+        </a:defRPr>
+      </a:lvl8pPr>
+      <a:lvl9pPr marL="3657600" algn="l" defTabSz="914400" rtl="0" eaLnBrk="1" latinLnBrk="0" hangingPunct="1">
+        <a:defRPr sz="1800" kern="1200">
+          <a:solidFill>
+            <a:schemeClr val="tx1"/>
+          </a:solidFill>
+          <a:latin typeface="+mn-lt"/>
+          <a:ea typeface="+mn-ea"/>
+          <a:cs typeface="+mn-cs"/>
+        </a:defRPr>
+      </a:lvl9pPr>
+    </p:otherStyle>
+  </p:txStyles>
 </p:sldMaster>
 </file>
 
 <file path=ppt/slides/slide1.xml><?xml version="1.0" encoding="utf-8"?>
-<p:sld xmlns:a="http://schemas.openxmlformats.org/drawingml/2006/main" xmlns:p="http://schemas.openxmlformats.org/presentationml/2006/main" xmlns:r="http://schemas.openxmlformats.org/officeDocument/2006/relationships" xmlns:p14="http://schemas.microsoft.com/office/powerpoint/2010/main" xmlns:p15="http://schemas.microsoft.com/office/powerpoint/2012/main" xmlns:mc="http://schemas.openxmlformats.org/markup-compatibility/2006">
+<p:sld xmlns:a="http://schemas.openxmlformats.org/drawingml/2006/main" xmlns:r="http://schemas.openxmlformats.org/officeDocument/2006/relationships" xmlns:p="http://schemas.openxmlformats.org/presentationml/2006/main">
   <p:cSld>
     <p:spTree>
       <p:nvGrpSpPr>
@@ -8457,7 +8194,7 @@
         </p:nvSpPr>
         <p:spPr>
           <a:xfrm>
-            <a:off x="685800" y="2130480"/>
+            <a:off x="685800" y="1951560"/>
             <a:ext cx="7770960" cy="1468440"/>
           </a:xfrm>
           <a:prstGeom prst="rect">
@@ -8472,6 +8209,7 @@
           <a:bodyPr lIns="91440" tIns="45720" rIns="91440" bIns="45720" anchor="ctr">
             <a:noAutofit/>
           </a:bodyPr>
+          <a:lstStyle/>
           <a:p>
             <a:pPr indent="0" algn="ctr" defTabSz="457200">
               <a:lnSpc>
@@ -8483,9 +8221,9 @@
               </a:tabLst>
             </a:pPr>
             <a:r>
-              <a:rPr lang="en-US" sz="4400" b="0" u="none" strike="noStrike">
-                <a:solidFill>
-                  <a:schemeClr val="dk1"/>
+              <a:rPr lang="en-US" sz="4400" b="0" u="none" strike="noStrike" dirty="0">
+                <a:solidFill>
+                  <a:schemeClr val="tx2"/>
                 </a:solidFill>
                 <a:effectLst/>
                 <a:uFillTx/>
@@ -8493,14 +8231,6 @@
               </a:rPr>
               <a:t>Sprint Review</a:t>
             </a:r>
-            <a:endParaRPr lang="en-US" sz="4400" b="0" u="none" strike="noStrike">
-              <a:solidFill>
-                <a:schemeClr val="dk1"/>
-              </a:solidFill>
-              <a:effectLst/>
-              <a:uFillTx/>
-              <a:latin typeface="Calibri"/>
-            </a:endParaRPr>
           </a:p>
         </p:txBody>
       </p:sp>
@@ -8531,6 +8261,7 @@
           <a:bodyPr lIns="91440" tIns="45720" rIns="91440" bIns="45720" anchor="t">
             <a:noAutofit/>
           </a:bodyPr>
+          <a:lstStyle/>
           <a:p>
             <a:pPr indent="0" algn="l" defTabSz="457200">
               <a:lnSpc>
@@ -8545,21 +8276,41 @@
               </a:tabLst>
             </a:pPr>
             <a:r>
-              <a:rPr lang="pt-BR" sz="3200" b="0" u="none" strike="noStrike">
-                <a:solidFill>
-                  <a:schemeClr val="dk1">
-                    <a:tint val="75000"/>
-                  </a:schemeClr>
-                </a:solidFill>
-                <a:effectLst/>
-                <a:uFillTx/>
-                <a:latin typeface="Calibri"/>
-              </a:rPr>
-              <a:t>Agente de vendas Inforrel </a:t>
-            </a:r>
-            <a:endParaRPr lang="pt-BR" sz="3200" b="0" u="none" strike="noStrike">
+              <a:rPr lang="pt-BR" sz="3200" b="0" u="none" strike="noStrike" dirty="0">
+                <a:solidFill>
+                  <a:schemeClr val="tx1"/>
+                </a:solidFill>
+                <a:effectLst/>
+                <a:uFillTx/>
+                <a:latin typeface="Calibri"/>
+              </a:rPr>
+              <a:t>Agente de vendas </a:t>
+            </a:r>
+            <a:r>
+              <a:rPr lang="pt-BR" sz="3200" b="0" u="none" strike="noStrike" dirty="0" err="1">
+                <a:solidFill>
+                  <a:schemeClr val="tx1"/>
+                </a:solidFill>
+                <a:effectLst/>
+                <a:uFillTx/>
+                <a:latin typeface="Calibri"/>
+              </a:rPr>
+              <a:t>Inforrel</a:t>
+            </a:r>
+            <a:r>
+              <a:rPr lang="pt-BR" sz="3200" b="0" u="none" strike="noStrike" dirty="0">
+                <a:solidFill>
+                  <a:schemeClr val="tx1"/>
+                </a:solidFill>
+                <a:effectLst/>
+                <a:uFillTx/>
+                <a:latin typeface="Calibri"/>
+              </a:rPr>
+              <a:t> </a:t>
+            </a:r>
+            <a:endParaRPr lang="pt-BR" sz="3200" b="0" u="none" strike="noStrike" dirty="0">
               <a:solidFill>
-                <a:srgbClr val="000000"/>
+                <a:schemeClr val="tx1"/>
               </a:solidFill>
               <a:effectLst/>
               <a:uFillTx/>
@@ -8588,21 +8339,41 @@
               </a:tabLst>
             </a:pPr>
             <a:r>
-              <a:rPr lang="pt-BR" sz="3200" b="0" u="none" strike="noStrike">
-                <a:solidFill>
-                  <a:schemeClr val="dk1">
-                    <a:tint val="75000"/>
-                  </a:schemeClr>
-                </a:solidFill>
-                <a:effectLst/>
-                <a:uFillTx/>
-                <a:latin typeface="Calibri"/>
-              </a:rPr>
-              <a:t>Sprint {{sprint_numero}} </a:t>
-            </a:r>
-            <a:endParaRPr lang="pt-BR" sz="3200" b="0" u="none" strike="noStrike">
+              <a:rPr lang="pt-BR" sz="3200" b="0" u="none" strike="noStrike" dirty="0">
+                <a:solidFill>
+                  <a:schemeClr val="tx1"/>
+                </a:solidFill>
+                <a:effectLst/>
+                <a:uFillTx/>
+                <a:latin typeface="Calibri"/>
+              </a:rPr>
+              <a:t>Sprint {{</a:t>
+            </a:r>
+            <a:r>
+              <a:rPr lang="pt-BR" sz="3200" b="0" u="none" strike="noStrike" dirty="0" err="1">
+                <a:solidFill>
+                  <a:schemeClr val="tx1"/>
+                </a:solidFill>
+                <a:effectLst/>
+                <a:uFillTx/>
+                <a:latin typeface="Calibri"/>
+              </a:rPr>
+              <a:t>sprint_numero</a:t>
+            </a:r>
+            <a:r>
+              <a:rPr lang="pt-BR" sz="3200" b="0" u="none" strike="noStrike" dirty="0">
+                <a:solidFill>
+                  <a:schemeClr val="tx1"/>
+                </a:solidFill>
+                <a:effectLst/>
+                <a:uFillTx/>
+                <a:latin typeface="Calibri"/>
+              </a:rPr>
+              <a:t>}} </a:t>
+            </a:r>
+            <a:endParaRPr lang="pt-BR" sz="3200" b="0" u="none" strike="noStrike" dirty="0">
               <a:solidFill>
-                <a:srgbClr val="000000"/>
+                <a:schemeClr val="tx1"/>
               </a:solidFill>
               <a:effectLst/>
               <a:uFillTx/>
@@ -8631,21 +8402,63 @@
               </a:tabLst>
             </a:pPr>
             <a:r>
-              <a:rPr lang="pt-BR" sz="3200" b="0" u="none" strike="noStrike">
-                <a:solidFill>
-                  <a:schemeClr val="dk1">
-                    <a:tint val="75000"/>
-                  </a:schemeClr>
-                </a:solidFill>
-                <a:effectLst/>
-                <a:uFillTx/>
-                <a:latin typeface="Calibri"/>
-              </a:rPr>
-              <a:t>{{data_inicio}} - {{data_fim}} </a:t>
-            </a:r>
-            <a:endParaRPr lang="pt-BR" sz="3200" b="0" u="none" strike="noStrike">
+              <a:rPr lang="pt-BR" sz="3200" b="0" u="none" strike="noStrike" dirty="0">
+                <a:solidFill>
+                  <a:schemeClr val="tx1"/>
+                </a:solidFill>
+                <a:effectLst/>
+                <a:uFillTx/>
+                <a:latin typeface="Calibri"/>
+              </a:rPr>
+              <a:t>{{</a:t>
+            </a:r>
+            <a:r>
+              <a:rPr lang="pt-BR" sz="3200" b="0" u="none" strike="noStrike" dirty="0" err="1">
+                <a:solidFill>
+                  <a:schemeClr val="tx1"/>
+                </a:solidFill>
+                <a:effectLst/>
+                <a:uFillTx/>
+                <a:latin typeface="Calibri"/>
+              </a:rPr>
+              <a:t>data_inicio</a:t>
+            </a:r>
+            <a:r>
+              <a:rPr lang="pt-BR" sz="3200" b="0" u="none" strike="noStrike" dirty="0">
+                <a:solidFill>
+                  <a:schemeClr val="tx1"/>
+                </a:solidFill>
+                <a:effectLst/>
+                <a:uFillTx/>
+                <a:latin typeface="Calibri"/>
+              </a:rPr>
+              <a:t>}} - {{</a:t>
+            </a:r>
+            <a:r>
+              <a:rPr lang="pt-BR" sz="3200" b="0" u="none" strike="noStrike" dirty="0" err="1">
+                <a:solidFill>
+                  <a:schemeClr val="tx1"/>
+                </a:solidFill>
+                <a:effectLst/>
+                <a:uFillTx/>
+                <a:latin typeface="Calibri"/>
+              </a:rPr>
+              <a:t>data_fim</a:t>
+            </a:r>
+            <a:r>
+              <a:rPr lang="pt-BR" sz="3200" b="0" u="none" strike="noStrike" dirty="0">
+                <a:solidFill>
+                  <a:schemeClr val="tx1"/>
+                </a:solidFill>
+                <a:effectLst/>
+                <a:uFillTx/>
+                <a:latin typeface="Calibri"/>
+              </a:rPr>
+              <a:t>}} </a:t>
+            </a:r>
+            <a:endParaRPr lang="pt-BR" sz="3200" b="0" u="none" strike="noStrike" dirty="0">
               <a:solidFill>
-                <a:srgbClr val="000000"/>
+                <a:schemeClr val="tx1"/>
               </a:solidFill>
               <a:effectLst/>
               <a:uFillTx/>
@@ -8674,21 +8487,41 @@
               </a:tabLst>
             </a:pPr>
             <a:r>
-              <a:rPr lang="pt-BR" sz="3200" b="0" u="none" strike="noStrike">
-                <a:solidFill>
-                  <a:schemeClr val="dk1">
-                    <a:tint val="75000"/>
-                  </a:schemeClr>
-                </a:solidFill>
-                <a:effectLst/>
-                <a:uFillTx/>
-                <a:latin typeface="Calibri"/>
-              </a:rPr>
-              <a:t>{{duracao_dias}} dias</a:t>
-            </a:r>
-            <a:endParaRPr lang="pt-BR" sz="3200" b="0" u="none" strike="noStrike">
+              <a:rPr lang="pt-BR" sz="3200" b="0" u="none" strike="noStrike" dirty="0">
+                <a:solidFill>
+                  <a:schemeClr val="tx1"/>
+                </a:solidFill>
+                <a:effectLst/>
+                <a:uFillTx/>
+                <a:latin typeface="Calibri"/>
+              </a:rPr>
+              <a:t>{{</a:t>
+            </a:r>
+            <a:r>
+              <a:rPr lang="pt-BR" sz="3200" b="0" u="none" strike="noStrike" dirty="0" err="1">
+                <a:solidFill>
+                  <a:schemeClr val="tx1"/>
+                </a:solidFill>
+                <a:effectLst/>
+                <a:uFillTx/>
+                <a:latin typeface="Calibri"/>
+              </a:rPr>
+              <a:t>duracao_dias</a:t>
+            </a:r>
+            <a:r>
+              <a:rPr lang="pt-BR" sz="3200" b="0" u="none" strike="noStrike" dirty="0">
+                <a:solidFill>
+                  <a:schemeClr val="tx1"/>
+                </a:solidFill>
+                <a:effectLst/>
+                <a:uFillTx/>
+                <a:latin typeface="Calibri"/>
+              </a:rPr>
+              <a:t>}} dias</a:t>
+            </a:r>
+            <a:endParaRPr lang="pt-BR" sz="3200" b="0" u="none" strike="noStrike" dirty="0">
               <a:solidFill>
-                <a:srgbClr val="000000"/>
+                <a:schemeClr val="tx1"/>
               </a:solidFill>
               <a:effectLst/>
               <a:uFillTx/>
@@ -8699,12 +8532,12 @@
       </p:sp>
       <p:pic>
         <p:nvPicPr>
-          <p:cNvPr id="67" name=""/>
+          <p:cNvPr id="67" name="Imagem 66"/>
           <p:cNvPicPr/>
           <p:nvPr/>
         </p:nvPicPr>
         <p:blipFill>
-          <a:blip r:embed="rId1"/>
+          <a:blip r:embed="rId2"/>
           <a:stretch/>
         </p:blipFill>
         <p:spPr>
@@ -8723,19 +8556,497 @@
       </p:pic>
     </p:spTree>
   </p:cSld>
-  <mc:AlternateContent>
-    <mc:Choice Requires="p14">
-      <p:transition spd="slow" p14:dur="2000"/>
-    </mc:Choice>
-    <mc:Fallback>
-      <p:transition spd="slow"/>
-    </mc:Fallback>
-  </mc:AlternateContent>
+  <p:clrMapOvr>
+    <a:masterClrMapping/>
+  </p:clrMapOvr>
 </p:sld>
 </file>
 
 <file path=ppt/slides/slide10.xml><?xml version="1.0" encoding="utf-8"?>
-<p:sld xmlns:a="http://schemas.openxmlformats.org/drawingml/2006/main" xmlns:p="http://schemas.openxmlformats.org/presentationml/2006/main" xmlns:r="http://schemas.openxmlformats.org/officeDocument/2006/relationships" xmlns:p14="http://schemas.microsoft.com/office/powerpoint/2010/main" xmlns:p15="http://schemas.microsoft.com/office/powerpoint/2012/main" xmlns:mc="http://schemas.openxmlformats.org/markup-compatibility/2006">
+<p:sld xmlns:a="http://schemas.openxmlformats.org/drawingml/2006/main" xmlns:r="http://schemas.openxmlformats.org/officeDocument/2006/relationships" xmlns:p="http://schemas.openxmlformats.org/presentationml/2006/main">
+  <p:cSld>
+    <p:spTree>
+      <p:nvGrpSpPr>
+        <p:cNvPr id="1" name=""/>
+        <p:cNvGrpSpPr/>
+        <p:nvPr/>
+      </p:nvGrpSpPr>
+      <p:grpSpPr>
+        <a:xfrm>
+          <a:off x="0" y="0"/>
+          <a:ext cx="0" cy="0"/>
+          <a:chOff x="0" y="0"/>
+          <a:chExt cx="0" cy="0"/>
+        </a:xfrm>
+      </p:grpSpPr>
+      <p:sp>
+        <p:nvSpPr>
+          <p:cNvPr id="87" name="PlaceHolder 1"/>
+          <p:cNvSpPr>
+            <a:spLocks noGrp="1"/>
+          </p:cNvSpPr>
+          <p:nvPr>
+            <p:ph type="subTitle"/>
+          </p:nvPr>
+        </p:nvSpPr>
+        <p:spPr>
+          <a:xfrm>
+            <a:off x="799919" y="1828081"/>
+            <a:ext cx="7857383" cy="4690706"/>
+          </a:xfrm>
+          <a:prstGeom prst="rect">
+            <a:avLst/>
+          </a:prstGeom>
+          <a:noFill/>
+          <a:ln w="0">
+            <a:noFill/>
+          </a:ln>
+        </p:spPr>
+        <p:txBody>
+          <a:bodyPr lIns="91440" tIns="45720" rIns="91440" bIns="45720" anchor="t">
+            <a:noAutofit/>
+          </a:bodyPr>
+          <a:lstStyle/>
+          <a:p>
+            <a:pPr marL="216000" indent="-216000" algn="l" defTabSz="457200">
+              <a:lnSpc>
+                <a:spcPct val="100000"/>
+              </a:lnSpc>
+              <a:spcBef>
+                <a:spcPts val="1191"/>
+              </a:spcBef>
+              <a:spcAft>
+                <a:spcPts val="992"/>
+              </a:spcAft>
+              <a:buClr>
+                <a:srgbClr val="000000"/>
+              </a:buClr>
+              <a:buSzPct val="45000"/>
+              <a:buFont typeface="Wingdings" charset="2"/>
+              <a:buChar char=""/>
+              <a:tabLst>
+                <a:tab pos="0" algn="l"/>
+              </a:tabLst>
+            </a:pPr>
+            <a:r>
+              <a:rPr lang="pt-BR" sz="2000" b="0" u="none" strike="noStrike" dirty="0">
+                <a:solidFill>
+                  <a:schemeClr val="tx1"/>
+                </a:solidFill>
+                <a:effectLst/>
+                <a:uFillTx/>
+                <a:latin typeface="Calibri"/>
+                <a:ea typeface="Microsoft YaHei"/>
+              </a:rPr>
+              <a:t>{{</a:t>
+            </a:r>
+            <a:r>
+              <a:rPr lang="pt-BR" sz="2400" b="0" u="none" strike="noStrike" dirty="0">
+                <a:solidFill>
+                  <a:schemeClr val="tx1"/>
+                </a:solidFill>
+                <a:effectLst/>
+                <a:uFillTx/>
+                <a:latin typeface="Calibri"/>
+                <a:ea typeface="Microsoft YaHei"/>
+              </a:rPr>
+              <a:t>proximasprint:6</a:t>
+            </a:r>
+            <a:r>
+              <a:rPr lang="pt-BR" sz="2000" b="0" u="none" strike="noStrike" dirty="0">
+                <a:solidFill>
+                  <a:schemeClr val="tx1"/>
+                </a:solidFill>
+                <a:effectLst/>
+                <a:uFillTx/>
+                <a:latin typeface="Calibri"/>
+                <a:ea typeface="Microsoft YaHei"/>
+              </a:rPr>
+              <a:t>}}</a:t>
+            </a:r>
+            <a:endParaRPr lang="pt-BR" sz="2000" b="0" u="none" strike="noStrike" dirty="0">
+              <a:solidFill>
+                <a:schemeClr val="tx1"/>
+              </a:solidFill>
+              <a:effectLst/>
+              <a:uFillTx/>
+              <a:latin typeface="Arial"/>
+            </a:endParaRPr>
+          </a:p>
+        </p:txBody>
+      </p:sp>
+      <p:pic>
+        <p:nvPicPr>
+          <p:cNvPr id="88" name="Imagem 87"/>
+          <p:cNvPicPr/>
+          <p:nvPr/>
+        </p:nvPicPr>
+        <p:blipFill>
+          <a:blip r:embed="rId2"/>
+          <a:stretch/>
+        </p:blipFill>
+        <p:spPr>
+          <a:xfrm>
+            <a:off x="0" y="-28800"/>
+            <a:ext cx="9142560" cy="1647720"/>
+          </a:xfrm>
+          <a:prstGeom prst="rect">
+            <a:avLst/>
+          </a:prstGeom>
+          <a:noFill/>
+          <a:ln w="0">
+            <a:noFill/>
+          </a:ln>
+        </p:spPr>
+      </p:pic>
+      <p:sp>
+        <p:nvSpPr>
+          <p:cNvPr id="89" name="Title 12"/>
+          <p:cNvSpPr/>
+          <p:nvPr/>
+        </p:nvSpPr>
+        <p:spPr>
+          <a:xfrm>
+            <a:off x="915120" y="180360"/>
+            <a:ext cx="8228160" cy="1141560"/>
+          </a:xfrm>
+          <a:prstGeom prst="rect">
+            <a:avLst/>
+          </a:prstGeom>
+          <a:noFill/>
+          <a:ln w="0">
+            <a:noFill/>
+          </a:ln>
+        </p:spPr>
+        <p:style>
+          <a:lnRef idx="0">
+            <a:scrgbClr r="0" g="0" b="0"/>
+          </a:lnRef>
+          <a:fillRef idx="0">
+            <a:scrgbClr r="0" g="0" b="0"/>
+          </a:fillRef>
+          <a:effectRef idx="0">
+            <a:scrgbClr r="0" g="0" b="0"/>
+          </a:effectRef>
+          <a:fontRef idx="minor"/>
+        </p:style>
+        <p:txBody>
+          <a:bodyPr lIns="90000" tIns="45000" rIns="90000" bIns="45000" anchor="ctr">
+            <a:noAutofit/>
+          </a:bodyPr>
+          <a:lstStyle/>
+          <a:p>
+            <a:pPr algn="ctr" defTabSz="457200">
+              <a:lnSpc>
+                <a:spcPct val="100000"/>
+              </a:lnSpc>
+            </a:pPr>
+            <a:r>
+              <a:rPr lang="en-US" sz="4400" b="0" u="none" strike="noStrike">
+                <a:solidFill>
+                  <a:srgbClr val="EA7500"/>
+                </a:solidFill>
+                <a:effectLst/>
+                <a:uFillTx/>
+                <a:latin typeface="Calibri"/>
+              </a:rPr>
+              <a:t>Planejamento da </a:t>
+            </a:r>
+            <a:br>
+              <a:rPr sz="4400"/>
+            </a:br>
+            <a:r>
+              <a:rPr lang="en-US" sz="4400" b="0" u="none" strike="noStrike">
+                <a:solidFill>
+                  <a:srgbClr val="EA7500"/>
+                </a:solidFill>
+                <a:effectLst/>
+                <a:uFillTx/>
+                <a:latin typeface="Calibri"/>
+              </a:rPr>
+              <a:t>próxima Sprint</a:t>
+            </a:r>
+            <a:endParaRPr lang="pt-BR" sz="4400" b="0" u="none" strike="noStrike">
+              <a:solidFill>
+                <a:srgbClr val="000000"/>
+              </a:solidFill>
+              <a:effectLst/>
+              <a:uFillTx/>
+              <a:latin typeface="Arial"/>
+            </a:endParaRPr>
+          </a:p>
+        </p:txBody>
+      </p:sp>
+    </p:spTree>
+  </p:cSld>
+  <p:clrMapOvr>
+    <a:masterClrMapping/>
+  </p:clrMapOvr>
+</p:sld>
+</file>
+
+<file path=ppt/slides/slide11.xml><?xml version="1.0" encoding="utf-8"?>
+<p:sld xmlns:a="http://schemas.openxmlformats.org/drawingml/2006/main" xmlns:r="http://schemas.openxmlformats.org/officeDocument/2006/relationships" xmlns:p="http://schemas.openxmlformats.org/presentationml/2006/main">
+  <p:cSld>
+    <p:spTree>
+      <p:nvGrpSpPr>
+        <p:cNvPr id="1" name=""/>
+        <p:cNvGrpSpPr/>
+        <p:nvPr/>
+      </p:nvGrpSpPr>
+      <p:grpSpPr>
+        <a:xfrm>
+          <a:off x="0" y="0"/>
+          <a:ext cx="0" cy="0"/>
+          <a:chOff x="0" y="0"/>
+          <a:chExt cx="0" cy="0"/>
+        </a:xfrm>
+      </p:grpSpPr>
+      <p:sp>
+        <p:nvSpPr>
+          <p:cNvPr id="90" name="PlaceHolder 1"/>
+          <p:cNvSpPr>
+            <a:spLocks noGrp="1"/>
+          </p:cNvSpPr>
+          <p:nvPr>
+            <p:ph/>
+          </p:nvPr>
+        </p:nvSpPr>
+        <p:spPr>
+          <a:xfrm>
+            <a:off x="457200" y="1321560"/>
+            <a:ext cx="8228160" cy="5536440"/>
+          </a:xfrm>
+          <a:prstGeom prst="rect">
+            <a:avLst/>
+          </a:prstGeom>
+          <a:noFill/>
+          <a:ln w="0">
+            <a:noFill/>
+          </a:ln>
+        </p:spPr>
+        <p:txBody>
+          <a:bodyPr lIns="91440" tIns="45720" rIns="91440" bIns="45720" anchor="t">
+            <a:noAutofit/>
+          </a:bodyPr>
+          <a:lstStyle/>
+          <a:p>
+            <a:pPr indent="0" algn="l" defTabSz="457200">
+              <a:lnSpc>
+                <a:spcPct val="100000"/>
+              </a:lnSpc>
+              <a:spcBef>
+                <a:spcPts val="641"/>
+              </a:spcBef>
+              <a:buNone/>
+              <a:tabLst>
+                <a:tab pos="0" algn="l"/>
+              </a:tabLst>
+            </a:pPr>
+            <a:endParaRPr lang="en-US" sz="3200" b="0" u="none" strike="noStrike" dirty="0">
+              <a:solidFill>
+                <a:schemeClr val="dk1"/>
+              </a:solidFill>
+              <a:effectLst/>
+              <a:uFillTx/>
+              <a:latin typeface="Calibri"/>
+            </a:endParaRPr>
+          </a:p>
+          <a:p>
+            <a:pPr marL="343080" indent="-343080" algn="l" defTabSz="457200">
+              <a:lnSpc>
+                <a:spcPct val="100000"/>
+              </a:lnSpc>
+              <a:spcBef>
+                <a:spcPts val="641"/>
+              </a:spcBef>
+              <a:buClr>
+                <a:srgbClr val="000000"/>
+              </a:buClr>
+              <a:buFont typeface="Arial"/>
+              <a:buChar char="•"/>
+              <a:tabLst>
+                <a:tab pos="0" algn="l"/>
+              </a:tabLst>
+            </a:pPr>
+            <a:r>
+              <a:rPr lang="en-US" sz="2000" b="0" u="none" strike="noStrike" dirty="0">
+                <a:solidFill>
+                  <a:schemeClr val="dk1"/>
+                </a:solidFill>
+                <a:effectLst/>
+                <a:uFillTx/>
+                <a:latin typeface="Calibri"/>
+                <a:ea typeface="Microsoft YaHei"/>
+              </a:rPr>
+              <a:t>{{</a:t>
+            </a:r>
+            <a:r>
+              <a:rPr lang="en-US" sz="2000" b="0" u="none" strike="noStrike" dirty="0" err="1">
+                <a:solidFill>
+                  <a:schemeClr val="dk1"/>
+                </a:solidFill>
+                <a:effectLst/>
+                <a:uFillTx/>
+                <a:latin typeface="Calibri"/>
+                <a:ea typeface="Microsoft YaHei"/>
+              </a:rPr>
+              <a:t>proximo_objetivos</a:t>
+            </a:r>
+            <a:r>
+              <a:rPr lang="en-US" sz="2000" b="0" u="none" strike="noStrike" dirty="0">
+                <a:solidFill>
+                  <a:schemeClr val="dk1"/>
+                </a:solidFill>
+                <a:effectLst/>
+                <a:uFillTx/>
+                <a:latin typeface="Calibri"/>
+                <a:ea typeface="Microsoft YaHei"/>
+              </a:rPr>
+              <a:t>}} </a:t>
+            </a:r>
+            <a:endParaRPr lang="en-US" sz="2000" b="0" u="none" strike="noStrike" dirty="0">
+              <a:solidFill>
+                <a:schemeClr val="dk1"/>
+              </a:solidFill>
+              <a:effectLst/>
+              <a:uFillTx/>
+              <a:latin typeface="Calibri"/>
+            </a:endParaRPr>
+          </a:p>
+        </p:txBody>
+      </p:sp>
+      <p:pic>
+        <p:nvPicPr>
+          <p:cNvPr id="91" name="Imagem 90"/>
+          <p:cNvPicPr/>
+          <p:nvPr/>
+        </p:nvPicPr>
+        <p:blipFill>
+          <a:blip r:embed="rId2"/>
+          <a:stretch/>
+        </p:blipFill>
+        <p:spPr>
+          <a:xfrm>
+            <a:off x="360" y="-28800"/>
+            <a:ext cx="9142560" cy="1647720"/>
+          </a:xfrm>
+          <a:prstGeom prst="rect">
+            <a:avLst/>
+          </a:prstGeom>
+          <a:noFill/>
+          <a:ln w="0">
+            <a:noFill/>
+          </a:ln>
+        </p:spPr>
+      </p:pic>
+      <p:sp>
+        <p:nvSpPr>
+          <p:cNvPr id="92" name="Title 10"/>
+          <p:cNvSpPr/>
+          <p:nvPr/>
+        </p:nvSpPr>
+        <p:spPr>
+          <a:xfrm>
+            <a:off x="1563328" y="180000"/>
+            <a:ext cx="7579951" cy="1141560"/>
+          </a:xfrm>
+          <a:prstGeom prst="rect">
+            <a:avLst/>
+          </a:prstGeom>
+          <a:noFill/>
+          <a:ln w="0">
+            <a:noFill/>
+          </a:ln>
+        </p:spPr>
+        <p:style>
+          <a:lnRef idx="0">
+            <a:scrgbClr r="0" g="0" b="0"/>
+          </a:lnRef>
+          <a:fillRef idx="0">
+            <a:scrgbClr r="0" g="0" b="0"/>
+          </a:fillRef>
+          <a:effectRef idx="0">
+            <a:scrgbClr r="0" g="0" b="0"/>
+          </a:effectRef>
+          <a:fontRef idx="minor"/>
+        </p:style>
+        <p:txBody>
+          <a:bodyPr lIns="90000" tIns="45000" rIns="90000" bIns="45000" anchor="ctr">
+            <a:noAutofit/>
+          </a:bodyPr>
+          <a:lstStyle/>
+          <a:p>
+            <a:pPr algn="ctr" defTabSz="457200">
+              <a:lnSpc>
+                <a:spcPct val="100000"/>
+              </a:lnSpc>
+            </a:pPr>
+            <a:r>
+              <a:rPr lang="en-US" sz="4400" b="0" u="none" strike="noStrike" dirty="0" err="1">
+                <a:solidFill>
+                  <a:srgbClr val="EA7500"/>
+                </a:solidFill>
+                <a:effectLst/>
+                <a:uFillTx/>
+                <a:latin typeface="Calibri"/>
+              </a:rPr>
+              <a:t>Objetivo</a:t>
+            </a:r>
+            <a:r>
+              <a:rPr lang="en-US" sz="4400" b="0" u="none" strike="noStrike" dirty="0">
+                <a:solidFill>
+                  <a:srgbClr val="EA7500"/>
+                </a:solidFill>
+                <a:effectLst/>
+                <a:uFillTx/>
+                <a:latin typeface="Calibri"/>
+              </a:rPr>
+              <a:t> da </a:t>
+            </a:r>
+            <a:r>
+              <a:rPr lang="en-US" sz="4400" b="0" u="none" strike="noStrike" dirty="0" err="1">
+                <a:solidFill>
+                  <a:srgbClr val="EA7500"/>
+                </a:solidFill>
+                <a:effectLst/>
+                <a:uFillTx/>
+                <a:latin typeface="Calibri"/>
+              </a:rPr>
+              <a:t>Próxima</a:t>
+            </a:r>
+            <a:r>
+              <a:rPr lang="en-US" sz="4400" b="0" u="none" strike="noStrike" dirty="0">
+                <a:solidFill>
+                  <a:srgbClr val="EA7500"/>
+                </a:solidFill>
+                <a:effectLst/>
+                <a:uFillTx/>
+                <a:latin typeface="Calibri"/>
+              </a:rPr>
+              <a:t> Sprint</a:t>
+            </a:r>
+            <a:endParaRPr lang="pt-BR" sz="4400" b="0" u="none" strike="noStrike" dirty="0">
+              <a:solidFill>
+                <a:srgbClr val="000000"/>
+              </a:solidFill>
+              <a:effectLst/>
+              <a:uFillTx/>
+              <a:latin typeface="Arial"/>
+            </a:endParaRPr>
+          </a:p>
+        </p:txBody>
+      </p:sp>
+    </p:spTree>
+  </p:cSld>
+  <p:clrMapOvr>
+    <a:masterClrMapping/>
+  </p:clrMapOvr>
+</p:sld>
+</file>
+
+<file path=ppt/slides/slide12.xml><?xml version="1.0" encoding="utf-8"?>
+<p:sld xmlns:a="http://schemas.openxmlformats.org/drawingml/2006/main" xmlns:r="http://schemas.openxmlformats.org/officeDocument/2006/relationships" xmlns:p="http://schemas.openxmlformats.org/presentationml/2006/main">
   <p:cSld>
     <p:spTree>
       <p:nvGrpSpPr>
@@ -8763,8 +9074,8 @@
         </p:nvSpPr>
         <p:spPr>
           <a:xfrm>
-            <a:off x="457200" y="1600200"/>
-            <a:ext cx="8228160" cy="3438720"/>
+            <a:off x="457200" y="1827720"/>
+            <a:ext cx="8228160" cy="4850280"/>
           </a:xfrm>
           <a:prstGeom prst="rect">
             <a:avLst/>
@@ -8778,20 +9089,61 @@
           <a:bodyPr lIns="91440" tIns="45720" rIns="91440" bIns="45720" anchor="t">
             <a:noAutofit/>
           </a:bodyPr>
-          <a:p>
-            <a:pPr indent="0" algn="l" defTabSz="457200">
-              <a:lnSpc>
-                <a:spcPct val="100000"/>
-              </a:lnSpc>
-              <a:spcBef>
-                <a:spcPts val="641"/>
-              </a:spcBef>
-              <a:buNone/>
-              <a:tabLst>
-                <a:tab pos="0" algn="l"/>
-              </a:tabLst>
-            </a:pPr>
-            <a:endParaRPr lang="en-US" sz="3200" b="0" u="none" strike="noStrike">
+          <a:lstStyle/>
+          <a:p>
+            <a:pPr marL="343080" indent="-343080" algn="l" defTabSz="457200">
+              <a:lnSpc>
+                <a:spcPct val="100000"/>
+              </a:lnSpc>
+              <a:spcBef>
+                <a:spcPts val="1191"/>
+              </a:spcBef>
+              <a:spcAft>
+                <a:spcPts val="992"/>
+              </a:spcAft>
+              <a:buClr>
+                <a:srgbClr val="000000"/>
+              </a:buClr>
+              <a:buFont typeface="Arial"/>
+              <a:buChar char="•"/>
+              <a:tabLst>
+                <a:tab pos="0" algn="l"/>
+              </a:tabLst>
+            </a:pPr>
+            <a:r>
+              <a:rPr lang="en-US" sz="2000" b="0" u="none" strike="noStrike" dirty="0">
+                <a:solidFill>
+                  <a:schemeClr val="dk1"/>
+                </a:solidFill>
+                <a:effectLst/>
+                <a:uFillTx/>
+                <a:latin typeface="Calibri"/>
+              </a:rPr>
+              <a:t>{{</a:t>
+            </a:r>
+            <a:r>
+              <a:rPr lang="en-US" sz="2000" b="0" u="none" strike="noStrike" err="1">
+                <a:solidFill>
+                  <a:schemeClr val="dk1"/>
+                </a:solidFill>
+                <a:effectLst/>
+                <a:uFillTx/>
+                <a:latin typeface="Calibri"/>
+              </a:rPr>
+              <a:t>backlogpendente</a:t>
+            </a:r>
+            <a:r>
+              <a:rPr lang="en-US" sz="2000" b="0" u="none" strike="noStrike">
+                <a:solidFill>
+                  <a:schemeClr val="dk1"/>
+                </a:solidFill>
+                <a:effectLst/>
+                <a:uFillTx/>
+                <a:latin typeface="Calibri"/>
+              </a:rPr>
+              <a:t>:7}}</a:t>
+            </a:r>
+            <a:endParaRPr lang="en-US" sz="2000" b="0" u="none" strike="noStrike" dirty="0">
               <a:solidFill>
                 <a:schemeClr val="dk1"/>
               </a:solidFill>
@@ -8800,56 +9152,16 @@
               <a:latin typeface="Calibri"/>
             </a:endParaRPr>
           </a:p>
-          <a:p>
-            <a:pPr marL="343080" indent="-343080" algn="l" defTabSz="457200">
-              <a:lnSpc>
-                <a:spcPct val="100000"/>
-              </a:lnSpc>
-              <a:spcBef>
-                <a:spcPts val="1191"/>
-              </a:spcBef>
-              <a:spcAft>
-                <a:spcPts val="992"/>
-              </a:spcAft>
-              <a:buClr>
-                <a:srgbClr val="000000"/>
-              </a:buClr>
-              <a:buFont typeface="Arial"/>
-              <a:buChar char="•"/>
-              <a:tabLst>
-                <a:tab pos="0" algn="l"/>
-              </a:tabLst>
-            </a:pPr>
-            <a:r>
-              <a:rPr lang="en-US" sz="2600" b="0" u="none" strike="noStrike">
-                <a:solidFill>
-                  <a:schemeClr val="dk1"/>
-                </a:solidFill>
-                <a:effectLst/>
-                <a:uFillTx/>
-                <a:latin typeface="Calibri"/>
-              </a:rPr>
-              <a:t>{{backlogpendente}}</a:t>
-            </a:r>
-            <a:endParaRPr lang="en-US" sz="2600" b="0" u="none" strike="noStrike">
-              <a:solidFill>
-                <a:schemeClr val="dk1"/>
-              </a:solidFill>
-              <a:effectLst/>
-              <a:uFillTx/>
-              <a:latin typeface="Calibri"/>
-            </a:endParaRPr>
-          </a:p>
         </p:txBody>
       </p:sp>
       <p:pic>
         <p:nvPicPr>
-          <p:cNvPr id="94" name=""/>
+          <p:cNvPr id="94" name="Imagem 93"/>
           <p:cNvPicPr/>
           <p:nvPr/>
         </p:nvPicPr>
         <p:blipFill>
-          <a:blip r:embed="rId1"/>
+          <a:blip r:embed="rId2"/>
           <a:stretch/>
         </p:blipFill>
         <p:spPr>
@@ -8886,15 +9198,22 @@
           </a:ln>
         </p:spPr>
         <p:style>
-          <a:lnRef idx="0"/>
-          <a:fillRef idx="0"/>
-          <a:effectRef idx="0"/>
+          <a:lnRef idx="0">
+            <a:scrgbClr r="0" g="0" b="0"/>
+          </a:lnRef>
+          <a:fillRef idx="0">
+            <a:scrgbClr r="0" g="0" b="0"/>
+          </a:fillRef>
+          <a:effectRef idx="0">
+            <a:scrgbClr r="0" g="0" b="0"/>
+          </a:effectRef>
           <a:fontRef idx="minor"/>
         </p:style>
         <p:txBody>
           <a:bodyPr lIns="90000" tIns="45000" rIns="90000" bIns="45000" anchor="ctr">
             <a:noAutofit/>
           </a:bodyPr>
+          <a:lstStyle/>
           <a:p>
             <a:pPr algn="ctr" defTabSz="457200">
               <a:lnSpc>
@@ -8925,19 +9244,14 @@
       </p:sp>
     </p:spTree>
   </p:cSld>
-  <mc:AlternateContent>
-    <mc:Choice Requires="p14">
-      <p:transition spd="slow" p14:dur="2000"/>
-    </mc:Choice>
-    <mc:Fallback>
-      <p:transition spd="slow"/>
-    </mc:Fallback>
-  </mc:AlternateContent>
+  <p:clrMapOvr>
+    <a:masterClrMapping/>
+  </p:clrMapOvr>
 </p:sld>
 </file>
 
 <file path=ppt/slides/slide2.xml><?xml version="1.0" encoding="utf-8"?>
-<p:sld xmlns:a="http://schemas.openxmlformats.org/drawingml/2006/main" xmlns:p="http://schemas.openxmlformats.org/presentationml/2006/main" xmlns:r="http://schemas.openxmlformats.org/officeDocument/2006/relationships" xmlns:p14="http://schemas.microsoft.com/office/powerpoint/2010/main" xmlns:p15="http://schemas.microsoft.com/office/powerpoint/2012/main" xmlns:mc="http://schemas.openxmlformats.org/markup-compatibility/2006">
+<p:sld xmlns:a="http://schemas.openxmlformats.org/drawingml/2006/main" xmlns:r="http://schemas.openxmlformats.org/officeDocument/2006/relationships" xmlns:p="http://schemas.openxmlformats.org/presentationml/2006/main">
   <p:cSld>
     <p:spTree>
       <p:nvGrpSpPr>
@@ -8980,6 +9294,7 @@
           <a:bodyPr lIns="91440" tIns="45720" rIns="91440" bIns="45720" anchor="t">
             <a:noAutofit/>
           </a:bodyPr>
+          <a:lstStyle/>
           <a:p>
             <a:pPr indent="0" algn="l" defTabSz="457200">
               <a:lnSpc>
@@ -8993,7 +9308,7 @@
                 <a:tab pos="0" algn="l"/>
               </a:tabLst>
             </a:pPr>
-            <a:endParaRPr lang="en-US" sz="3200" b="0" u="none" strike="noStrike">
+            <a:endParaRPr lang="en-US" sz="3200" b="0" u="none" strike="noStrike" dirty="0">
               <a:solidFill>
                 <a:schemeClr val="dk1"/>
               </a:solidFill>
@@ -9020,7 +9335,7 @@
               </a:tabLst>
             </a:pPr>
             <a:r>
-              <a:rPr lang="en-US" sz="2800" b="0" u="none" strike="noStrike">
+              <a:rPr lang="en-US" sz="2800" b="0" u="none" strike="noStrike" dirty="0">
                 <a:solidFill>
                   <a:schemeClr val="dk1"/>
                 </a:solidFill>
@@ -9029,9 +9344,33 @@
                 <a:latin typeface="Calibri"/>
                 <a:ea typeface="Microsoft YaHei"/>
               </a:rPr>
-              <a:t>{{objetivos}} </a:t>
-            </a:r>
-            <a:endParaRPr lang="en-US" sz="2800" b="0" u="none" strike="noStrike">
+              <a:t>{{</a:t>
+            </a:r>
+            <a:r>
+              <a:rPr lang="en-US" sz="2800" b="0" u="none" strike="noStrike" dirty="0" err="1">
+                <a:solidFill>
+                  <a:schemeClr val="dk1"/>
+                </a:solidFill>
+                <a:effectLst/>
+                <a:uFillTx/>
+                <a:latin typeface="Calibri"/>
+                <a:ea typeface="Microsoft YaHei"/>
+              </a:rPr>
+              <a:t>objetivos</a:t>
+            </a:r>
+            <a:r>
+              <a:rPr lang="en-US" sz="2800" b="0" u="none" strike="noStrike" dirty="0">
+                <a:solidFill>
+                  <a:schemeClr val="dk1"/>
+                </a:solidFill>
+                <a:effectLst/>
+                <a:uFillTx/>
+                <a:latin typeface="Calibri"/>
+                <a:ea typeface="Microsoft YaHei"/>
+              </a:rPr>
+              <a:t>}} </a:t>
+            </a:r>
+            <a:endParaRPr lang="en-US" sz="2800" b="0" u="none" strike="noStrike" dirty="0">
               <a:solidFill>
                 <a:schemeClr val="dk1"/>
               </a:solidFill>
@@ -9044,12 +9383,12 @@
       </p:sp>
       <p:pic>
         <p:nvPicPr>
-          <p:cNvPr id="69" name=""/>
+          <p:cNvPr id="69" name="Imagem 68"/>
           <p:cNvPicPr/>
           <p:nvPr/>
         </p:nvPicPr>
         <p:blipFill>
-          <a:blip r:embed="rId1"/>
+          <a:blip r:embed="rId2"/>
           <a:stretch/>
         </p:blipFill>
         <p:spPr>
@@ -9086,15 +9425,22 @@
           </a:ln>
         </p:spPr>
         <p:style>
-          <a:lnRef idx="0"/>
-          <a:fillRef idx="0"/>
-          <a:effectRef idx="0"/>
+          <a:lnRef idx="0">
+            <a:scrgbClr r="0" g="0" b="0"/>
+          </a:lnRef>
+          <a:fillRef idx="0">
+            <a:scrgbClr r="0" g="0" b="0"/>
+          </a:fillRef>
+          <a:effectRef idx="0">
+            <a:scrgbClr r="0" g="0" b="0"/>
+          </a:effectRef>
           <a:fontRef idx="minor"/>
         </p:style>
         <p:txBody>
           <a:bodyPr lIns="90000" tIns="45000" rIns="90000" bIns="45000" anchor="ctr">
             <a:noAutofit/>
           </a:bodyPr>
+          <a:lstStyle/>
           <a:p>
             <a:pPr algn="ctr" defTabSz="457200">
               <a:lnSpc>
@@ -9125,19 +9471,14 @@
       </p:sp>
     </p:spTree>
   </p:cSld>
-  <mc:AlternateContent>
-    <mc:Choice Requires="p14">
-      <p:transition spd="slow" p14:dur="2000"/>
-    </mc:Choice>
-    <mc:Fallback>
-      <p:transition spd="slow"/>
-    </mc:Fallback>
-  </mc:AlternateContent>
+  <p:clrMapOvr>
+    <a:masterClrMapping/>
+  </p:clrMapOvr>
 </p:sld>
 </file>
 
 <file path=ppt/slides/slide3.xml><?xml version="1.0" encoding="utf-8"?>
-<p:sld xmlns:a="http://schemas.openxmlformats.org/drawingml/2006/main" xmlns:p="http://schemas.openxmlformats.org/presentationml/2006/main" xmlns:r="http://schemas.openxmlformats.org/officeDocument/2006/relationships" xmlns:p14="http://schemas.microsoft.com/office/powerpoint/2010/main" xmlns:p15="http://schemas.microsoft.com/office/powerpoint/2012/main" xmlns:mc="http://schemas.openxmlformats.org/markup-compatibility/2006">
+<p:sld xmlns:a="http://schemas.openxmlformats.org/drawingml/2006/main" xmlns:r="http://schemas.openxmlformats.org/officeDocument/2006/relationships" xmlns:p="http://schemas.openxmlformats.org/presentationml/2006/main">
   <p:cSld>
     <p:spTree>
       <p:nvGrpSpPr>
@@ -9165,8 +9506,8 @@
         </p:nvSpPr>
         <p:spPr>
           <a:xfrm>
-            <a:off x="411120" y="900000"/>
-            <a:ext cx="8228160" cy="5059080"/>
+            <a:off x="411120" y="1321560"/>
+            <a:ext cx="8228160" cy="4637520"/>
           </a:xfrm>
           <a:prstGeom prst="rect">
             <a:avLst/>
@@ -9180,6 +9521,7 @@
           <a:bodyPr lIns="91440" tIns="45720" rIns="91440" bIns="45720" anchor="t">
             <a:noAutofit/>
           </a:bodyPr>
+          <a:lstStyle/>
           <a:p>
             <a:pPr indent="0" algn="l" defTabSz="457200">
               <a:lnSpc>
@@ -9193,7 +9535,7 @@
                 <a:tab pos="0" algn="l"/>
               </a:tabLst>
             </a:pPr>
-            <a:endParaRPr lang="en-US" sz="3200" b="0" u="none" strike="noStrike">
+            <a:endParaRPr lang="en-US" sz="3200" b="0" u="none" strike="noStrike" dirty="0">
               <a:solidFill>
                 <a:schemeClr val="dk1"/>
               </a:solidFill>
@@ -9216,17 +9558,311 @@
               </a:tabLst>
             </a:pPr>
             <a:r>
-              <a:rPr lang="en-US" sz="3200" b="0" u="none" strike="noStrike">
-                <a:solidFill>
-                  <a:schemeClr val="dk1"/>
-                </a:solidFill>
-                <a:effectLst/>
-                <a:uFillTx/>
-                <a:latin typeface="Calibri"/>
-              </a:rPr>
-              <a:t>{{SLIDE:feito}}</a:t>
-            </a:r>
-            <a:endParaRPr lang="en-US" sz="3200" b="0" u="none" strike="noStrike">
+              <a:rPr lang="en-US" sz="3200" b="0" u="none" strike="noStrike" dirty="0">
+                <a:solidFill>
+                  <a:schemeClr val="dk1"/>
+                </a:solidFill>
+                <a:effectLst/>
+                <a:uFillTx/>
+                <a:latin typeface="Calibri"/>
+              </a:rPr>
+              <a:t>{{</a:t>
+            </a:r>
+            <a:r>
+              <a:rPr lang="en-US" sz="3200" b="0" u="none" strike="noStrike" dirty="0" err="1">
+                <a:solidFill>
+                  <a:schemeClr val="dk1"/>
+                </a:solidFill>
+                <a:effectLst/>
+                <a:uFillTx/>
+                <a:latin typeface="Calibri"/>
+              </a:rPr>
+              <a:t>SLIDE:feito</a:t>
+            </a:r>
+            <a:r>
+              <a:rPr lang="en-US" sz="3200" b="0" u="none" strike="noStrike" dirty="0">
+                <a:solidFill>
+                  <a:schemeClr val="dk1"/>
+                </a:solidFill>
+                <a:effectLst/>
+                <a:uFillTx/>
+                <a:latin typeface="Calibri"/>
+              </a:rPr>
+              <a:t>}}</a:t>
+            </a:r>
+          </a:p>
+          <a:p>
+            <a:pPr marL="343080" indent="-343080" algn="l" defTabSz="457200">
+              <a:lnSpc>
+                <a:spcPct val="100000"/>
+              </a:lnSpc>
+              <a:spcBef>
+                <a:spcPts val="641"/>
+              </a:spcBef>
+              <a:buClr>
+                <a:srgbClr val="000000"/>
+              </a:buClr>
+              <a:buSzPct val="45000"/>
+              <a:buFont typeface="Wingdings" charset="2"/>
+              <a:buChar char=""/>
+              <a:tabLst>
+                <a:tab pos="0" algn="l"/>
+              </a:tabLst>
+            </a:pPr>
+            <a:r>
+              <a:rPr lang="en-US" sz="2600" b="1" u="none" strike="noStrike" dirty="0">
+                <a:solidFill>
+                  <a:schemeClr val="tx2"/>
+                </a:solidFill>
+                <a:effectLst/>
+                <a:uFillTx/>
+                <a:latin typeface="Calibri"/>
+              </a:rPr>
+              <a:t>{{</a:t>
+            </a:r>
+            <a:r>
+              <a:rPr lang="en-US" sz="2600" b="1" u="none" strike="noStrike" dirty="0" err="1">
+                <a:solidFill>
+                  <a:schemeClr val="tx2"/>
+                </a:solidFill>
+                <a:effectLst/>
+                <a:uFillTx/>
+                <a:latin typeface="Calibri"/>
+              </a:rPr>
+              <a:t>feito.titulo</a:t>
+            </a:r>
+            <a:r>
+              <a:rPr lang="en-US" sz="2600" b="1" u="none" strike="noStrike" dirty="0">
+                <a:solidFill>
+                  <a:schemeClr val="tx2"/>
+                </a:solidFill>
+                <a:effectLst/>
+                <a:uFillTx/>
+                <a:latin typeface="Calibri"/>
+              </a:rPr>
+              <a:t>}}</a:t>
+            </a:r>
+          </a:p>
+          <a:p>
+            <a:pPr marL="540000" lvl="1" algn="l" defTabSz="457200">
+              <a:lnSpc>
+                <a:spcPct val="100000"/>
+              </a:lnSpc>
+              <a:spcBef>
+                <a:spcPts val="561"/>
+              </a:spcBef>
+              <a:buClr>
+                <a:srgbClr val="000000"/>
+              </a:buClr>
+              <a:buSzPct val="45000"/>
+              <a:tabLst>
+                <a:tab pos="0" algn="l"/>
+              </a:tabLst>
+            </a:pPr>
+            <a:r>
+              <a:rPr lang="en-US" sz="2600" b="1" u="none" strike="noStrike" dirty="0" err="1">
+                <a:solidFill>
+                  <a:schemeClr val="dk1"/>
+                </a:solidFill>
+                <a:effectLst/>
+                <a:uFillTx/>
+                <a:latin typeface="Calibri"/>
+                <a:ea typeface="Microsoft YaHei"/>
+              </a:rPr>
+              <a:t>Requisitos</a:t>
+            </a:r>
+            <a:r>
+              <a:rPr lang="en-US" sz="2600" b="1" u="none" strike="noStrike" dirty="0">
+                <a:solidFill>
+                  <a:schemeClr val="dk1"/>
+                </a:solidFill>
+                <a:effectLst/>
+                <a:uFillTx/>
+                <a:latin typeface="Calibri"/>
+                <a:ea typeface="Microsoft YaHei"/>
+              </a:rPr>
+              <a:t> </a:t>
+            </a:r>
+            <a:r>
+              <a:rPr lang="en-US" sz="2600" b="1" u="none" strike="noStrike" dirty="0" err="1">
+                <a:solidFill>
+                  <a:schemeClr val="dk1"/>
+                </a:solidFill>
+                <a:effectLst/>
+                <a:uFillTx/>
+                <a:latin typeface="Calibri"/>
+                <a:ea typeface="Microsoft YaHei"/>
+              </a:rPr>
+              <a:t>envolvidos</a:t>
+            </a:r>
+            <a:r>
+              <a:rPr lang="en-US" sz="2600" b="0" u="none" strike="noStrike" dirty="0">
+                <a:solidFill>
+                  <a:schemeClr val="dk1"/>
+                </a:solidFill>
+                <a:effectLst/>
+                <a:uFillTx/>
+                <a:latin typeface="Calibri"/>
+                <a:ea typeface="Microsoft YaHei"/>
+              </a:rPr>
+              <a:t>: {{</a:t>
+            </a:r>
+            <a:r>
+              <a:rPr lang="en-US" sz="2600" b="0" u="none" strike="noStrike" dirty="0" err="1">
+                <a:solidFill>
+                  <a:schemeClr val="dk1"/>
+                </a:solidFill>
+                <a:effectLst/>
+                <a:uFillTx/>
+                <a:latin typeface="Calibri"/>
+                <a:ea typeface="Microsoft YaHei"/>
+              </a:rPr>
+              <a:t>feito</a:t>
+            </a:r>
+            <a:r>
+              <a:rPr lang="en-US" sz="2600" dirty="0" err="1">
+                <a:solidFill>
+                  <a:schemeClr val="dk1"/>
+                </a:solidFill>
+                <a:latin typeface="Calibri"/>
+                <a:ea typeface="Microsoft YaHei"/>
+              </a:rPr>
+              <a:t>.req</a:t>
+            </a:r>
+            <a:r>
+              <a:rPr lang="en-US" sz="2600" b="0" u="none" strike="noStrike" dirty="0">
+                <a:solidFill>
+                  <a:schemeClr val="dk1"/>
+                </a:solidFill>
+                <a:effectLst/>
+                <a:uFillTx/>
+                <a:latin typeface="Calibri"/>
+                <a:ea typeface="Microsoft YaHei"/>
+              </a:rPr>
+              <a:t>}}</a:t>
+            </a:r>
+          </a:p>
+          <a:p>
+            <a:pPr marL="540000" lvl="1" algn="l" defTabSz="457200">
+              <a:lnSpc>
+                <a:spcPct val="100000"/>
+              </a:lnSpc>
+              <a:spcBef>
+                <a:spcPts val="561"/>
+              </a:spcBef>
+              <a:buClr>
+                <a:srgbClr val="000000"/>
+              </a:buClr>
+              <a:buSzPct val="45000"/>
+              <a:tabLst>
+                <a:tab pos="0" algn="l"/>
+              </a:tabLst>
+            </a:pPr>
+            <a:endParaRPr lang="en-US" sz="1100" dirty="0">
+              <a:solidFill>
+                <a:schemeClr val="dk1"/>
+              </a:solidFill>
+              <a:latin typeface="Calibri"/>
+              <a:ea typeface="Microsoft YaHei"/>
+            </a:endParaRPr>
+          </a:p>
+          <a:p>
+            <a:pPr marL="540000" lvl="1" algn="l" defTabSz="457200">
+              <a:lnSpc>
+                <a:spcPct val="100000"/>
+              </a:lnSpc>
+              <a:spcBef>
+                <a:spcPts val="561"/>
+              </a:spcBef>
+              <a:buClr>
+                <a:srgbClr val="000000"/>
+              </a:buClr>
+              <a:buSzPct val="45000"/>
+              <a:tabLst>
+                <a:tab pos="0" algn="l"/>
+              </a:tabLst>
+            </a:pPr>
+            <a:r>
+              <a:rPr lang="en-US" sz="2600" b="1" dirty="0" err="1">
+                <a:solidFill>
+                  <a:schemeClr val="dk1"/>
+                </a:solidFill>
+                <a:latin typeface="Calibri"/>
+                <a:ea typeface="Microsoft YaHei"/>
+              </a:rPr>
+              <a:t>Porcentagem</a:t>
+            </a:r>
+            <a:r>
+              <a:rPr lang="en-US" sz="2600" b="1" dirty="0">
+                <a:solidFill>
+                  <a:schemeClr val="dk1"/>
+                </a:solidFill>
+                <a:latin typeface="Calibri"/>
+                <a:ea typeface="Microsoft YaHei"/>
+              </a:rPr>
+              <a:t> de </a:t>
+            </a:r>
+            <a:r>
+              <a:rPr lang="en-US" sz="2600" b="1" dirty="0" err="1">
+                <a:solidFill>
+                  <a:schemeClr val="dk1"/>
+                </a:solidFill>
+                <a:latin typeface="Calibri"/>
+                <a:ea typeface="Microsoft YaHei"/>
+              </a:rPr>
+              <a:t>cobertura</a:t>
+            </a:r>
+            <a:r>
+              <a:rPr lang="en-US" sz="2600" b="1" dirty="0">
+                <a:solidFill>
+                  <a:schemeClr val="dk1"/>
+                </a:solidFill>
+                <a:latin typeface="Calibri"/>
+                <a:ea typeface="Microsoft YaHei"/>
+              </a:rPr>
+              <a:t> </a:t>
+            </a:r>
+            <a:r>
+              <a:rPr lang="en-US" sz="2600" b="1" dirty="0" err="1">
+                <a:solidFill>
+                  <a:schemeClr val="dk1"/>
+                </a:solidFill>
+                <a:latin typeface="Calibri"/>
+                <a:ea typeface="Microsoft YaHei"/>
+              </a:rPr>
+              <a:t>por</a:t>
+            </a:r>
+            <a:r>
+              <a:rPr lang="en-US" sz="2600" b="1" dirty="0">
+                <a:solidFill>
+                  <a:schemeClr val="dk1"/>
+                </a:solidFill>
+                <a:latin typeface="Calibri"/>
+                <a:ea typeface="Microsoft YaHei"/>
+              </a:rPr>
+              <a:t> </a:t>
+            </a:r>
+            <a:r>
+              <a:rPr lang="en-US" sz="2600" b="1" dirty="0" err="1">
+                <a:solidFill>
+                  <a:schemeClr val="dk1"/>
+                </a:solidFill>
+                <a:latin typeface="Calibri"/>
+                <a:ea typeface="Microsoft YaHei"/>
+              </a:rPr>
+              <a:t>requisito</a:t>
+            </a:r>
+            <a:r>
+              <a:rPr lang="en-US" sz="2600" dirty="0">
+                <a:solidFill>
+                  <a:schemeClr val="dk1"/>
+                </a:solidFill>
+                <a:latin typeface="Calibri"/>
+                <a:ea typeface="Microsoft YaHei"/>
+              </a:rPr>
+              <a:t>:</a:t>
+            </a:r>
+            <a:endParaRPr lang="en-US" sz="2600" b="0" u="none" strike="noStrike" dirty="0">
               <a:solidFill>
                 <a:schemeClr val="dk1"/>
               </a:solidFill>
@@ -9236,12 +9872,12 @@
             </a:endParaRPr>
           </a:p>
           <a:p>
-            <a:pPr marL="343080" indent="-343080" algn="l" defTabSz="457200">
-              <a:lnSpc>
-                <a:spcPct val="100000"/>
-              </a:lnSpc>
-              <a:spcBef>
-                <a:spcPts val="641"/>
+            <a:pPr marL="864000" lvl="1" indent="-324000" algn="l" defTabSz="457200">
+              <a:lnSpc>
+                <a:spcPct val="100000"/>
+              </a:lnSpc>
+              <a:spcBef>
+                <a:spcPts val="561"/>
               </a:spcBef>
               <a:buClr>
                 <a:srgbClr val="000000"/>
@@ -9254,17 +9890,64 @@
               </a:tabLst>
             </a:pPr>
             <a:r>
-              <a:rPr lang="en-US" sz="2600" b="0" u="none" strike="noStrike">
-                <a:solidFill>
-                  <a:schemeClr val="dk1"/>
-                </a:solidFill>
-                <a:effectLst/>
-                <a:uFillTx/>
-                <a:latin typeface="Calibri"/>
-              </a:rPr>
-              <a:t>{{feito_titulo}}</a:t>
-            </a:r>
-            <a:endParaRPr lang="en-US" sz="2600" b="0" u="none" strike="noStrike">
+              <a:rPr lang="en-US" sz="2600" b="0" u="none" strike="noStrike" dirty="0">
+                <a:solidFill>
+                  <a:schemeClr val="dk1"/>
+                </a:solidFill>
+                <a:effectLst/>
+                <a:uFillTx/>
+                <a:latin typeface="Calibri"/>
+                <a:ea typeface="Microsoft YaHei"/>
+              </a:rPr>
+              <a:t>{{</a:t>
+            </a:r>
+            <a:r>
+              <a:rPr lang="en-US" sz="2600" b="0" u="none" strike="noStrike" dirty="0" err="1">
+                <a:solidFill>
+                  <a:schemeClr val="dk1"/>
+                </a:solidFill>
+                <a:effectLst/>
+                <a:uFillTx/>
+                <a:latin typeface="Calibri"/>
+                <a:ea typeface="Microsoft YaHei"/>
+              </a:rPr>
+              <a:t>feito</a:t>
+            </a:r>
+            <a:r>
+              <a:rPr lang="en-US" sz="2600" dirty="0" err="1">
+                <a:solidFill>
+                  <a:schemeClr val="dk1"/>
+                </a:solidFill>
+                <a:latin typeface="Calibri"/>
+                <a:ea typeface="Microsoft YaHei"/>
+              </a:rPr>
+              <a:t>.</a:t>
+            </a:r>
+            <a:r>
+              <a:rPr lang="en-US" sz="2600" b="0" u="none" strike="noStrike" dirty="0" err="1">
+                <a:solidFill>
+                  <a:schemeClr val="dk1"/>
+                </a:solidFill>
+                <a:effectLst/>
+                <a:uFillTx/>
+                <a:latin typeface="Calibri"/>
+                <a:ea typeface="Microsoft YaHei"/>
+              </a:rPr>
+              <a:t>cobertura_req</a:t>
+            </a:r>
+            <a:r>
+              <a:rPr lang="en-US" sz="2600" b="0" u="none" strike="noStrike" dirty="0">
+                <a:solidFill>
+                  <a:schemeClr val="dk1"/>
+                </a:solidFill>
+                <a:effectLst/>
+                <a:uFillTx/>
+                <a:latin typeface="Calibri"/>
+                <a:ea typeface="Microsoft YaHei"/>
+              </a:rPr>
+              <a:t>}}</a:t>
+            </a:r>
+            <a:endParaRPr lang="en-US" sz="2600" b="0" u="none" strike="noStrike" dirty="0">
               <a:solidFill>
                 <a:schemeClr val="dk1"/>
               </a:solidFill>
@@ -9273,94 +9956,16 @@
               <a:latin typeface="Calibri"/>
             </a:endParaRPr>
           </a:p>
-          <a:p>
-            <a:pPr marL="864000" lvl="1" indent="-324000" algn="l" defTabSz="457200">
-              <a:lnSpc>
-                <a:spcPct val="100000"/>
-              </a:lnSpc>
-              <a:spcBef>
-                <a:spcPts val="561"/>
-              </a:spcBef>
-              <a:buClr>
-                <a:srgbClr val="000000"/>
-              </a:buClr>
-              <a:buSzPct val="45000"/>
-              <a:buFont typeface="Wingdings" charset="2"/>
-              <a:buChar char=""/>
-              <a:tabLst>
-                <a:tab pos="0" algn="l"/>
-              </a:tabLst>
-            </a:pPr>
-            <a:r>
-              <a:rPr lang="en-US" sz="2600" b="0" u="none" strike="noStrike">
-                <a:solidFill>
-                  <a:schemeClr val="dk1"/>
-                </a:solidFill>
-                <a:effectLst/>
-                <a:uFillTx/>
-                <a:latin typeface="Calibri"/>
-                <a:ea typeface="Microsoft YaHei"/>
-              </a:rPr>
-              <a:t>Responsável: {{feito_agente}}</a:t>
-            </a:r>
-            <a:endParaRPr lang="en-US" sz="2600" b="0" u="none" strike="noStrike">
-              <a:solidFill>
-                <a:schemeClr val="dk1"/>
-              </a:solidFill>
-              <a:effectLst/>
-              <a:uFillTx/>
-              <a:latin typeface="Calibri"/>
-            </a:endParaRPr>
-          </a:p>
-          <a:p>
-            <a:pPr marL="864000" lvl="1" indent="-324000" algn="l" defTabSz="457200">
-              <a:lnSpc>
-                <a:spcPct val="100000"/>
-              </a:lnSpc>
-              <a:spcBef>
-                <a:spcPts val="561"/>
-              </a:spcBef>
-              <a:buClr>
-                <a:srgbClr val="000000"/>
-              </a:buClr>
-              <a:buSzPct val="45000"/>
-              <a:buFont typeface="Wingdings" charset="2"/>
-              <a:buChar char=""/>
-              <a:tabLst>
-                <a:tab pos="0" algn="l"/>
-              </a:tabLst>
-            </a:pPr>
-            <a:r>
-              <a:rPr lang="en-US" sz="2600" b="0" u="none" strike="noStrike">
-                <a:solidFill>
-                  <a:schemeClr val="dk1"/>
-                </a:solidFill>
-                <a:effectLst/>
-                <a:uFillTx/>
-                <a:latin typeface="Calibri"/>
-                <a:ea typeface="Microsoft YaHei"/>
-              </a:rPr>
-              <a:t>{{feito_descricao}}</a:t>
-            </a:r>
-            <a:endParaRPr lang="en-US" sz="2600" b="0" u="none" strike="noStrike">
-              <a:solidFill>
-                <a:schemeClr val="dk1"/>
-              </a:solidFill>
-              <a:effectLst/>
-              <a:uFillTx/>
-              <a:latin typeface="Calibri"/>
-            </a:endParaRPr>
-          </a:p>
         </p:txBody>
       </p:sp>
       <p:pic>
         <p:nvPicPr>
-          <p:cNvPr id="72" name=""/>
+          <p:cNvPr id="72" name="Imagem 71"/>
           <p:cNvPicPr/>
           <p:nvPr/>
         </p:nvPicPr>
         <p:blipFill>
-          <a:blip r:embed="rId1"/>
+          <a:blip r:embed="rId2"/>
           <a:stretch/>
         </p:blipFill>
         <p:spPr>
@@ -9397,15 +10002,22 @@
           </a:ln>
         </p:spPr>
         <p:style>
-          <a:lnRef idx="0"/>
-          <a:fillRef idx="0"/>
-          <a:effectRef idx="0"/>
+          <a:lnRef idx="0">
+            <a:scrgbClr r="0" g="0" b="0"/>
+          </a:lnRef>
+          <a:fillRef idx="0">
+            <a:scrgbClr r="0" g="0" b="0"/>
+          </a:fillRef>
+          <a:effectRef idx="0">
+            <a:scrgbClr r="0" g="0" b="0"/>
+          </a:effectRef>
           <a:fontRef idx="minor"/>
         </p:style>
         <p:txBody>
           <a:bodyPr lIns="90000" tIns="45000" rIns="90000" bIns="45000" anchor="ctr">
             <a:noAutofit/>
           </a:bodyPr>
+          <a:lstStyle/>
           <a:p>
             <a:pPr algn="ctr" defTabSz="457200">
               <a:lnSpc>
@@ -9436,19 +10048,1060 @@
       </p:sp>
     </p:spTree>
   </p:cSld>
-  <mc:AlternateContent>
-    <mc:Choice Requires="p14">
-      <p:transition spd="slow" p14:dur="2000"/>
-    </mc:Choice>
-    <mc:Fallback>
-      <p:transition spd="slow"/>
-    </mc:Fallback>
-  </mc:AlternateContent>
+  <p:clrMapOvr>
+    <a:masterClrMapping/>
+  </p:clrMapOvr>
 </p:sld>
 </file>
 
 <file path=ppt/slides/slide4.xml><?xml version="1.0" encoding="utf-8"?>
-<p:sld xmlns:a="http://schemas.openxmlformats.org/drawingml/2006/main" xmlns:p="http://schemas.openxmlformats.org/presentationml/2006/main" xmlns:r="http://schemas.openxmlformats.org/officeDocument/2006/relationships" xmlns:p14="http://schemas.microsoft.com/office/powerpoint/2010/main" xmlns:p15="http://schemas.microsoft.com/office/powerpoint/2012/main" xmlns:mc="http://schemas.openxmlformats.org/markup-compatibility/2006">
+<p:sld xmlns:a="http://schemas.openxmlformats.org/drawingml/2006/main" xmlns:r="http://schemas.openxmlformats.org/officeDocument/2006/relationships" xmlns:p="http://schemas.openxmlformats.org/presentationml/2006/main">
+  <p:cSld>
+    <p:spTree>
+      <p:nvGrpSpPr>
+        <p:cNvPr id="1" name="">
+          <a:extLst>
+            <a:ext uri="{FF2B5EF4-FFF2-40B4-BE49-F238E27FC236}">
+              <a16:creationId xmlns:a16="http://schemas.microsoft.com/office/drawing/2014/main" id="{B114C28B-5E15-33C1-CEA6-6C65A20D80E4}"/>
+            </a:ext>
+          </a:extLst>
+        </p:cNvPr>
+        <p:cNvGrpSpPr/>
+        <p:nvPr/>
+      </p:nvGrpSpPr>
+      <p:grpSpPr>
+        <a:xfrm>
+          <a:off x="0" y="0"/>
+          <a:ext cx="0" cy="0"/>
+          <a:chOff x="0" y="0"/>
+          <a:chExt cx="0" cy="0"/>
+        </a:xfrm>
+      </p:grpSpPr>
+      <p:sp>
+        <p:nvSpPr>
+          <p:cNvPr id="71" name="PlaceHolder 1">
+            <a:extLst>
+              <a:ext uri="{FF2B5EF4-FFF2-40B4-BE49-F238E27FC236}">
+                <a16:creationId xmlns:a16="http://schemas.microsoft.com/office/drawing/2014/main" id="{D3379948-67E2-0B77-A34C-D977D0B3DB00}"/>
+              </a:ext>
+            </a:extLst>
+          </p:cNvPr>
+          <p:cNvSpPr>
+            <a:spLocks noGrp="1"/>
+          </p:cNvSpPr>
+          <p:nvPr>
+            <p:ph/>
+          </p:nvPr>
+        </p:nvSpPr>
+        <p:spPr>
+          <a:xfrm>
+            <a:off x="457919" y="1827720"/>
+            <a:ext cx="8685361" cy="4850280"/>
+          </a:xfrm>
+          <a:prstGeom prst="rect">
+            <a:avLst/>
+          </a:prstGeom>
+          <a:noFill/>
+          <a:ln w="0">
+            <a:noFill/>
+          </a:ln>
+        </p:spPr>
+        <p:txBody>
+          <a:bodyPr lIns="91440" tIns="45720" rIns="91440" bIns="45720" anchor="t">
+            <a:noAutofit/>
+          </a:bodyPr>
+          <a:lstStyle/>
+          <a:p>
+            <a:pPr algn="l" defTabSz="457200">
+              <a:lnSpc>
+                <a:spcPct val="100000"/>
+              </a:lnSpc>
+              <a:spcBef>
+                <a:spcPts val="641"/>
+              </a:spcBef>
+              <a:buClr>
+                <a:srgbClr val="000000"/>
+              </a:buClr>
+              <a:buSzPct val="45000"/>
+              <a:tabLst>
+                <a:tab pos="0" algn="l"/>
+              </a:tabLst>
+            </a:pPr>
+            <a:r>
+              <a:rPr lang="en-US" sz="2500" b="1" u="none" strike="noStrike" dirty="0" err="1">
+                <a:solidFill>
+                  <a:schemeClr val="tx2"/>
+                </a:solidFill>
+                <a:effectLst/>
+                <a:uFillTx/>
+                <a:latin typeface="Calibri"/>
+              </a:rPr>
+              <a:t>Cobertura</a:t>
+            </a:r>
+            <a:r>
+              <a:rPr lang="en-US" sz="2500" b="1" u="none" strike="noStrike" dirty="0">
+                <a:solidFill>
+                  <a:schemeClr val="tx2"/>
+                </a:solidFill>
+                <a:effectLst/>
+                <a:uFillTx/>
+                <a:latin typeface="Calibri"/>
+              </a:rPr>
+              <a:t> do sprint</a:t>
+            </a:r>
+            <a:r>
+              <a:rPr lang="en-US" sz="2500" b="1" dirty="0">
+                <a:solidFill>
+                  <a:schemeClr val="tx2"/>
+                </a:solidFill>
+              </a:rPr>
+              <a:t>:</a:t>
+            </a:r>
+          </a:p>
+          <a:p>
+            <a:pPr marL="864000" lvl="1" indent="-324000" algn="l" defTabSz="457200">
+              <a:spcBef>
+                <a:spcPts val="561"/>
+              </a:spcBef>
+              <a:buClr>
+                <a:srgbClr val="000000"/>
+              </a:buClr>
+              <a:buSzPct val="45000"/>
+              <a:buFont typeface="Wingdings" charset="2"/>
+              <a:buChar char=""/>
+              <a:tabLst>
+                <a:tab pos="0" algn="l"/>
+              </a:tabLst>
+            </a:pPr>
+            <a:r>
+              <a:rPr lang="en-US" sz="2500" b="1" dirty="0">
+                <a:solidFill>
+                  <a:schemeClr val="dk1"/>
+                </a:solidFill>
+                <a:latin typeface="Calibri"/>
+                <a:ea typeface="Microsoft YaHei"/>
+              </a:rPr>
+              <a:t>Anterior à esse sprint</a:t>
+            </a:r>
+            <a:r>
+              <a:rPr lang="en-US" sz="2500" dirty="0">
+                <a:solidFill>
+                  <a:schemeClr val="dk1"/>
+                </a:solidFill>
+                <a:latin typeface="Calibri"/>
+                <a:ea typeface="Microsoft YaHei"/>
+              </a:rPr>
+              <a:t>: {{</a:t>
+            </a:r>
+            <a:r>
+              <a:rPr lang="en-US" sz="2500" dirty="0" err="1">
+                <a:solidFill>
+                  <a:schemeClr val="dk1"/>
+                </a:solidFill>
+                <a:latin typeface="Calibri"/>
+                <a:ea typeface="Microsoft YaHei"/>
+              </a:rPr>
+              <a:t>cobertura_sprint.media_projeto.antes</a:t>
+            </a:r>
+            <a:r>
+              <a:rPr lang="en-US" sz="2500" dirty="0">
+                <a:solidFill>
+                  <a:schemeClr val="dk1"/>
+                </a:solidFill>
+                <a:latin typeface="Calibri"/>
+                <a:ea typeface="Microsoft YaHei"/>
+              </a:rPr>
+              <a:t>}}</a:t>
+            </a:r>
+          </a:p>
+          <a:p>
+            <a:pPr marL="864000" lvl="1" indent="-324000" algn="l" defTabSz="457200">
+              <a:spcBef>
+                <a:spcPts val="561"/>
+              </a:spcBef>
+              <a:buClr>
+                <a:srgbClr val="000000"/>
+              </a:buClr>
+              <a:buSzPct val="45000"/>
+              <a:buFont typeface="Wingdings" charset="2"/>
+              <a:buChar char=""/>
+              <a:tabLst>
+                <a:tab pos="0" algn="l"/>
+              </a:tabLst>
+            </a:pPr>
+            <a:r>
+              <a:rPr lang="en-US" sz="2500" b="1" dirty="0" err="1">
+                <a:solidFill>
+                  <a:schemeClr val="dk1"/>
+                </a:solidFill>
+                <a:latin typeface="Calibri"/>
+                <a:ea typeface="Microsoft YaHei"/>
+              </a:rPr>
+              <a:t>Após</a:t>
+            </a:r>
+            <a:r>
+              <a:rPr lang="en-US" sz="2500" b="1" dirty="0">
+                <a:solidFill>
+                  <a:schemeClr val="dk1"/>
+                </a:solidFill>
+                <a:latin typeface="Calibri"/>
+                <a:ea typeface="Microsoft YaHei"/>
+              </a:rPr>
+              <a:t> esse sprint</a:t>
+            </a:r>
+            <a:r>
+              <a:rPr lang="en-US" sz="2500" dirty="0">
+                <a:solidFill>
+                  <a:schemeClr val="dk1"/>
+                </a:solidFill>
+                <a:latin typeface="Calibri"/>
+                <a:ea typeface="Microsoft YaHei"/>
+              </a:rPr>
+              <a:t>: {{</a:t>
+            </a:r>
+            <a:r>
+              <a:rPr lang="en-US" sz="2500" dirty="0" err="1">
+                <a:solidFill>
+                  <a:schemeClr val="dk1"/>
+                </a:solidFill>
+                <a:latin typeface="Calibri"/>
+                <a:ea typeface="Microsoft YaHei"/>
+              </a:rPr>
+              <a:t>cobertura_sprint.media_projeto.depois</a:t>
+            </a:r>
+            <a:r>
+              <a:rPr lang="en-US" sz="2500" dirty="0">
+                <a:solidFill>
+                  <a:schemeClr val="dk1"/>
+                </a:solidFill>
+                <a:latin typeface="Calibri"/>
+                <a:ea typeface="Microsoft YaHei"/>
+              </a:rPr>
+              <a:t>}}</a:t>
+            </a:r>
+          </a:p>
+          <a:p>
+            <a:pPr marL="864000" lvl="1" indent="-324000" algn="l" defTabSz="457200">
+              <a:spcBef>
+                <a:spcPts val="561"/>
+              </a:spcBef>
+              <a:buClr>
+                <a:srgbClr val="000000"/>
+              </a:buClr>
+              <a:buSzPct val="45000"/>
+              <a:buFont typeface="Wingdings" charset="2"/>
+              <a:buChar char=""/>
+              <a:tabLst>
+                <a:tab pos="0" algn="l"/>
+              </a:tabLst>
+            </a:pPr>
+            <a:r>
+              <a:rPr lang="en-US" sz="2500" b="1" dirty="0" err="1">
+                <a:solidFill>
+                  <a:schemeClr val="dk1"/>
+                </a:solidFill>
+                <a:latin typeface="Calibri"/>
+                <a:ea typeface="Microsoft YaHei"/>
+              </a:rPr>
+              <a:t>Diferença</a:t>
+            </a:r>
+            <a:r>
+              <a:rPr lang="en-US" sz="2500" dirty="0">
+                <a:solidFill>
+                  <a:schemeClr val="dk1"/>
+                </a:solidFill>
+                <a:latin typeface="Calibri"/>
+                <a:ea typeface="Microsoft YaHei"/>
+              </a:rPr>
+              <a:t>: {{</a:t>
+            </a:r>
+            <a:r>
+              <a:rPr lang="en-US" sz="2500" dirty="0" err="1">
+                <a:solidFill>
+                  <a:schemeClr val="dk1"/>
+                </a:solidFill>
+                <a:latin typeface="Calibri"/>
+                <a:ea typeface="Microsoft YaHei"/>
+              </a:rPr>
+              <a:t>cobertura_sprint.media_projeto.delta_pp</a:t>
+            </a:r>
+            <a:r>
+              <a:rPr lang="en-US" sz="2500" dirty="0">
+                <a:solidFill>
+                  <a:schemeClr val="dk1"/>
+                </a:solidFill>
+                <a:latin typeface="Calibri"/>
+                <a:ea typeface="Microsoft YaHei"/>
+              </a:rPr>
+              <a:t>}}</a:t>
+            </a:r>
+          </a:p>
+          <a:p>
+            <a:pPr marL="343080" indent="-343080" algn="l">
+              <a:spcBef>
+                <a:spcPts val="641"/>
+              </a:spcBef>
+              <a:buClr>
+                <a:srgbClr val="000000"/>
+              </a:buClr>
+              <a:buSzPct val="45000"/>
+              <a:buFont typeface="Wingdings" charset="2"/>
+              <a:buChar char=""/>
+            </a:pPr>
+            <a:r>
+              <a:rPr lang="en-US" sz="2500" b="1" u="none" strike="noStrike" dirty="0" err="1">
+                <a:solidFill>
+                  <a:schemeClr val="tx2"/>
+                </a:solidFill>
+                <a:effectLst/>
+                <a:uFillTx/>
+                <a:latin typeface="Calibri"/>
+                <a:ea typeface="Microsoft YaHei"/>
+              </a:rPr>
+              <a:t>Avanço</a:t>
+            </a:r>
+            <a:r>
+              <a:rPr lang="en-US" sz="2500" b="1" u="none" strike="noStrike" dirty="0">
+                <a:solidFill>
+                  <a:schemeClr val="tx2"/>
+                </a:solidFill>
+                <a:effectLst/>
+                <a:uFillTx/>
+                <a:latin typeface="Calibri"/>
+                <a:ea typeface="Microsoft YaHei"/>
+              </a:rPr>
+              <a:t> de </a:t>
+            </a:r>
+            <a:r>
+              <a:rPr lang="en-US" sz="2500" b="1" u="none" strike="noStrike" dirty="0" err="1">
+                <a:solidFill>
+                  <a:schemeClr val="tx2"/>
+                </a:solidFill>
+                <a:effectLst/>
+                <a:uFillTx/>
+                <a:latin typeface="Calibri"/>
+                <a:ea typeface="Microsoft YaHei"/>
+              </a:rPr>
+              <a:t>Requisitos</a:t>
+            </a:r>
+            <a:r>
+              <a:rPr lang="en-US" sz="2500" b="1" u="none" strike="noStrike" dirty="0">
+                <a:solidFill>
+                  <a:schemeClr val="tx2"/>
+                </a:solidFill>
+                <a:effectLst/>
+                <a:uFillTx/>
+                <a:latin typeface="Calibri"/>
+                <a:ea typeface="Microsoft YaHei"/>
+              </a:rPr>
+              <a:t>: </a:t>
+            </a:r>
+          </a:p>
+          <a:p>
+            <a:pPr marL="864000" lvl="1" indent="-324000" algn="l" defTabSz="457200">
+              <a:spcBef>
+                <a:spcPts val="561"/>
+              </a:spcBef>
+              <a:buClr>
+                <a:srgbClr val="000000"/>
+              </a:buClr>
+              <a:buSzPct val="45000"/>
+              <a:buFont typeface="Wingdings" charset="2"/>
+              <a:buChar char=""/>
+              <a:tabLst>
+                <a:tab pos="0" algn="l"/>
+              </a:tabLst>
+            </a:pPr>
+            <a:r>
+              <a:rPr lang="en-US" sz="2500" b="1" dirty="0">
+                <a:solidFill>
+                  <a:schemeClr val="dk1"/>
+                </a:solidFill>
+                <a:latin typeface="Calibri"/>
+                <a:ea typeface="Microsoft YaHei"/>
+              </a:rPr>
+              <a:t>Total de </a:t>
+            </a:r>
+            <a:r>
+              <a:rPr lang="en-US" sz="2500" b="1" dirty="0" err="1">
+                <a:solidFill>
+                  <a:schemeClr val="dk1"/>
+                </a:solidFill>
+                <a:latin typeface="Calibri"/>
+                <a:ea typeface="Microsoft YaHei"/>
+              </a:rPr>
+              <a:t>requisitos</a:t>
+            </a:r>
+            <a:r>
+              <a:rPr lang="en-US" sz="2500" b="1" dirty="0">
+                <a:solidFill>
+                  <a:schemeClr val="dk1"/>
+                </a:solidFill>
+                <a:latin typeface="Calibri"/>
+                <a:ea typeface="Microsoft YaHei"/>
+              </a:rPr>
+              <a:t> </a:t>
+            </a:r>
+            <a:r>
+              <a:rPr lang="en-US" sz="2500" b="1" dirty="0" err="1">
+                <a:solidFill>
+                  <a:schemeClr val="dk1"/>
+                </a:solidFill>
+                <a:latin typeface="Calibri"/>
+                <a:ea typeface="Microsoft YaHei"/>
+              </a:rPr>
+              <a:t>avançados</a:t>
+            </a:r>
+            <a:r>
+              <a:rPr lang="en-US" sz="2500" dirty="0">
+                <a:solidFill>
+                  <a:schemeClr val="dk1"/>
+                </a:solidFill>
+                <a:latin typeface="Calibri"/>
+                <a:ea typeface="Microsoft YaHei"/>
+              </a:rPr>
+              <a:t>: {{</a:t>
+            </a:r>
+            <a:r>
+              <a:rPr lang="en-US" sz="2500" dirty="0" err="1">
+                <a:solidFill>
+                  <a:schemeClr val="dk1"/>
+                </a:solidFill>
+                <a:latin typeface="Calibri"/>
+                <a:ea typeface="Microsoft YaHei"/>
+              </a:rPr>
+              <a:t>cobertura_sprint.reqs_avancados</a:t>
+            </a:r>
+            <a:r>
+              <a:rPr lang="en-US" sz="2500" dirty="0">
+                <a:solidFill>
+                  <a:schemeClr val="dk1"/>
+                </a:solidFill>
+                <a:latin typeface="Calibri"/>
+                <a:ea typeface="Microsoft YaHei"/>
+              </a:rPr>
+              <a:t>}}</a:t>
+            </a:r>
+          </a:p>
+          <a:p>
+            <a:pPr marL="864000" lvl="1" indent="-324000" algn="l" defTabSz="457200">
+              <a:spcBef>
+                <a:spcPts val="561"/>
+              </a:spcBef>
+              <a:buClr>
+                <a:srgbClr val="000000"/>
+              </a:buClr>
+              <a:buSzPct val="45000"/>
+              <a:buFont typeface="Wingdings" charset="2"/>
+              <a:buChar char=""/>
+              <a:tabLst>
+                <a:tab pos="0" algn="l"/>
+              </a:tabLst>
+            </a:pPr>
+            <a:r>
+              <a:rPr lang="en-US" sz="2500" b="1" dirty="0">
+                <a:solidFill>
+                  <a:schemeClr val="dk1"/>
+                </a:solidFill>
+                <a:latin typeface="Calibri"/>
+                <a:ea typeface="Microsoft YaHei"/>
+              </a:rPr>
+              <a:t>Total de </a:t>
+            </a:r>
+            <a:r>
+              <a:rPr lang="en-US" sz="2500" b="1" dirty="0" err="1">
+                <a:solidFill>
+                  <a:schemeClr val="dk1"/>
+                </a:solidFill>
+                <a:latin typeface="Calibri"/>
+                <a:ea typeface="Microsoft YaHei"/>
+              </a:rPr>
+              <a:t>requisitos</a:t>
+            </a:r>
+            <a:r>
+              <a:rPr lang="en-US" sz="2500" b="1" dirty="0">
+                <a:solidFill>
+                  <a:schemeClr val="dk1"/>
+                </a:solidFill>
+                <a:latin typeface="Calibri"/>
+                <a:ea typeface="Microsoft YaHei"/>
+              </a:rPr>
+              <a:t> </a:t>
+            </a:r>
+            <a:r>
+              <a:rPr lang="en-US" sz="2500" b="1" dirty="0" err="1">
+                <a:solidFill>
+                  <a:schemeClr val="dk1"/>
+                </a:solidFill>
+                <a:latin typeface="Calibri"/>
+                <a:ea typeface="Microsoft YaHei"/>
+              </a:rPr>
+              <a:t>iniciados</a:t>
+            </a:r>
+            <a:r>
+              <a:rPr lang="en-US" sz="2500" dirty="0">
+                <a:solidFill>
+                  <a:schemeClr val="dk1"/>
+                </a:solidFill>
+                <a:latin typeface="Calibri"/>
+                <a:ea typeface="Microsoft YaHei"/>
+              </a:rPr>
+              <a:t>: {{</a:t>
+            </a:r>
+            <a:r>
+              <a:rPr lang="en-US" sz="2500" dirty="0" err="1">
+                <a:solidFill>
+                  <a:schemeClr val="dk1"/>
+                </a:solidFill>
+                <a:latin typeface="Calibri"/>
+                <a:ea typeface="Microsoft YaHei"/>
+              </a:rPr>
+              <a:t>cobertura_sprint.reqs_novos_iniciados</a:t>
+            </a:r>
+            <a:r>
+              <a:rPr lang="en-US" sz="2500" dirty="0">
+                <a:solidFill>
+                  <a:schemeClr val="dk1"/>
+                </a:solidFill>
+                <a:latin typeface="Calibri"/>
+                <a:ea typeface="Microsoft YaHei"/>
+              </a:rPr>
+              <a:t>}}</a:t>
+            </a:r>
+          </a:p>
+          <a:p>
+            <a:pPr marL="864000" lvl="1" indent="-324000" algn="l" defTabSz="457200">
+              <a:spcBef>
+                <a:spcPts val="561"/>
+              </a:spcBef>
+              <a:buClr>
+                <a:srgbClr val="000000"/>
+              </a:buClr>
+              <a:buSzPct val="45000"/>
+              <a:buFont typeface="Wingdings" charset="2"/>
+              <a:buChar char=""/>
+              <a:tabLst>
+                <a:tab pos="0" algn="l"/>
+              </a:tabLst>
+            </a:pPr>
+            <a:endParaRPr lang="en-US" sz="2600" dirty="0">
+              <a:solidFill>
+                <a:schemeClr val="dk1"/>
+              </a:solidFill>
+              <a:latin typeface="Calibri"/>
+              <a:ea typeface="Microsoft YaHei"/>
+            </a:endParaRPr>
+          </a:p>
+        </p:txBody>
+      </p:sp>
+      <p:pic>
+        <p:nvPicPr>
+          <p:cNvPr id="72" name="Imagem 71">
+            <a:extLst>
+              <a:ext uri="{FF2B5EF4-FFF2-40B4-BE49-F238E27FC236}">
+                <a16:creationId xmlns:a16="http://schemas.microsoft.com/office/drawing/2014/main" id="{BF3D210A-FD0E-6D5A-2611-8E55A48071B6}"/>
+              </a:ext>
+            </a:extLst>
+          </p:cNvPr>
+          <p:cNvPicPr/>
+          <p:nvPr/>
+        </p:nvPicPr>
+        <p:blipFill>
+          <a:blip r:embed="rId2"/>
+          <a:stretch/>
+        </p:blipFill>
+        <p:spPr>
+          <a:xfrm>
+            <a:off x="720" y="-28800"/>
+            <a:ext cx="9142560" cy="1647720"/>
+          </a:xfrm>
+          <a:prstGeom prst="rect">
+            <a:avLst/>
+          </a:prstGeom>
+          <a:noFill/>
+          <a:ln w="0">
+            <a:noFill/>
+          </a:ln>
+        </p:spPr>
+      </p:pic>
+      <p:sp>
+        <p:nvSpPr>
+          <p:cNvPr id="73" name="Title 3">
+            <a:extLst>
+              <a:ext uri="{FF2B5EF4-FFF2-40B4-BE49-F238E27FC236}">
+                <a16:creationId xmlns:a16="http://schemas.microsoft.com/office/drawing/2014/main" id="{C0C8C7D4-F9F0-D549-E869-DD346D086A8F}"/>
+              </a:ext>
+            </a:extLst>
+          </p:cNvPr>
+          <p:cNvSpPr/>
+          <p:nvPr/>
+        </p:nvSpPr>
+        <p:spPr>
+          <a:xfrm>
+            <a:off x="915480" y="180000"/>
+            <a:ext cx="8228160" cy="1141560"/>
+          </a:xfrm>
+          <a:prstGeom prst="rect">
+            <a:avLst/>
+          </a:prstGeom>
+          <a:noFill/>
+          <a:ln w="0">
+            <a:noFill/>
+          </a:ln>
+        </p:spPr>
+        <p:style>
+          <a:lnRef idx="0">
+            <a:scrgbClr r="0" g="0" b="0"/>
+          </a:lnRef>
+          <a:fillRef idx="0">
+            <a:scrgbClr r="0" g="0" b="0"/>
+          </a:fillRef>
+          <a:effectRef idx="0">
+            <a:scrgbClr r="0" g="0" b="0"/>
+          </a:effectRef>
+          <a:fontRef idx="minor"/>
+        </p:style>
+        <p:txBody>
+          <a:bodyPr lIns="90000" tIns="45000" rIns="90000" bIns="45000" anchor="ctr">
+            <a:noAutofit/>
+          </a:bodyPr>
+          <a:lstStyle/>
+          <a:p>
+            <a:pPr algn="ctr" defTabSz="457200">
+              <a:lnSpc>
+                <a:spcPct val="100000"/>
+              </a:lnSpc>
+            </a:pPr>
+            <a:r>
+              <a:rPr lang="en-US" sz="4400" b="0" u="none" strike="noStrike" dirty="0" err="1">
+                <a:solidFill>
+                  <a:srgbClr val="EA7500"/>
+                </a:solidFill>
+                <a:effectLst/>
+                <a:uFillTx/>
+                <a:latin typeface="Calibri"/>
+              </a:rPr>
+              <a:t>Cobertura</a:t>
+            </a:r>
+            <a:r>
+              <a:rPr lang="en-US" sz="4400" b="0" u="none" strike="noStrike" dirty="0">
+                <a:solidFill>
+                  <a:srgbClr val="EA7500"/>
+                </a:solidFill>
+                <a:effectLst/>
+                <a:uFillTx/>
+                <a:latin typeface="Calibri"/>
+              </a:rPr>
+              <a:t> da Sprint</a:t>
+            </a:r>
+            <a:endParaRPr lang="pt-BR" sz="4400" b="0" u="none" strike="noStrike" dirty="0">
+              <a:solidFill>
+                <a:srgbClr val="000000"/>
+              </a:solidFill>
+              <a:effectLst/>
+              <a:uFillTx/>
+              <a:latin typeface="Arial"/>
+            </a:endParaRPr>
+          </a:p>
+        </p:txBody>
+      </p:sp>
+    </p:spTree>
+    <p:extLst>
+      <p:ext uri="{BB962C8B-B14F-4D97-AF65-F5344CB8AC3E}">
+        <p14:creationId xmlns:p14="http://schemas.microsoft.com/office/powerpoint/2010/main" val="1057179183"/>
+      </p:ext>
+    </p:extLst>
+  </p:cSld>
+  <p:clrMapOvr>
+    <a:masterClrMapping/>
+  </p:clrMapOvr>
+</p:sld>
+</file>
+
+<file path=ppt/slides/slide5.xml><?xml version="1.0" encoding="utf-8"?>
+<p:sld xmlns:a="http://schemas.openxmlformats.org/drawingml/2006/main" xmlns:r="http://schemas.openxmlformats.org/officeDocument/2006/relationships" xmlns:p="http://schemas.openxmlformats.org/presentationml/2006/main">
+  <p:cSld>
+    <p:spTree>
+      <p:nvGrpSpPr>
+        <p:cNvPr id="1" name="">
+          <a:extLst>
+            <a:ext uri="{FF2B5EF4-FFF2-40B4-BE49-F238E27FC236}">
+              <a16:creationId xmlns:a16="http://schemas.microsoft.com/office/drawing/2014/main" id="{F2FB98D9-C285-B8FA-C00A-45C2E2F4E5FE}"/>
+            </a:ext>
+          </a:extLst>
+        </p:cNvPr>
+        <p:cNvGrpSpPr/>
+        <p:nvPr/>
+      </p:nvGrpSpPr>
+      <p:grpSpPr>
+        <a:xfrm>
+          <a:off x="0" y="0"/>
+          <a:ext cx="0" cy="0"/>
+          <a:chOff x="0" y="0"/>
+          <a:chExt cx="0" cy="0"/>
+        </a:xfrm>
+      </p:grpSpPr>
+      <p:sp>
+        <p:nvSpPr>
+          <p:cNvPr id="71" name="PlaceHolder 1">
+            <a:extLst>
+              <a:ext uri="{FF2B5EF4-FFF2-40B4-BE49-F238E27FC236}">
+                <a16:creationId xmlns:a16="http://schemas.microsoft.com/office/drawing/2014/main" id="{609192AB-E9DC-EBBE-3C72-9686799F1BC7}"/>
+              </a:ext>
+            </a:extLst>
+          </p:cNvPr>
+          <p:cNvSpPr>
+            <a:spLocks noGrp="1"/>
+          </p:cNvSpPr>
+          <p:nvPr>
+            <p:ph/>
+          </p:nvPr>
+        </p:nvSpPr>
+        <p:spPr>
+          <a:xfrm>
+            <a:off x="457919" y="1618920"/>
+            <a:ext cx="8685361" cy="5059080"/>
+          </a:xfrm>
+          <a:prstGeom prst="rect">
+            <a:avLst/>
+          </a:prstGeom>
+          <a:noFill/>
+          <a:ln w="0">
+            <a:noFill/>
+          </a:ln>
+        </p:spPr>
+        <p:txBody>
+          <a:bodyPr lIns="91440" tIns="45720" rIns="91440" bIns="45720" anchor="t">
+            <a:noAutofit/>
+          </a:bodyPr>
+          <a:lstStyle/>
+          <a:p>
+            <a:pPr algn="l">
+              <a:spcBef>
+                <a:spcPts val="641"/>
+              </a:spcBef>
+              <a:buClr>
+                <a:srgbClr val="000000"/>
+              </a:buClr>
+              <a:buSzPct val="45000"/>
+            </a:pPr>
+            <a:endParaRPr dirty="0"/>
+          </a:p>
+          <a:p>
+            <a:pPr algn="l" defTabSz="457200">
+              <a:lnSpc>
+                <a:spcPct val="100000"/>
+              </a:lnSpc>
+              <a:spcBef>
+                <a:spcPts val="641"/>
+              </a:spcBef>
+              <a:buClr>
+                <a:srgbClr val="000000"/>
+              </a:buClr>
+              <a:buSzPct val="45000"/>
+              <a:tabLst>
+                <a:tab pos="0" algn="l"/>
+              </a:tabLst>
+            </a:pPr>
+            <a:r>
+              <a:rPr lang="en-US" sz="2600" b="1" dirty="0" err="1">
+                <a:solidFill>
+                  <a:schemeClr val="tx2"/>
+                </a:solidFill>
+              </a:rPr>
+              <a:t>Evolução</a:t>
+            </a:r>
+            <a:r>
+              <a:rPr lang="en-US" sz="2600" b="1" dirty="0">
+                <a:solidFill>
+                  <a:schemeClr val="tx2"/>
+                </a:solidFill>
+              </a:rPr>
+              <a:t> de </a:t>
+            </a:r>
+            <a:r>
+              <a:rPr lang="en-US" sz="2600" b="1" dirty="0" err="1">
+                <a:solidFill>
+                  <a:schemeClr val="tx2"/>
+                </a:solidFill>
+              </a:rPr>
+              <a:t>desenvolvimento</a:t>
+            </a:r>
+            <a:r>
+              <a:rPr lang="en-US" sz="2600" b="1" dirty="0">
+                <a:solidFill>
+                  <a:schemeClr val="tx2"/>
+                </a:solidFill>
+              </a:rPr>
+              <a:t> </a:t>
+            </a:r>
+            <a:r>
+              <a:rPr lang="en-US" sz="2600" b="1" dirty="0" err="1">
+                <a:solidFill>
+                  <a:schemeClr val="tx2"/>
+                </a:solidFill>
+              </a:rPr>
+              <a:t>por</a:t>
+            </a:r>
+            <a:r>
+              <a:rPr lang="en-US" sz="2600" b="1" dirty="0">
+                <a:solidFill>
+                  <a:schemeClr val="tx2"/>
+                </a:solidFill>
+              </a:rPr>
+              <a:t> </a:t>
+            </a:r>
+            <a:r>
+              <a:rPr lang="en-US" sz="2600" b="1" dirty="0" err="1">
+                <a:solidFill>
+                  <a:schemeClr val="tx2"/>
+                </a:solidFill>
+              </a:rPr>
+              <a:t>requisito</a:t>
+            </a:r>
+            <a:r>
+              <a:rPr lang="en-US" sz="2600" b="1" dirty="0">
+                <a:solidFill>
+                  <a:schemeClr val="tx2"/>
+                </a:solidFill>
+              </a:rPr>
+              <a:t>:</a:t>
+            </a:r>
+          </a:p>
+          <a:p>
+            <a:pPr marL="864000" lvl="1" indent="-324000" algn="l" defTabSz="457200">
+              <a:spcBef>
+                <a:spcPts val="561"/>
+              </a:spcBef>
+              <a:buClr>
+                <a:srgbClr val="000000"/>
+              </a:buClr>
+              <a:buSzPct val="45000"/>
+              <a:buFont typeface="Wingdings" charset="2"/>
+              <a:buChar char=""/>
+              <a:tabLst>
+                <a:tab pos="0" algn="l"/>
+              </a:tabLst>
+            </a:pPr>
+            <a:r>
+              <a:rPr lang="en-US" sz="2600" dirty="0">
+                <a:solidFill>
+                  <a:schemeClr val="dk1"/>
+                </a:solidFill>
+                <a:latin typeface="Calibri"/>
+                <a:ea typeface="Microsoft YaHei"/>
+              </a:rPr>
+              <a:t>{{</a:t>
+            </a:r>
+            <a:r>
+              <a:rPr lang="en-US" sz="2600" dirty="0" err="1">
+                <a:solidFill>
+                  <a:schemeClr val="dk1"/>
+                </a:solidFill>
+                <a:latin typeface="Calibri"/>
+                <a:ea typeface="Microsoft YaHei"/>
+              </a:rPr>
+              <a:t>cobertura_sprint.por_req</a:t>
+            </a:r>
+            <a:r>
+              <a:rPr lang="en-US" sz="2600" dirty="0">
+                <a:solidFill>
+                  <a:schemeClr val="dk1"/>
+                </a:solidFill>
+                <a:latin typeface="Calibri"/>
+                <a:ea typeface="Microsoft YaHei"/>
+              </a:rPr>
+              <a:t>}}</a:t>
+            </a:r>
+          </a:p>
+          <a:p>
+            <a:pPr marL="864000" lvl="1" indent="-324000" algn="l" defTabSz="457200">
+              <a:spcBef>
+                <a:spcPts val="561"/>
+              </a:spcBef>
+              <a:buClr>
+                <a:srgbClr val="000000"/>
+              </a:buClr>
+              <a:buSzPct val="45000"/>
+              <a:buFont typeface="Wingdings" charset="2"/>
+              <a:buChar char=""/>
+              <a:tabLst>
+                <a:tab pos="0" algn="l"/>
+              </a:tabLst>
+            </a:pPr>
+            <a:endParaRPr lang="en-US" sz="2600" dirty="0">
+              <a:solidFill>
+                <a:schemeClr val="dk1"/>
+              </a:solidFill>
+              <a:latin typeface="Calibri"/>
+              <a:ea typeface="Microsoft YaHei"/>
+            </a:endParaRPr>
+          </a:p>
+        </p:txBody>
+      </p:sp>
+      <p:pic>
+        <p:nvPicPr>
+          <p:cNvPr id="72" name="Imagem 71">
+            <a:extLst>
+              <a:ext uri="{FF2B5EF4-FFF2-40B4-BE49-F238E27FC236}">
+                <a16:creationId xmlns:a16="http://schemas.microsoft.com/office/drawing/2014/main" id="{D7EB8217-4646-CFB8-CB0D-BF2058F75E4A}"/>
+              </a:ext>
+            </a:extLst>
+          </p:cNvPr>
+          <p:cNvPicPr/>
+          <p:nvPr/>
+        </p:nvPicPr>
+        <p:blipFill>
+          <a:blip r:embed="rId2"/>
+          <a:stretch/>
+        </p:blipFill>
+        <p:spPr>
+          <a:xfrm>
+            <a:off x="720" y="-28800"/>
+            <a:ext cx="9142560" cy="1647720"/>
+          </a:xfrm>
+          <a:prstGeom prst="rect">
+            <a:avLst/>
+          </a:prstGeom>
+          <a:noFill/>
+          <a:ln w="0">
+            <a:noFill/>
+          </a:ln>
+        </p:spPr>
+      </p:pic>
+      <p:sp>
+        <p:nvSpPr>
+          <p:cNvPr id="73" name="Title 3">
+            <a:extLst>
+              <a:ext uri="{FF2B5EF4-FFF2-40B4-BE49-F238E27FC236}">
+                <a16:creationId xmlns:a16="http://schemas.microsoft.com/office/drawing/2014/main" id="{62B8FAD1-9B65-A1E2-1291-3887854C0897}"/>
+              </a:ext>
+            </a:extLst>
+          </p:cNvPr>
+          <p:cNvSpPr/>
+          <p:nvPr/>
+        </p:nvSpPr>
+        <p:spPr>
+          <a:xfrm>
+            <a:off x="1903750" y="180000"/>
+            <a:ext cx="7239889" cy="1141560"/>
+          </a:xfrm>
+          <a:prstGeom prst="rect">
+            <a:avLst/>
+          </a:prstGeom>
+          <a:noFill/>
+          <a:ln w="0">
+            <a:noFill/>
+          </a:ln>
+        </p:spPr>
+        <p:style>
+          <a:lnRef idx="0">
+            <a:scrgbClr r="0" g="0" b="0"/>
+          </a:lnRef>
+          <a:fillRef idx="0">
+            <a:scrgbClr r="0" g="0" b="0"/>
+          </a:fillRef>
+          <a:effectRef idx="0">
+            <a:scrgbClr r="0" g="0" b="0"/>
+          </a:effectRef>
+          <a:fontRef idx="minor"/>
+        </p:style>
+        <p:txBody>
+          <a:bodyPr lIns="90000" tIns="45000" rIns="90000" bIns="45000" anchor="ctr">
+            <a:noAutofit/>
+          </a:bodyPr>
+          <a:lstStyle/>
+          <a:p>
+            <a:pPr algn="ctr" defTabSz="457200">
+              <a:lnSpc>
+                <a:spcPct val="100000"/>
+              </a:lnSpc>
+            </a:pPr>
+            <a:r>
+              <a:rPr lang="en-US" sz="4400" b="0" u="none" strike="noStrike" dirty="0" err="1">
+                <a:solidFill>
+                  <a:srgbClr val="EA7500"/>
+                </a:solidFill>
+                <a:effectLst/>
+                <a:uFillTx/>
+                <a:latin typeface="Calibri"/>
+              </a:rPr>
+              <a:t>Evolução</a:t>
+            </a:r>
+            <a:r>
+              <a:rPr lang="en-US" sz="4400" b="0" u="none" strike="noStrike" dirty="0">
+                <a:solidFill>
+                  <a:srgbClr val="EA7500"/>
+                </a:solidFill>
+                <a:effectLst/>
+                <a:uFillTx/>
+                <a:latin typeface="Calibri"/>
+              </a:rPr>
+              <a:t> de </a:t>
+            </a:r>
+            <a:r>
+              <a:rPr lang="en-US" sz="4400" b="0" u="none" strike="noStrike" dirty="0" err="1">
+                <a:solidFill>
+                  <a:srgbClr val="EA7500"/>
+                </a:solidFill>
+                <a:effectLst/>
+                <a:uFillTx/>
+                <a:latin typeface="Calibri"/>
+              </a:rPr>
+              <a:t>desenvolvimento</a:t>
+            </a:r>
+            <a:endParaRPr lang="en-US" sz="4400" b="0" u="none" strike="noStrike" dirty="0">
+              <a:solidFill>
+                <a:srgbClr val="EA7500"/>
+              </a:solidFill>
+              <a:effectLst/>
+              <a:uFillTx/>
+              <a:latin typeface="Calibri"/>
+            </a:endParaRPr>
+          </a:p>
+          <a:p>
+            <a:pPr algn="ctr" defTabSz="457200">
+              <a:lnSpc>
+                <a:spcPct val="100000"/>
+              </a:lnSpc>
+            </a:pPr>
+            <a:r>
+              <a:rPr lang="en-US" sz="4400" b="0" u="none" strike="noStrike" dirty="0">
+                <a:solidFill>
+                  <a:srgbClr val="EA7500"/>
+                </a:solidFill>
+                <a:effectLst/>
+                <a:uFillTx/>
+                <a:latin typeface="Calibri"/>
+              </a:rPr>
+              <a:t> da Sprint</a:t>
+            </a:r>
+            <a:endParaRPr lang="pt-BR" sz="4400" b="0" u="none" strike="noStrike" dirty="0">
+              <a:solidFill>
+                <a:srgbClr val="000000"/>
+              </a:solidFill>
+              <a:effectLst/>
+              <a:uFillTx/>
+              <a:latin typeface="Arial"/>
+            </a:endParaRPr>
+          </a:p>
+        </p:txBody>
+      </p:sp>
+    </p:spTree>
+    <p:extLst>
+      <p:ext uri="{BB962C8B-B14F-4D97-AF65-F5344CB8AC3E}">
+        <p14:creationId xmlns:p14="http://schemas.microsoft.com/office/powerpoint/2010/main" val="3801042350"/>
+      </p:ext>
+    </p:extLst>
+  </p:cSld>
+  <p:clrMapOvr>
+    <a:masterClrMapping/>
+  </p:clrMapOvr>
+</p:sld>
+</file>
+
+<file path=ppt/slides/slide6.xml><?xml version="1.0" encoding="utf-8"?>
+<p:sld xmlns:a="http://schemas.openxmlformats.org/drawingml/2006/main" xmlns:r="http://schemas.openxmlformats.org/officeDocument/2006/relationships" xmlns:p="http://schemas.openxmlformats.org/presentationml/2006/main">
   <p:cSld>
     <p:spTree>
       <p:nvGrpSpPr>
@@ -9476,8 +11129,8 @@
         </p:nvSpPr>
         <p:spPr>
           <a:xfrm>
-            <a:off x="457200" y="1600200"/>
-            <a:ext cx="8228160" cy="2718720"/>
+            <a:off x="457200" y="1618920"/>
+            <a:ext cx="8228160" cy="5059080"/>
           </a:xfrm>
           <a:prstGeom prst="rect">
             <a:avLst/>
@@ -9491,6 +11144,7 @@
           <a:bodyPr lIns="91440" tIns="45720" rIns="91440" bIns="45720" anchor="t">
             <a:noAutofit/>
           </a:bodyPr>
+          <a:lstStyle/>
           <a:p>
             <a:pPr indent="0" algn="l" defTabSz="457200">
               <a:lnSpc>
@@ -9504,7 +11158,19 @@
                 <a:tab pos="0" algn="l"/>
               </a:tabLst>
             </a:pPr>
-            <a:endParaRPr lang="en-US" sz="3200" b="0" u="none" strike="noStrike">
+            <a:r>
+              <a:rPr sz="2800" dirty="0"/>
+              <a:t>{{</a:t>
+            </a:r>
+            <a:r>
+              <a:rPr sz="2800" dirty="0" err="1"/>
+              <a:t>SLIDE:riscos_e_impedimentos</a:t>
+            </a:r>
+            <a:r>
+              <a:rPr sz="2800" dirty="0"/>
+              <a:t>}}</a:t>
+            </a:r>
+            <a:endParaRPr lang="en-US" sz="2800" b="0" u="none" strike="noStrike" dirty="0">
               <a:solidFill>
                 <a:schemeClr val="dk1"/>
               </a:solidFill>
@@ -9514,52 +11180,225 @@
             </a:endParaRPr>
           </a:p>
           <a:p>
-            <a:pPr marL="343080" indent="-343080" algn="l" defTabSz="457200">
-              <a:lnSpc>
-                <a:spcPct val="100000"/>
-              </a:lnSpc>
+            <a:pPr marL="457200" indent="-457200" algn="l">
               <a:spcBef>
                 <a:spcPts val="641"/>
               </a:spcBef>
               <a:buClr>
                 <a:srgbClr val="000000"/>
               </a:buClr>
-              <a:buFont typeface="Arial"/>
-              <a:buChar char="•"/>
-              <a:tabLst>
-                <a:tab pos="0" algn="l"/>
-              </a:tabLst>
-            </a:pPr>
-            <a:r>
-              <a:rPr lang="en-US" sz="2800" b="0" u="none" strike="noStrike">
-                <a:solidFill>
-                  <a:schemeClr val="dk1"/>
-                </a:solidFill>
-                <a:effectLst/>
-                <a:uFillTx/>
-                <a:latin typeface="Calibri"/>
-              </a:rPr>
-              <a:t>{{bloqueios}}</a:t>
-            </a:r>
-            <a:endParaRPr lang="en-US" sz="2800" b="0" u="none" strike="noStrike">
-              <a:solidFill>
-                <a:schemeClr val="dk1"/>
-              </a:solidFill>
-              <a:effectLst/>
-              <a:uFillTx/>
-              <a:latin typeface="Calibri"/>
-            </a:endParaRPr>
+              <a:buFont typeface="+mj-lt"/>
+              <a:buAutoNum type="arabicPeriod"/>
+            </a:pPr>
+            <a:r>
+              <a:rPr lang="en-US" sz="2200" b="1" u="none" strike="noStrike" dirty="0">
+                <a:solidFill>
+                  <a:schemeClr val="tx2"/>
+                </a:solidFill>
+                <a:effectLst/>
+                <a:uFillTx/>
+                <a:latin typeface="Calibri"/>
+              </a:rPr>
+              <a:t>{{</a:t>
+            </a:r>
+            <a:r>
+              <a:rPr lang="pt-BR" sz="2200" b="1" dirty="0" err="1">
+                <a:solidFill>
+                  <a:schemeClr val="tx2"/>
+                </a:solidFill>
+              </a:rPr>
+              <a:t>riscos_e_impedimentos.nome</a:t>
+            </a:r>
+            <a:r>
+              <a:rPr lang="en-US" sz="2200" b="1" u="none" strike="noStrike" dirty="0">
+                <a:solidFill>
+                  <a:schemeClr val="tx2"/>
+                </a:solidFill>
+                <a:effectLst/>
+                <a:uFillTx/>
+                <a:latin typeface="Calibri"/>
+              </a:rPr>
+              <a:t>}}</a:t>
+            </a:r>
+          </a:p>
+          <a:p>
+            <a:pPr marL="864000" lvl="1" indent="-324000" algn="l" defTabSz="457200">
+              <a:spcBef>
+                <a:spcPts val="561"/>
+              </a:spcBef>
+              <a:buClr>
+                <a:srgbClr val="000000"/>
+              </a:buClr>
+              <a:buSzPct val="45000"/>
+              <a:buFont typeface="Wingdings" charset="2"/>
+              <a:buChar char=""/>
+              <a:tabLst>
+                <a:tab pos="0" algn="l"/>
+              </a:tabLst>
+            </a:pPr>
+            <a:r>
+              <a:rPr lang="en-US" sz="2200" b="1" dirty="0" err="1">
+                <a:solidFill>
+                  <a:schemeClr val="dk1"/>
+                </a:solidFill>
+                <a:latin typeface="Calibri"/>
+                <a:ea typeface="Microsoft YaHei"/>
+              </a:rPr>
+              <a:t>Severidade</a:t>
+            </a:r>
+            <a:r>
+              <a:rPr lang="en-US" sz="2200" dirty="0">
+                <a:solidFill>
+                  <a:schemeClr val="dk1"/>
+                </a:solidFill>
+                <a:latin typeface="Calibri"/>
+                <a:ea typeface="Microsoft YaHei"/>
+              </a:rPr>
+              <a:t>: {{</a:t>
+            </a:r>
+            <a:r>
+              <a:rPr lang="pt-BR" sz="2200" dirty="0" err="1">
+                <a:solidFill>
+                  <a:schemeClr val="dk1"/>
+                </a:solidFill>
+                <a:latin typeface="Calibri"/>
+                <a:ea typeface="Microsoft YaHei"/>
+              </a:rPr>
+              <a:t>riscos_e_impedimentos.tipo</a:t>
+            </a:r>
+            <a:r>
+              <a:rPr lang="en-US" sz="2200" dirty="0">
+                <a:solidFill>
+                  <a:schemeClr val="dk1"/>
+                </a:solidFill>
+                <a:latin typeface="Calibri"/>
+                <a:ea typeface="Microsoft YaHei"/>
+              </a:rPr>
+              <a:t>}}</a:t>
+            </a:r>
+          </a:p>
+          <a:p>
+            <a:pPr marL="864000" lvl="1" indent="-324000" algn="l" defTabSz="457200">
+              <a:spcBef>
+                <a:spcPts val="561"/>
+              </a:spcBef>
+              <a:buClr>
+                <a:srgbClr val="000000"/>
+              </a:buClr>
+              <a:buSzPct val="45000"/>
+              <a:buFont typeface="Wingdings" charset="2"/>
+              <a:buChar char=""/>
+              <a:tabLst>
+                <a:tab pos="0" algn="l"/>
+              </a:tabLst>
+            </a:pPr>
+            <a:r>
+              <a:rPr lang="en-US" sz="2200" b="1" dirty="0" err="1">
+                <a:solidFill>
+                  <a:schemeClr val="dk1"/>
+                </a:solidFill>
+                <a:latin typeface="Calibri"/>
+                <a:ea typeface="Microsoft YaHei"/>
+              </a:rPr>
+              <a:t>Motivo</a:t>
+            </a:r>
+            <a:r>
+              <a:rPr lang="en-US" sz="2200" dirty="0">
+                <a:solidFill>
+                  <a:schemeClr val="dk1"/>
+                </a:solidFill>
+                <a:latin typeface="Calibri"/>
+                <a:ea typeface="Microsoft YaHei"/>
+              </a:rPr>
+              <a:t>: {{</a:t>
+            </a:r>
+            <a:r>
+              <a:rPr lang="pt-BR" sz="2200" dirty="0" err="1">
+                <a:solidFill>
+                  <a:schemeClr val="dk1"/>
+                </a:solidFill>
+                <a:latin typeface="Calibri"/>
+                <a:ea typeface="Microsoft YaHei"/>
+              </a:rPr>
+              <a:t>riscos_e_impedimentos.motivo</a:t>
+            </a:r>
+            <a:r>
+              <a:rPr lang="en-US" sz="2200" dirty="0">
+                <a:solidFill>
+                  <a:schemeClr val="dk1"/>
+                </a:solidFill>
+                <a:latin typeface="Calibri"/>
+                <a:ea typeface="Microsoft YaHei"/>
+              </a:rPr>
+              <a:t>}}</a:t>
+            </a:r>
+          </a:p>
+          <a:p>
+            <a:pPr marL="864000" lvl="1" indent="-324000" algn="l" defTabSz="457200">
+              <a:spcBef>
+                <a:spcPts val="561"/>
+              </a:spcBef>
+              <a:buClr>
+                <a:srgbClr val="000000"/>
+              </a:buClr>
+              <a:buSzPct val="45000"/>
+              <a:buFont typeface="Wingdings" charset="2"/>
+              <a:buChar char=""/>
+              <a:tabLst>
+                <a:tab pos="0" algn="l"/>
+              </a:tabLst>
+            </a:pPr>
+            <a:r>
+              <a:rPr lang="en-US" sz="2200" b="1" dirty="0" err="1">
+                <a:solidFill>
+                  <a:schemeClr val="dk1"/>
+                </a:solidFill>
+                <a:latin typeface="Calibri"/>
+                <a:ea typeface="Microsoft YaHei"/>
+              </a:rPr>
+              <a:t>Ação</a:t>
+            </a:r>
+            <a:r>
+              <a:rPr lang="en-US" sz="2200" dirty="0">
+                <a:solidFill>
+                  <a:schemeClr val="dk1"/>
+                </a:solidFill>
+                <a:latin typeface="Calibri"/>
+                <a:ea typeface="Microsoft YaHei"/>
+              </a:rPr>
+              <a:t>: {{</a:t>
+            </a:r>
+            <a:r>
+              <a:rPr lang="pt-BR" sz="2200" dirty="0" err="1">
+                <a:solidFill>
+                  <a:schemeClr val="dk1"/>
+                </a:solidFill>
+                <a:latin typeface="Calibri"/>
+                <a:ea typeface="Microsoft YaHei"/>
+              </a:rPr>
+              <a:t>riscos_e_impedimentos.acao_esperada</a:t>
+            </a:r>
+            <a:r>
+              <a:rPr lang="en-US" sz="2200" dirty="0">
+                <a:solidFill>
+                  <a:schemeClr val="dk1"/>
+                </a:solidFill>
+                <a:latin typeface="Calibri"/>
+                <a:ea typeface="Microsoft YaHei"/>
+              </a:rPr>
+              <a:t>}}</a:t>
+            </a:r>
           </a:p>
         </p:txBody>
       </p:sp>
       <p:pic>
         <p:nvPicPr>
-          <p:cNvPr id="75" name=""/>
+          <p:cNvPr id="75" name="Imagem 74"/>
           <p:cNvPicPr/>
           <p:nvPr/>
         </p:nvPicPr>
         <p:blipFill>
-          <a:blip r:embed="rId1"/>
+          <a:blip r:embed="rId2"/>
           <a:stretch/>
         </p:blipFill>
         <p:spPr>
@@ -9596,15 +11435,22 @@
           </a:ln>
         </p:spPr>
         <p:style>
-          <a:lnRef idx="0"/>
-          <a:fillRef idx="0"/>
-          <a:effectRef idx="0"/>
+          <a:lnRef idx="0">
+            <a:scrgbClr r="0" g="0" b="0"/>
+          </a:lnRef>
+          <a:fillRef idx="0">
+            <a:scrgbClr r="0" g="0" b="0"/>
+          </a:fillRef>
+          <a:effectRef idx="0">
+            <a:scrgbClr r="0" g="0" b="0"/>
+          </a:effectRef>
           <a:fontRef idx="minor"/>
         </p:style>
         <p:txBody>
           <a:bodyPr lIns="90000" tIns="45000" rIns="90000" bIns="45000" anchor="ctr">
             <a:noAutofit/>
           </a:bodyPr>
+          <a:lstStyle/>
           <a:p>
             <a:pPr algn="ctr" defTabSz="457200">
               <a:lnSpc>
@@ -9612,17 +11458,30 @@
               </a:lnSpc>
             </a:pPr>
             <a:r>
-              <a:rPr lang="en-US" sz="4400" b="0" u="none" strike="noStrike">
+              <a:rPr lang="en-US" sz="4400" dirty="0" err="1">
                 <a:solidFill>
                   <a:srgbClr val="EA7500"/>
                 </a:solidFill>
-                <a:effectLst/>
-                <a:uFillTx/>
-                <a:latin typeface="Calibri"/>
-              </a:rPr>
-              <a:t>Bloqueios</a:t>
-            </a:r>
-            <a:endParaRPr lang="pt-BR" sz="4400" b="0" u="none" strike="noStrike">
+              </a:rPr>
+              <a:t>Riscos</a:t>
+            </a:r>
+            <a:r>
+              <a:rPr lang="en-US" sz="4400" dirty="0">
+                <a:solidFill>
+                  <a:srgbClr val="EA7500"/>
+                </a:solidFill>
+              </a:rPr>
+              <a:t> e </a:t>
+            </a:r>
+            <a:r>
+              <a:rPr lang="en-US" sz="4400" dirty="0" err="1">
+                <a:solidFill>
+                  <a:srgbClr val="EA7500"/>
+                </a:solidFill>
+              </a:rPr>
+              <a:t>Impedimentos</a:t>
+            </a:r>
+            <a:endParaRPr lang="pt-BR" sz="4400" b="0" u="none" strike="noStrike" dirty="0">
               <a:solidFill>
                 <a:srgbClr val="000000"/>
               </a:solidFill>
@@ -9635,19 +11494,14 @@
       </p:sp>
     </p:spTree>
   </p:cSld>
-  <mc:AlternateContent>
-    <mc:Choice Requires="p14">
-      <p:transition spd="slow" p14:dur="2000"/>
-    </mc:Choice>
-    <mc:Fallback>
-      <p:transition spd="slow"/>
-    </mc:Fallback>
-  </mc:AlternateContent>
+  <p:clrMapOvr>
+    <a:masterClrMapping/>
+  </p:clrMapOvr>
 </p:sld>
 </file>
 
-<file path=ppt/slides/slide5.xml><?xml version="1.0" encoding="utf-8"?>
-<p:sld xmlns:a="http://schemas.openxmlformats.org/drawingml/2006/main" xmlns:p="http://schemas.openxmlformats.org/presentationml/2006/main" xmlns:r="http://schemas.openxmlformats.org/officeDocument/2006/relationships" xmlns:p14="http://schemas.microsoft.com/office/powerpoint/2010/main" xmlns:p15="http://schemas.microsoft.com/office/powerpoint/2012/main" xmlns:mc="http://schemas.openxmlformats.org/markup-compatibility/2006">
+<file path=ppt/slides/slide7.xml><?xml version="1.0" encoding="utf-8"?>
+<p:sld xmlns:a="http://schemas.openxmlformats.org/drawingml/2006/main" xmlns:r="http://schemas.openxmlformats.org/officeDocument/2006/relationships" xmlns:p="http://schemas.openxmlformats.org/presentationml/2006/main">
   <p:cSld>
     <p:spTree>
       <p:nvGrpSpPr>
@@ -9675,8 +11529,8 @@
         </p:nvSpPr>
         <p:spPr>
           <a:xfrm>
-            <a:off x="457200" y="1080000"/>
-            <a:ext cx="8542080" cy="5257080"/>
+            <a:off x="457200" y="1530360"/>
+            <a:ext cx="8542080" cy="5147640"/>
           </a:xfrm>
           <a:prstGeom prst="rect">
             <a:avLst/>
@@ -9690,6 +11544,7 @@
           <a:bodyPr lIns="91440" tIns="45720" rIns="91440" bIns="45720" anchor="t">
             <a:noAutofit/>
           </a:bodyPr>
+          <a:lstStyle/>
           <a:p>
             <a:pPr indent="0" algn="l" defTabSz="457200">
               <a:lnSpc>
@@ -9703,7 +11558,7 @@
                 <a:tab pos="0" algn="l"/>
               </a:tabLst>
             </a:pPr>
-            <a:endParaRPr lang="en-US" sz="3200" b="0" u="none" strike="noStrike">
+            <a:endParaRPr lang="en-US" sz="3200" b="0" u="none" strike="noStrike" dirty="0">
               <a:solidFill>
                 <a:schemeClr val="dk1"/>
               </a:solidFill>
@@ -9730,24 +11585,71 @@
               </a:tabLst>
             </a:pPr>
             <a:r>
-              <a:rPr lang="en-US" sz="2600" b="0" u="none" strike="noStrike">
-                <a:solidFill>
-                  <a:schemeClr val="dk1"/>
-                </a:solidFill>
-                <a:effectLst/>
-                <a:uFillTx/>
-                <a:latin typeface="Calibri"/>
-              </a:rPr>
-              <a:t>Artefatos criados: {{metricas.artefatos_criados}}</a:t>
-            </a:r>
-            <a:endParaRPr lang="en-US" sz="2600" b="0" u="none" strike="noStrike">
-              <a:solidFill>
-                <a:schemeClr val="dk1"/>
-              </a:solidFill>
-              <a:effectLst/>
-              <a:uFillTx/>
-              <a:latin typeface="Calibri"/>
-            </a:endParaRPr>
+              <a:rPr lang="en-US" sz="2400" b="0" u="none" strike="noStrike" dirty="0" err="1">
+                <a:solidFill>
+                  <a:schemeClr val="dk1"/>
+                </a:solidFill>
+                <a:effectLst/>
+                <a:uFillTx/>
+                <a:latin typeface="Calibri"/>
+              </a:rPr>
+              <a:t>Artefatos</a:t>
+            </a:r>
+            <a:r>
+              <a:rPr lang="en-US" sz="2400" b="0" u="none" strike="noStrike" dirty="0">
+                <a:solidFill>
+                  <a:schemeClr val="dk1"/>
+                </a:solidFill>
+                <a:effectLst/>
+                <a:uFillTx/>
+                <a:latin typeface="Calibri"/>
+              </a:rPr>
+              <a:t> </a:t>
+            </a:r>
+            <a:r>
+              <a:rPr lang="en-US" sz="2400" b="0" u="none" strike="noStrike" dirty="0" err="1">
+                <a:solidFill>
+                  <a:schemeClr val="dk1"/>
+                </a:solidFill>
+                <a:effectLst/>
+                <a:uFillTx/>
+                <a:latin typeface="Calibri"/>
+              </a:rPr>
+              <a:t>criados</a:t>
+            </a:r>
+            <a:r>
+              <a:rPr lang="en-US" sz="2400" b="0" u="none" strike="noStrike" dirty="0">
+                <a:solidFill>
+                  <a:schemeClr val="dk1"/>
+                </a:solidFill>
+                <a:effectLst/>
+                <a:uFillTx/>
+                <a:latin typeface="Calibri"/>
+              </a:rPr>
+              <a:t>: {{</a:t>
+            </a:r>
+            <a:r>
+              <a:rPr lang="en-US" sz="2400" b="0" u="none" strike="noStrike" dirty="0" err="1">
+                <a:solidFill>
+                  <a:schemeClr val="dk1"/>
+                </a:solidFill>
+                <a:effectLst/>
+                <a:uFillTx/>
+                <a:latin typeface="Calibri"/>
+              </a:rPr>
+              <a:t>metricas.artefatos_criados</a:t>
+            </a:r>
+            <a:r>
+              <a:rPr lang="en-US" sz="2400" b="0" u="none" strike="noStrike" dirty="0">
+                <a:solidFill>
+                  <a:schemeClr val="dk1"/>
+                </a:solidFill>
+                <a:effectLst/>
+                <a:uFillTx/>
+                <a:latin typeface="Calibri"/>
+              </a:rPr>
+              <a:t>}}</a:t>
+            </a:r>
           </a:p>
           <a:p>
             <a:pPr marL="343080" indent="-343080" algn="l" defTabSz="457200">
@@ -9767,24 +11669,71 @@
               </a:tabLst>
             </a:pPr>
             <a:r>
-              <a:rPr lang="en-US" sz="2600" b="0" u="none" strike="noStrike">
-                <a:solidFill>
-                  <a:schemeClr val="dk1"/>
-                </a:solidFill>
-                <a:effectLst/>
-                <a:uFillTx/>
-                <a:latin typeface="Calibri"/>
-              </a:rPr>
-              <a:t>Pendências resolvidas: {{metricas.pendencias_resolvidas}}</a:t>
-            </a:r>
-            <a:endParaRPr lang="en-US" sz="2600" b="0" u="none" strike="noStrike">
-              <a:solidFill>
-                <a:schemeClr val="dk1"/>
-              </a:solidFill>
-              <a:effectLst/>
-              <a:uFillTx/>
-              <a:latin typeface="Calibri"/>
-            </a:endParaRPr>
+              <a:rPr lang="en-US" sz="2400" b="0" u="none" strike="noStrike" dirty="0" err="1">
+                <a:solidFill>
+                  <a:schemeClr val="dk1"/>
+                </a:solidFill>
+                <a:effectLst/>
+                <a:uFillTx/>
+                <a:latin typeface="Calibri"/>
+              </a:rPr>
+              <a:t>Pendências</a:t>
+            </a:r>
+            <a:r>
+              <a:rPr lang="en-US" sz="2400" b="0" u="none" strike="noStrike" dirty="0">
+                <a:solidFill>
+                  <a:schemeClr val="dk1"/>
+                </a:solidFill>
+                <a:effectLst/>
+                <a:uFillTx/>
+                <a:latin typeface="Calibri"/>
+              </a:rPr>
+              <a:t> </a:t>
+            </a:r>
+            <a:r>
+              <a:rPr lang="en-US" sz="2400" b="0" u="none" strike="noStrike" dirty="0" err="1">
+                <a:solidFill>
+                  <a:schemeClr val="dk1"/>
+                </a:solidFill>
+                <a:effectLst/>
+                <a:uFillTx/>
+                <a:latin typeface="Calibri"/>
+              </a:rPr>
+              <a:t>resolvidas</a:t>
+            </a:r>
+            <a:r>
+              <a:rPr lang="en-US" sz="2400" b="0" u="none" strike="noStrike" dirty="0">
+                <a:solidFill>
+                  <a:schemeClr val="dk1"/>
+                </a:solidFill>
+                <a:effectLst/>
+                <a:uFillTx/>
+                <a:latin typeface="Calibri"/>
+              </a:rPr>
+              <a:t>: {{</a:t>
+            </a:r>
+            <a:r>
+              <a:rPr lang="en-US" sz="2400" b="0" u="none" strike="noStrike" dirty="0" err="1">
+                <a:solidFill>
+                  <a:schemeClr val="dk1"/>
+                </a:solidFill>
+                <a:effectLst/>
+                <a:uFillTx/>
+                <a:latin typeface="Calibri"/>
+              </a:rPr>
+              <a:t>metricas.pendencias_resolvidas</a:t>
+            </a:r>
+            <a:r>
+              <a:rPr lang="en-US" sz="2400" b="0" u="none" strike="noStrike" dirty="0">
+                <a:solidFill>
+                  <a:schemeClr val="dk1"/>
+                </a:solidFill>
+                <a:effectLst/>
+                <a:uFillTx/>
+                <a:latin typeface="Calibri"/>
+              </a:rPr>
+              <a:t>}}</a:t>
+            </a:r>
           </a:p>
           <a:p>
             <a:pPr marL="343080" indent="-343080" algn="l" defTabSz="457200">
@@ -9804,24 +11753,60 @@
               </a:tabLst>
             </a:pPr>
             <a:r>
-              <a:rPr lang="en-US" sz="2600" b="0" u="none" strike="noStrike">
-                <a:solidFill>
-                  <a:schemeClr val="dk1"/>
-                </a:solidFill>
-                <a:effectLst/>
-                <a:uFillTx/>
-                <a:latin typeface="Calibri"/>
-              </a:rPr>
-              <a:t>Novas pendências: {{metricas.pendencias_novas}}</a:t>
-            </a:r>
-            <a:endParaRPr lang="en-US" sz="2600" b="0" u="none" strike="noStrike">
-              <a:solidFill>
-                <a:schemeClr val="dk1"/>
-              </a:solidFill>
-              <a:effectLst/>
-              <a:uFillTx/>
-              <a:latin typeface="Calibri"/>
-            </a:endParaRPr>
+              <a:rPr lang="en-US" sz="2400" b="0" u="none" strike="noStrike" dirty="0">
+                <a:solidFill>
+                  <a:schemeClr val="dk1"/>
+                </a:solidFill>
+                <a:effectLst/>
+                <a:uFillTx/>
+                <a:latin typeface="Calibri"/>
+              </a:rPr>
+              <a:t>Novas </a:t>
+            </a:r>
+            <a:r>
+              <a:rPr lang="en-US" sz="2400" b="0" u="none" strike="noStrike" dirty="0" err="1">
+                <a:solidFill>
+                  <a:schemeClr val="dk1"/>
+                </a:solidFill>
+                <a:effectLst/>
+                <a:uFillTx/>
+                <a:latin typeface="Calibri"/>
+              </a:rPr>
+              <a:t>pendências</a:t>
+            </a:r>
+            <a:r>
+              <a:rPr lang="en-US" sz="2400" b="0" u="none" strike="noStrike" dirty="0">
+                <a:solidFill>
+                  <a:schemeClr val="dk1"/>
+                </a:solidFill>
+                <a:effectLst/>
+                <a:uFillTx/>
+                <a:latin typeface="Calibri"/>
+              </a:rPr>
+              <a:t>: {{</a:t>
+            </a:r>
+            <a:r>
+              <a:rPr lang="en-US" sz="2400" b="0" u="none" strike="noStrike" dirty="0" err="1">
+                <a:solidFill>
+                  <a:schemeClr val="dk1"/>
+                </a:solidFill>
+                <a:effectLst/>
+                <a:uFillTx/>
+                <a:latin typeface="Calibri"/>
+              </a:rPr>
+              <a:t>metricas.pendencias_novas</a:t>
+            </a:r>
+            <a:r>
+              <a:rPr lang="en-US" sz="2400" b="0" u="none" strike="noStrike" dirty="0">
+                <a:solidFill>
+                  <a:schemeClr val="dk1"/>
+                </a:solidFill>
+                <a:effectLst/>
+                <a:uFillTx/>
+                <a:latin typeface="Calibri"/>
+              </a:rPr>
+              <a:t>}}</a:t>
+            </a:r>
           </a:p>
           <a:p>
             <a:pPr marL="343080" indent="-343080" algn="l" defTabSz="457200">
@@ -9841,24 +11826,60 @@
               </a:tabLst>
             </a:pPr>
             <a:r>
-              <a:rPr lang="en-US" sz="2600" b="0" u="none" strike="noStrike">
-                <a:solidFill>
-                  <a:schemeClr val="dk1"/>
-                </a:solidFill>
-                <a:effectLst/>
-                <a:uFillTx/>
-                <a:latin typeface="Calibri"/>
-              </a:rPr>
-              <a:t>Bugs corrigidos: {{metricas.bugs_corrigidos}}</a:t>
-            </a:r>
-            <a:endParaRPr lang="en-US" sz="2600" b="0" u="none" strike="noStrike">
-              <a:solidFill>
-                <a:schemeClr val="dk1"/>
-              </a:solidFill>
-              <a:effectLst/>
-              <a:uFillTx/>
-              <a:latin typeface="Calibri"/>
-            </a:endParaRPr>
+              <a:rPr lang="en-US" sz="2400" b="0" u="none" strike="noStrike" dirty="0">
+                <a:solidFill>
+                  <a:schemeClr val="dk1"/>
+                </a:solidFill>
+                <a:effectLst/>
+                <a:uFillTx/>
+                <a:latin typeface="Calibri"/>
+              </a:rPr>
+              <a:t>Bugs </a:t>
+            </a:r>
+            <a:r>
+              <a:rPr lang="en-US" sz="2400" b="0" u="none" strike="noStrike" dirty="0" err="1">
+                <a:solidFill>
+                  <a:schemeClr val="dk1"/>
+                </a:solidFill>
+                <a:effectLst/>
+                <a:uFillTx/>
+                <a:latin typeface="Calibri"/>
+              </a:rPr>
+              <a:t>corrigidos</a:t>
+            </a:r>
+            <a:r>
+              <a:rPr lang="en-US" sz="2400" b="0" u="none" strike="noStrike" dirty="0">
+                <a:solidFill>
+                  <a:schemeClr val="dk1"/>
+                </a:solidFill>
+                <a:effectLst/>
+                <a:uFillTx/>
+                <a:latin typeface="Calibri"/>
+              </a:rPr>
+              <a:t>: {{</a:t>
+            </a:r>
+            <a:r>
+              <a:rPr lang="en-US" sz="2400" b="0" u="none" strike="noStrike" dirty="0" err="1">
+                <a:solidFill>
+                  <a:schemeClr val="dk1"/>
+                </a:solidFill>
+                <a:effectLst/>
+                <a:uFillTx/>
+                <a:latin typeface="Calibri"/>
+              </a:rPr>
+              <a:t>metricas.bugs_corrigidos</a:t>
+            </a:r>
+            <a:r>
+              <a:rPr lang="en-US" sz="2400" b="0" u="none" strike="noStrike" dirty="0">
+                <a:solidFill>
+                  <a:schemeClr val="dk1"/>
+                </a:solidFill>
+                <a:effectLst/>
+                <a:uFillTx/>
+                <a:latin typeface="Calibri"/>
+              </a:rPr>
+              <a:t>}}</a:t>
+            </a:r>
           </a:p>
           <a:p>
             <a:pPr marL="343080" indent="-343080" algn="l" defTabSz="457200">
@@ -9878,24 +11899,38 @@
               </a:tabLst>
             </a:pPr>
             <a:r>
-              <a:rPr lang="en-US" sz="2600" b="0" u="none" strike="noStrike">
-                <a:solidFill>
-                  <a:schemeClr val="dk1"/>
-                </a:solidFill>
-                <a:effectLst/>
-                <a:uFillTx/>
-                <a:latin typeface="Calibri"/>
-              </a:rPr>
-              <a:t>Total de Reports: {{metricas.reports_total}}</a:t>
-            </a:r>
-            <a:endParaRPr lang="en-US" sz="2600" b="0" u="none" strike="noStrike">
-              <a:solidFill>
-                <a:schemeClr val="dk1"/>
-              </a:solidFill>
-              <a:effectLst/>
-              <a:uFillTx/>
-              <a:latin typeface="Calibri"/>
-            </a:endParaRPr>
+              <a:rPr lang="en-US" sz="2400" b="0" u="none" strike="noStrike" dirty="0">
+                <a:solidFill>
+                  <a:schemeClr val="dk1"/>
+                </a:solidFill>
+                <a:effectLst/>
+                <a:uFillTx/>
+                <a:latin typeface="Calibri"/>
+              </a:rPr>
+              <a:t>Total de Reports: {{</a:t>
+            </a:r>
+            <a:r>
+              <a:rPr lang="en-US" sz="2400" b="0" u="none" strike="noStrike" dirty="0" err="1">
+                <a:solidFill>
+                  <a:schemeClr val="dk1"/>
+                </a:solidFill>
+                <a:effectLst/>
+                <a:uFillTx/>
+                <a:latin typeface="Calibri"/>
+              </a:rPr>
+              <a:t>metricas.reports_total</a:t>
+            </a:r>
+            <a:r>
+              <a:rPr lang="en-US" sz="2400" b="0" u="none" strike="noStrike" dirty="0">
+                <a:solidFill>
+                  <a:schemeClr val="dk1"/>
+                </a:solidFill>
+                <a:effectLst/>
+                <a:uFillTx/>
+                <a:latin typeface="Calibri"/>
+              </a:rPr>
+              <a:t>}}</a:t>
+            </a:r>
           </a:p>
           <a:p>
             <a:pPr marL="343080" indent="-343080" algn="l" defTabSz="457200">
@@ -9915,24 +11950,60 @@
               </a:tabLst>
             </a:pPr>
             <a:r>
-              <a:rPr lang="en-US" sz="2600" b="0" u="none" strike="noStrike">
-                <a:solidFill>
-                  <a:schemeClr val="dk1"/>
-                </a:solidFill>
-                <a:effectLst/>
-                <a:uFillTx/>
-                <a:latin typeface="Calibri"/>
-              </a:rPr>
-              <a:t>Reports resolvidos: {{metricas.reports_resolvidos}}</a:t>
-            </a:r>
-            <a:endParaRPr lang="en-US" sz="2600" b="0" u="none" strike="noStrike">
-              <a:solidFill>
-                <a:schemeClr val="dk1"/>
-              </a:solidFill>
-              <a:effectLst/>
-              <a:uFillTx/>
-              <a:latin typeface="Calibri"/>
-            </a:endParaRPr>
+              <a:rPr lang="en-US" sz="2400" b="0" u="none" strike="noStrike" dirty="0">
+                <a:solidFill>
+                  <a:schemeClr val="dk1"/>
+                </a:solidFill>
+                <a:effectLst/>
+                <a:uFillTx/>
+                <a:latin typeface="Calibri"/>
+              </a:rPr>
+              <a:t>Reports </a:t>
+            </a:r>
+            <a:r>
+              <a:rPr lang="en-US" sz="2400" b="0" u="none" strike="noStrike" dirty="0" err="1">
+                <a:solidFill>
+                  <a:schemeClr val="dk1"/>
+                </a:solidFill>
+                <a:effectLst/>
+                <a:uFillTx/>
+                <a:latin typeface="Calibri"/>
+              </a:rPr>
+              <a:t>resolvidos</a:t>
+            </a:r>
+            <a:r>
+              <a:rPr lang="en-US" sz="2400" b="0" u="none" strike="noStrike" dirty="0">
+                <a:solidFill>
+                  <a:schemeClr val="dk1"/>
+                </a:solidFill>
+                <a:effectLst/>
+                <a:uFillTx/>
+                <a:latin typeface="Calibri"/>
+              </a:rPr>
+              <a:t>: {{</a:t>
+            </a:r>
+            <a:r>
+              <a:rPr lang="en-US" sz="2400" b="0" u="none" strike="noStrike" dirty="0" err="1">
+                <a:solidFill>
+                  <a:schemeClr val="dk1"/>
+                </a:solidFill>
+                <a:effectLst/>
+                <a:uFillTx/>
+                <a:latin typeface="Calibri"/>
+              </a:rPr>
+              <a:t>metricas.reports_resolvidos</a:t>
+            </a:r>
+            <a:r>
+              <a:rPr lang="en-US" sz="2400" b="0" u="none" strike="noStrike" dirty="0">
+                <a:solidFill>
+                  <a:schemeClr val="dk1"/>
+                </a:solidFill>
+                <a:effectLst/>
+                <a:uFillTx/>
+                <a:latin typeface="Calibri"/>
+              </a:rPr>
+              <a:t>}}</a:t>
+            </a:r>
           </a:p>
           <a:p>
             <a:pPr marL="343080" indent="-343080" algn="l" defTabSz="457200">
@@ -9952,24 +12023,82 @@
               </a:tabLst>
             </a:pPr>
             <a:r>
-              <a:rPr lang="en-US" sz="2600" b="0" u="none" strike="noStrike">
-                <a:solidFill>
-                  <a:schemeClr val="dk1"/>
-                </a:solidFill>
-                <a:effectLst/>
-                <a:uFillTx/>
-                <a:latin typeface="Calibri"/>
-              </a:rPr>
-              <a:t>Novas diretrizes criadas: {{metricas.diretrizes_novas}}</a:t>
-            </a:r>
-            <a:endParaRPr lang="en-US" sz="2600" b="0" u="none" strike="noStrike">
-              <a:solidFill>
-                <a:schemeClr val="dk1"/>
-              </a:solidFill>
-              <a:effectLst/>
-              <a:uFillTx/>
-              <a:latin typeface="Calibri"/>
-            </a:endParaRPr>
+              <a:rPr lang="en-US" sz="2400" b="0" u="none" strike="noStrike" dirty="0">
+                <a:solidFill>
+                  <a:schemeClr val="dk1"/>
+                </a:solidFill>
+                <a:effectLst/>
+                <a:uFillTx/>
+                <a:latin typeface="Calibri"/>
+              </a:rPr>
+              <a:t>Novas </a:t>
+            </a:r>
+            <a:r>
+              <a:rPr lang="en-US" sz="2400" b="0" u="none" strike="noStrike" dirty="0" err="1">
+                <a:solidFill>
+                  <a:schemeClr val="dk1"/>
+                </a:solidFill>
+                <a:effectLst/>
+                <a:uFillTx/>
+                <a:latin typeface="Calibri"/>
+              </a:rPr>
+              <a:t>diretrizes</a:t>
+            </a:r>
+            <a:r>
+              <a:rPr lang="en-US" sz="2400" b="0" u="none" strike="noStrike" dirty="0">
+                <a:solidFill>
+                  <a:schemeClr val="dk1"/>
+                </a:solidFill>
+                <a:effectLst/>
+                <a:uFillTx/>
+                <a:latin typeface="Calibri"/>
+              </a:rPr>
+              <a:t> </a:t>
+            </a:r>
+            <a:r>
+              <a:rPr lang="en-US" sz="2400" b="0" u="none" strike="noStrike" dirty="0" err="1">
+                <a:solidFill>
+                  <a:schemeClr val="dk1"/>
+                </a:solidFill>
+                <a:effectLst/>
+                <a:uFillTx/>
+                <a:latin typeface="Calibri"/>
+              </a:rPr>
+              <a:t>criadas</a:t>
+            </a:r>
+            <a:r>
+              <a:rPr lang="en-US" sz="2400" b="0" u="none" strike="noStrike" dirty="0">
+                <a:solidFill>
+                  <a:schemeClr val="dk1"/>
+                </a:solidFill>
+                <a:effectLst/>
+                <a:uFillTx/>
+                <a:latin typeface="Calibri"/>
+              </a:rPr>
+              <a:t>: {{</a:t>
+            </a:r>
+            <a:r>
+              <a:rPr lang="en-US" sz="2400" b="0" u="none" strike="noStrike" dirty="0" err="1">
+                <a:solidFill>
+                  <a:schemeClr val="dk1"/>
+                </a:solidFill>
+                <a:effectLst/>
+                <a:uFillTx/>
+                <a:latin typeface="Calibri"/>
+              </a:rPr>
+              <a:t>metricas.diretrizes_novas</a:t>
+            </a:r>
+            <a:r>
+              <a:rPr lang="en-US" sz="2400" b="0" u="none" strike="noStrike" dirty="0">
+                <a:solidFill>
+                  <a:schemeClr val="dk1"/>
+                </a:solidFill>
+                <a:effectLst/>
+                <a:uFillTx/>
+                <a:latin typeface="Calibri"/>
+              </a:rPr>
+              <a:t>}}</a:t>
+            </a:r>
           </a:p>
           <a:p>
             <a:pPr marL="343080" indent="-343080" algn="l" defTabSz="457200">
@@ -9989,24 +12118,60 @@
               </a:tabLst>
             </a:pPr>
             <a:r>
-              <a:rPr lang="en-US" sz="2600" b="0" u="none" strike="noStrike">
-                <a:solidFill>
-                  <a:schemeClr val="dk1"/>
-                </a:solidFill>
-                <a:effectLst/>
-                <a:uFillTx/>
-                <a:latin typeface="Calibri"/>
-              </a:rPr>
-              <a:t>Pares de Q&amp;A criados: {{metricas.passos_qa_pairs_concluidos}}</a:t>
-            </a:r>
-            <a:endParaRPr lang="en-US" sz="2600" b="0" u="none" strike="noStrike">
-              <a:solidFill>
-                <a:schemeClr val="dk1"/>
-              </a:solidFill>
-              <a:effectLst/>
-              <a:uFillTx/>
-              <a:latin typeface="Calibri"/>
-            </a:endParaRPr>
+              <a:rPr lang="en-US" sz="2400" b="0" u="none" strike="noStrike" dirty="0">
+                <a:solidFill>
+                  <a:schemeClr val="dk1"/>
+                </a:solidFill>
+                <a:effectLst/>
+                <a:uFillTx/>
+                <a:latin typeface="Calibri"/>
+              </a:rPr>
+              <a:t>Pares de Q&amp;A </a:t>
+            </a:r>
+            <a:r>
+              <a:rPr lang="en-US" sz="2400" b="0" u="none" strike="noStrike" dirty="0" err="1">
+                <a:solidFill>
+                  <a:schemeClr val="dk1"/>
+                </a:solidFill>
+                <a:effectLst/>
+                <a:uFillTx/>
+                <a:latin typeface="Calibri"/>
+              </a:rPr>
+              <a:t>criados</a:t>
+            </a:r>
+            <a:r>
+              <a:rPr lang="en-US" sz="2400" b="0" u="none" strike="noStrike" dirty="0">
+                <a:solidFill>
+                  <a:schemeClr val="dk1"/>
+                </a:solidFill>
+                <a:effectLst/>
+                <a:uFillTx/>
+                <a:latin typeface="Calibri"/>
+              </a:rPr>
+              <a:t>: {{</a:t>
+            </a:r>
+            <a:r>
+              <a:rPr lang="en-US" sz="2400" b="0" u="none" strike="noStrike" dirty="0" err="1">
+                <a:solidFill>
+                  <a:schemeClr val="dk1"/>
+                </a:solidFill>
+                <a:effectLst/>
+                <a:uFillTx/>
+                <a:latin typeface="Calibri"/>
+              </a:rPr>
+              <a:t>metricas.passos_qa_pairs_concluidos</a:t>
+            </a:r>
+            <a:r>
+              <a:rPr lang="en-US" sz="2400" b="0" u="none" strike="noStrike" dirty="0">
+                <a:solidFill>
+                  <a:schemeClr val="dk1"/>
+                </a:solidFill>
+                <a:effectLst/>
+                <a:uFillTx/>
+                <a:latin typeface="Calibri"/>
+              </a:rPr>
+              <a:t>}}</a:t>
+            </a:r>
           </a:p>
           <a:p>
             <a:pPr marL="343080" indent="-343080" algn="l" defTabSz="457200">
@@ -10026,35 +12191,82 @@
               </a:tabLst>
             </a:pPr>
             <a:r>
-              <a:rPr lang="en-US" sz="2600" b="0" u="none" strike="noStrike">
-                <a:solidFill>
-                  <a:schemeClr val="dk1"/>
-                </a:solidFill>
-                <a:effectLst/>
-                <a:uFillTx/>
-                <a:latin typeface="Calibri"/>
-              </a:rPr>
-              <a:t>Requisitos atendidos: {{metricas.cobertura_req_atendidos}}</a:t>
-            </a:r>
-            <a:endParaRPr lang="en-US" sz="2600" b="0" u="none" strike="noStrike">
-              <a:solidFill>
-                <a:schemeClr val="dk1"/>
-              </a:solidFill>
-              <a:effectLst/>
-              <a:uFillTx/>
-              <a:latin typeface="Calibri"/>
-            </a:endParaRPr>
+              <a:rPr lang="en-US" sz="2400" b="0" u="none" strike="noStrike" dirty="0" err="1">
+                <a:solidFill>
+                  <a:schemeClr val="dk1"/>
+                </a:solidFill>
+                <a:effectLst/>
+                <a:uFillTx/>
+                <a:latin typeface="Calibri"/>
+              </a:rPr>
+              <a:t>Requisitos</a:t>
+            </a:r>
+            <a:r>
+              <a:rPr lang="en-US" sz="2400" b="0" u="none" strike="noStrike" dirty="0">
+                <a:solidFill>
+                  <a:schemeClr val="dk1"/>
+                </a:solidFill>
+                <a:effectLst/>
+                <a:uFillTx/>
+                <a:latin typeface="Calibri"/>
+              </a:rPr>
+              <a:t> </a:t>
+            </a:r>
+            <a:r>
+              <a:rPr lang="en-US" sz="2400" b="0" u="none" strike="noStrike" dirty="0" err="1">
+                <a:solidFill>
+                  <a:schemeClr val="dk1"/>
+                </a:solidFill>
+                <a:effectLst/>
+                <a:uFillTx/>
+                <a:latin typeface="Calibri"/>
+              </a:rPr>
+              <a:t>atendidos</a:t>
+            </a:r>
+            <a:r>
+              <a:rPr lang="en-US" sz="2400" b="0" u="none" strike="noStrike" dirty="0">
+                <a:solidFill>
+                  <a:schemeClr val="dk1"/>
+                </a:solidFill>
+                <a:effectLst/>
+                <a:uFillTx/>
+                <a:latin typeface="Calibri"/>
+              </a:rPr>
+              <a:t>: {{</a:t>
+            </a:r>
+            <a:r>
+              <a:rPr lang="en-US" sz="2400" b="0" u="none" strike="noStrike" dirty="0" err="1">
+                <a:solidFill>
+                  <a:schemeClr val="dk1"/>
+                </a:solidFill>
+                <a:effectLst/>
+                <a:uFillTx/>
+                <a:latin typeface="Calibri"/>
+              </a:rPr>
+              <a:t>metricas.cobertura_req_atendidos</a:t>
+            </a:r>
+            <a:r>
+              <a:rPr lang="en-US" sz="2400" b="0" u="none" strike="noStrike" dirty="0">
+                <a:solidFill>
+                  <a:schemeClr val="dk1"/>
+                </a:solidFill>
+                <a:effectLst/>
+                <a:uFillTx/>
+                <a:latin typeface="Calibri"/>
+              </a:rPr>
+              <a:t>}}</a:t>
+            </a:r>
           </a:p>
         </p:txBody>
       </p:sp>
       <p:pic>
         <p:nvPicPr>
-          <p:cNvPr id="78" name=""/>
+          <p:cNvPr id="78" name="Imagem 77"/>
           <p:cNvPicPr/>
           <p:nvPr/>
         </p:nvPicPr>
         <p:blipFill>
-          <a:blip r:embed="rId1"/>
+          <a:blip r:embed="rId2"/>
           <a:stretch/>
         </p:blipFill>
         <p:spPr>
@@ -10091,15 +12303,22 @@
           </a:ln>
         </p:spPr>
         <p:style>
-          <a:lnRef idx="0"/>
-          <a:fillRef idx="0"/>
-          <a:effectRef idx="0"/>
+          <a:lnRef idx="0">
+            <a:scrgbClr r="0" g="0" b="0"/>
+          </a:lnRef>
+          <a:fillRef idx="0">
+            <a:scrgbClr r="0" g="0" b="0"/>
+          </a:fillRef>
+          <a:effectRef idx="0">
+            <a:scrgbClr r="0" g="0" b="0"/>
+          </a:effectRef>
           <a:fontRef idx="minor"/>
         </p:style>
         <p:txBody>
           <a:bodyPr lIns="90000" tIns="45000" rIns="90000" bIns="45000" anchor="ctr">
             <a:noAutofit/>
           </a:bodyPr>
+          <a:lstStyle/>
           <a:p>
             <a:pPr algn="ctr" defTabSz="457200">
               <a:lnSpc>
@@ -10130,19 +12349,14 @@
       </p:sp>
     </p:spTree>
   </p:cSld>
-  <mc:AlternateContent>
-    <mc:Choice Requires="p14">
-      <p:transition spd="slow" p14:dur="2000"/>
-    </mc:Choice>
-    <mc:Fallback>
-      <p:transition spd="slow"/>
-    </mc:Fallback>
-  </mc:AlternateContent>
+  <p:clrMapOvr>
+    <a:masterClrMapping/>
+  </p:clrMapOvr>
 </p:sld>
 </file>
 
-<file path=ppt/slides/slide6.xml><?xml version="1.0" encoding="utf-8"?>
-<p:sld xmlns:a="http://schemas.openxmlformats.org/drawingml/2006/main" xmlns:p="http://schemas.openxmlformats.org/presentationml/2006/main" xmlns:r="http://schemas.openxmlformats.org/officeDocument/2006/relationships" xmlns:p14="http://schemas.microsoft.com/office/powerpoint/2010/main" xmlns:p15="http://schemas.microsoft.com/office/powerpoint/2012/main" xmlns:mc="http://schemas.openxmlformats.org/markup-compatibility/2006">
+<file path=ppt/slides/slide8.xml><?xml version="1.0" encoding="utf-8"?>
+<p:sld xmlns:a="http://schemas.openxmlformats.org/drawingml/2006/main" xmlns:r="http://schemas.openxmlformats.org/officeDocument/2006/relationships" xmlns:p="http://schemas.openxmlformats.org/presentationml/2006/main">
   <p:cSld>
     <p:spTree>
       <p:nvGrpSpPr>
@@ -10170,8 +12384,8 @@
         </p:nvSpPr>
         <p:spPr>
           <a:xfrm>
-            <a:off x="415080" y="1080000"/>
-            <a:ext cx="8228160" cy="2898720"/>
+            <a:off x="457920" y="1321560"/>
+            <a:ext cx="8228160" cy="5356440"/>
           </a:xfrm>
           <a:prstGeom prst="rect">
             <a:avLst/>
@@ -10185,6 +12399,7 @@
           <a:bodyPr lIns="91440" tIns="45720" rIns="91440" bIns="45720" anchor="t">
             <a:noAutofit/>
           </a:bodyPr>
+          <a:lstStyle/>
           <a:p>
             <a:pPr indent="0" algn="l" defTabSz="457200">
               <a:lnSpc>
@@ -10198,7 +12413,7 @@
                 <a:tab pos="0" algn="l"/>
               </a:tabLst>
             </a:pPr>
-            <a:endParaRPr lang="en-US" sz="3200" b="0" u="none" strike="noStrike">
+            <a:endParaRPr lang="en-US" sz="3200" b="0" u="none" strike="noStrike" dirty="0">
               <a:solidFill>
                 <a:schemeClr val="dk1"/>
               </a:solidFill>
@@ -10228,35 +12443,27 @@
               </a:tabLst>
             </a:pPr>
             <a:r>
-              <a:rPr lang="en-US" sz="2200" b="0" u="none" strike="noStrike">
-                <a:solidFill>
-                  <a:schemeClr val="dk1"/>
-                </a:solidFill>
-                <a:effectLst/>
-                <a:uFillTx/>
-                <a:latin typeface="Calibri"/>
-              </a:rPr>
-              <a:t>{{insights}}</a:t>
-            </a:r>
-            <a:endParaRPr lang="en-US" sz="2200" b="0" u="none" strike="noStrike">
-              <a:solidFill>
-                <a:schemeClr val="dk1"/>
-              </a:solidFill>
-              <a:effectLst/>
-              <a:uFillTx/>
-              <a:latin typeface="Calibri"/>
-            </a:endParaRPr>
+              <a:rPr lang="en-US" sz="2000" b="0" u="none" strike="noStrike" dirty="0">
+                <a:solidFill>
+                  <a:schemeClr val="dk1"/>
+                </a:solidFill>
+                <a:effectLst/>
+                <a:uFillTx/>
+                <a:latin typeface="Calibri"/>
+              </a:rPr>
+              <a:t>{{insights:3}}</a:t>
+            </a:r>
           </a:p>
         </p:txBody>
       </p:sp>
       <p:pic>
         <p:nvPicPr>
-          <p:cNvPr id="81" name=""/>
+          <p:cNvPr id="81" name="Imagem 80"/>
           <p:cNvPicPr/>
           <p:nvPr/>
         </p:nvPicPr>
         <p:blipFill>
-          <a:blip r:embed="rId1"/>
+          <a:blip r:embed="rId2"/>
           <a:stretch/>
         </p:blipFill>
         <p:spPr>
@@ -10293,15 +12500,22 @@
           </a:ln>
         </p:spPr>
         <p:style>
-          <a:lnRef idx="0"/>
-          <a:fillRef idx="0"/>
-          <a:effectRef idx="0"/>
+          <a:lnRef idx="0">
+            <a:scrgbClr r="0" g="0" b="0"/>
+          </a:lnRef>
+          <a:fillRef idx="0">
+            <a:scrgbClr r="0" g="0" b="0"/>
+          </a:fillRef>
+          <a:effectRef idx="0">
+            <a:scrgbClr r="0" g="0" b="0"/>
+          </a:effectRef>
           <a:fontRef idx="minor"/>
         </p:style>
         <p:txBody>
           <a:bodyPr lIns="90000" tIns="45000" rIns="90000" bIns="45000" anchor="ctr">
             <a:noAutofit/>
           </a:bodyPr>
+          <a:lstStyle/>
           <a:p>
             <a:pPr algn="ctr" defTabSz="457200">
               <a:lnSpc>
@@ -10309,7 +12523,7 @@
               </a:lnSpc>
             </a:pPr>
             <a:r>
-              <a:rPr lang="en-US" sz="4400" b="0" u="none" strike="noStrike">
+              <a:rPr lang="en-US" sz="4400" b="0" u="none" strike="noStrike" dirty="0" err="1">
                 <a:solidFill>
                   <a:srgbClr val="EA7500"/>
                 </a:solidFill>
@@ -10317,9 +12531,31 @@
                 <a:uFillTx/>
                 <a:latin typeface="Calibri"/>
               </a:rPr>
-              <a:t>Insights</a:t>
-            </a:r>
-            <a:endParaRPr lang="pt-BR" sz="4400" b="0" u="none" strike="noStrike">
+              <a:t>Informações</a:t>
+            </a:r>
+            <a:r>
+              <a:rPr lang="en-US" sz="4400" b="0" u="none" strike="noStrike" dirty="0">
+                <a:solidFill>
+                  <a:srgbClr val="EA7500"/>
+                </a:solidFill>
+                <a:effectLst/>
+                <a:uFillTx/>
+                <a:latin typeface="Calibri"/>
+              </a:rPr>
+              <a:t> </a:t>
+            </a:r>
+            <a:r>
+              <a:rPr lang="en-US" sz="4400" b="0" u="none" strike="noStrike" dirty="0" err="1">
+                <a:solidFill>
+                  <a:srgbClr val="EA7500"/>
+                </a:solidFill>
+                <a:effectLst/>
+                <a:uFillTx/>
+                <a:latin typeface="Calibri"/>
+              </a:rPr>
+              <a:t>adicionais</a:t>
+            </a:r>
+            <a:endParaRPr lang="pt-BR" sz="4400" b="0" u="none" strike="noStrike" dirty="0">
               <a:solidFill>
                 <a:srgbClr val="000000"/>
               </a:solidFill>
@@ -10332,19 +12568,14 @@
       </p:sp>
     </p:spTree>
   </p:cSld>
-  <mc:AlternateContent>
-    <mc:Choice Requires="p14">
-      <p:transition spd="slow" p14:dur="2000"/>
-    </mc:Choice>
-    <mc:Fallback>
-      <p:transition spd="slow"/>
-    </mc:Fallback>
-  </mc:AlternateContent>
+  <p:clrMapOvr>
+    <a:masterClrMapping/>
+  </p:clrMapOvr>
 </p:sld>
 </file>
 
-<file path=ppt/slides/slide7.xml><?xml version="1.0" encoding="utf-8"?>
-<p:sld xmlns:a="http://schemas.openxmlformats.org/drawingml/2006/main" xmlns:p="http://schemas.openxmlformats.org/presentationml/2006/main" xmlns:r="http://schemas.openxmlformats.org/officeDocument/2006/relationships" xmlns:p14="http://schemas.microsoft.com/office/powerpoint/2010/main" xmlns:p15="http://schemas.microsoft.com/office/powerpoint/2012/main" xmlns:mc="http://schemas.openxmlformats.org/markup-compatibility/2006">
+<file path=ppt/slides/slide9.xml><?xml version="1.0" encoding="utf-8"?>
+<p:sld xmlns:a="http://schemas.openxmlformats.org/drawingml/2006/main" xmlns:r="http://schemas.openxmlformats.org/officeDocument/2006/relationships" xmlns:p="http://schemas.openxmlformats.org/presentationml/2006/main">
   <p:cSld>
     <p:spTree>
       <p:nvGrpSpPr>
@@ -10372,7 +12603,7 @@
         </p:nvSpPr>
         <p:spPr>
           <a:xfrm>
-            <a:off x="685800" y="2130480"/>
+            <a:off x="685800" y="1618920"/>
             <a:ext cx="7770960" cy="1468440"/>
           </a:xfrm>
           <a:prstGeom prst="rect">
@@ -10387,6 +12618,7 @@
           <a:bodyPr lIns="91440" tIns="45720" rIns="91440" bIns="45720" anchor="ctr">
             <a:noAutofit/>
           </a:bodyPr>
+          <a:lstStyle/>
           <a:p>
             <a:pPr indent="0" algn="ctr" defTabSz="457200">
               <a:lnSpc>
@@ -10398,24 +12630,27 @@
               </a:tabLst>
             </a:pPr>
             <a:r>
-              <a:rPr lang="en-US" sz="4400" b="0" u="none" strike="noStrike">
-                <a:solidFill>
-                  <a:schemeClr val="dk1"/>
-                </a:solidFill>
-                <a:effectLst/>
-                <a:uFillTx/>
-                <a:latin typeface="Calibri"/>
-              </a:rPr>
-              <a:t>Próximo Sprint</a:t>
-            </a:r>
-            <a:endParaRPr lang="en-US" sz="4400" b="0" u="none" strike="noStrike">
-              <a:solidFill>
-                <a:schemeClr val="dk1"/>
-              </a:solidFill>
-              <a:effectLst/>
-              <a:uFillTx/>
-              <a:latin typeface="Calibri"/>
-            </a:endParaRPr>
+              <a:rPr lang="en-US" sz="4000" b="1" u="none" strike="noStrike" dirty="0" err="1">
+                <a:solidFill>
+                  <a:schemeClr val="tx2"/>
+                </a:solidFill>
+                <a:effectLst/>
+                <a:uFillTx/>
+                <a:latin typeface="Calibri"/>
+              </a:rPr>
+              <a:t>Próximo</a:t>
+            </a:r>
+            <a:r>
+              <a:rPr lang="en-US" sz="4000" b="1" u="none" strike="noStrike" dirty="0">
+                <a:solidFill>
+                  <a:schemeClr val="tx2"/>
+                </a:solidFill>
+                <a:effectLst/>
+                <a:uFillTx/>
+                <a:latin typeface="Calibri"/>
+              </a:rPr>
+              <a:t> Sprint</a:t>
+            </a:r>
           </a:p>
         </p:txBody>
       </p:sp>
@@ -10431,8 +12666,8 @@
         </p:nvSpPr>
         <p:spPr>
           <a:xfrm>
-            <a:off x="1371600" y="3420000"/>
-            <a:ext cx="6399360" cy="2773080"/>
+            <a:off x="700790" y="3266640"/>
+            <a:ext cx="7085160" cy="2773080"/>
           </a:xfrm>
           <a:prstGeom prst="rect">
             <a:avLst/>
@@ -10446,13 +12681,11 @@
           <a:bodyPr lIns="91440" tIns="45720" rIns="91440" bIns="45720" anchor="t">
             <a:noAutofit/>
           </a:bodyPr>
-          <a:p>
-            <a:pPr marL="216000" indent="-216000" algn="l" defTabSz="457200">
-              <a:lnSpc>
-                <a:spcPct val="100000"/>
-              </a:lnSpc>
-              <a:spcBef>
-                <a:spcPts val="1191"/>
+          <a:lstStyle/>
+          <a:p>
+            <a:pPr marL="343080" indent="-343080" algn="l">
+              <a:spcBef>
+                <a:spcPts val="641"/>
               </a:spcBef>
               <a:spcAft>
                 <a:spcPts val="992"/>
@@ -10461,41 +12694,26 @@
                 <a:srgbClr val="000000"/>
               </a:buClr>
               <a:buSzPct val="45000"/>
-              <a:buFont typeface="Wingdings" charset="2"/>
-              <a:buChar char=""/>
-              <a:tabLst>
-                <a:tab pos="0" algn="l"/>
-              </a:tabLst>
-            </a:pPr>
-            <a:r>
-              <a:rPr lang="pt-BR" sz="3200" b="0" u="none" strike="noStrike">
-                <a:solidFill>
-                  <a:schemeClr val="dk1">
-                    <a:tint val="75000"/>
-                  </a:schemeClr>
-                </a:solidFill>
-                <a:effectLst/>
-                <a:uFillTx/>
-                <a:latin typeface="Calibri"/>
-              </a:rPr>
-              <a:t>Sprint {{proximo_sprint_numero}} </a:t>
-            </a:r>
-            <a:endParaRPr lang="pt-BR" sz="3200" b="0" u="none" strike="noStrike">
-              <a:solidFill>
-                <a:srgbClr val="000000"/>
-              </a:solidFill>
-              <a:effectLst/>
-              <a:uFillTx/>
-              <a:latin typeface="Arial"/>
-            </a:endParaRPr>
-          </a:p>
-          <a:p>
-            <a:pPr marL="216000" indent="-216000" algn="l" defTabSz="457200">
-              <a:lnSpc>
-                <a:spcPct val="100000"/>
-              </a:lnSpc>
-              <a:spcBef>
-                <a:spcPts val="1191"/>
+              <a:buFont typeface="Arial"/>
+              <a:buChar char="•"/>
+            </a:pPr>
+            <a:r>
+              <a:rPr lang="pt-BR" sz="2600" dirty="0"/>
+              <a:t>Sprint {{</a:t>
+            </a:r>
+            <a:r>
+              <a:rPr lang="pt-BR" sz="2600" dirty="0" err="1"/>
+              <a:t>proximo_sprint_numero</a:t>
+            </a:r>
+            <a:r>
+              <a:rPr lang="pt-BR" sz="2600" dirty="0"/>
+              <a:t>}} </a:t>
+            </a:r>
+          </a:p>
+          <a:p>
+            <a:pPr marL="343080" indent="-343080" algn="l">
+              <a:spcBef>
+                <a:spcPts val="641"/>
               </a:spcBef>
               <a:spcAft>
                 <a:spcPts val="992"/>
@@ -10504,41 +12722,34 @@
                 <a:srgbClr val="000000"/>
               </a:buClr>
               <a:buSzPct val="45000"/>
-              <a:buFont typeface="Wingdings" charset="2"/>
-              <a:buChar char=""/>
-              <a:tabLst>
-                <a:tab pos="0" algn="l"/>
-              </a:tabLst>
-            </a:pPr>
-            <a:r>
-              <a:rPr lang="pt-BR" sz="3200" b="0" u="none" strike="noStrike">
-                <a:solidFill>
-                  <a:schemeClr val="dk1">
-                    <a:tint val="75000"/>
-                  </a:schemeClr>
-                </a:solidFill>
-                <a:effectLst/>
-                <a:uFillTx/>
-                <a:latin typeface="Calibri"/>
-              </a:rPr>
-              <a:t>{{proximo_data_inicio}} - {{proximo_data_fim}} </a:t>
-            </a:r>
-            <a:endParaRPr lang="pt-BR" sz="3200" b="0" u="none" strike="noStrike">
-              <a:solidFill>
-                <a:srgbClr val="000000"/>
-              </a:solidFill>
-              <a:effectLst/>
-              <a:uFillTx/>
-              <a:latin typeface="Arial"/>
-            </a:endParaRPr>
-          </a:p>
-          <a:p>
-            <a:pPr marL="216000" indent="-216000" algn="l" defTabSz="457200">
-              <a:lnSpc>
-                <a:spcPct val="100000"/>
-              </a:lnSpc>
-              <a:spcBef>
-                <a:spcPts val="1191"/>
+              <a:buFont typeface="Arial"/>
+              <a:buChar char="•"/>
+            </a:pPr>
+            <a:r>
+              <a:rPr lang="pt-BR" sz="2600" dirty="0"/>
+              <a:t>{{</a:t>
+            </a:r>
+            <a:r>
+              <a:rPr lang="pt-BR" sz="2600" dirty="0" err="1"/>
+              <a:t>proximo_data_inicio</a:t>
+            </a:r>
+            <a:r>
+              <a:rPr lang="pt-BR" sz="2600" dirty="0"/>
+              <a:t>}} - {{</a:t>
+            </a:r>
+            <a:r>
+              <a:rPr lang="pt-BR" sz="2600" dirty="0" err="1"/>
+              <a:t>proximo_data_fim</a:t>
+            </a:r>
+            <a:r>
+              <a:rPr lang="pt-BR" sz="2600" dirty="0"/>
+              <a:t>}} </a:t>
+            </a:r>
+          </a:p>
+          <a:p>
+            <a:pPr marL="343080" indent="-343080" algn="l">
+              <a:spcBef>
+                <a:spcPts val="641"/>
               </a:spcBef>
               <a:spcAft>
                 <a:spcPts val="992"/>
@@ -10547,44 +12758,32 @@
                 <a:srgbClr val="000000"/>
               </a:buClr>
               <a:buSzPct val="45000"/>
-              <a:buFont typeface="Wingdings" charset="2"/>
-              <a:buChar char=""/>
-              <a:tabLst>
-                <a:tab pos="0" algn="l"/>
-              </a:tabLst>
-            </a:pPr>
-            <a:r>
-              <a:rPr lang="pt-BR" sz="3200" b="0" u="none" strike="noStrike">
-                <a:solidFill>
-                  <a:schemeClr val="dk1">
-                    <a:tint val="75000"/>
-                  </a:schemeClr>
-                </a:solidFill>
-                <a:effectLst/>
-                <a:uFillTx/>
-                <a:latin typeface="Calibri"/>
-              </a:rPr>
-              <a:t>{{proximo_duracao_dias}} dias</a:t>
-            </a:r>
-            <a:endParaRPr lang="pt-BR" sz="3200" b="0" u="none" strike="noStrike">
-              <a:solidFill>
-                <a:srgbClr val="000000"/>
-              </a:solidFill>
-              <a:effectLst/>
-              <a:uFillTx/>
-              <a:latin typeface="Arial"/>
-            </a:endParaRPr>
+              <a:buFont typeface="Arial"/>
+              <a:buChar char="•"/>
+            </a:pPr>
+            <a:r>
+              <a:rPr lang="pt-BR" sz="2600" dirty="0"/>
+              <a:t>{{</a:t>
+            </a:r>
+            <a:r>
+              <a:rPr lang="pt-BR" sz="2600" dirty="0" err="1"/>
+              <a:t>proximo_duracao_dias</a:t>
+            </a:r>
+            <a:r>
+              <a:rPr lang="pt-BR" sz="2600" dirty="0"/>
+              <a:t>}} dias</a:t>
+            </a:r>
           </a:p>
         </p:txBody>
       </p:sp>
       <p:pic>
         <p:nvPicPr>
-          <p:cNvPr id="85" name=""/>
+          <p:cNvPr id="85" name="Imagem 84"/>
           <p:cNvPicPr/>
           <p:nvPr/>
         </p:nvPicPr>
         <p:blipFill>
-          <a:blip r:embed="rId1"/>
+          <a:blip r:embed="rId2"/>
           <a:stretch/>
         </p:blipFill>
         <p:spPr>
@@ -10621,15 +12820,22 @@
           </a:ln>
         </p:spPr>
         <p:style>
-          <a:lnRef idx="0"/>
-          <a:fillRef idx="0"/>
-          <a:effectRef idx="0"/>
+          <a:lnRef idx="0">
+            <a:scrgbClr r="0" g="0" b="0"/>
+          </a:lnRef>
+          <a:fillRef idx="0">
+            <a:scrgbClr r="0" g="0" b="0"/>
+          </a:fillRef>
+          <a:effectRef idx="0">
+            <a:scrgbClr r="0" g="0" b="0"/>
+          </a:effectRef>
           <a:fontRef idx="minor"/>
         </p:style>
         <p:txBody>
           <a:bodyPr lIns="90000" tIns="45000" rIns="90000" bIns="45000" anchor="ctr">
             <a:noAutofit/>
           </a:bodyPr>
+          <a:lstStyle/>
           <a:p>
             <a:pPr algn="ctr" defTabSz="457200">
               <a:lnSpc>
@@ -10674,417 +12880,14 @@
       </p:sp>
     </p:spTree>
   </p:cSld>
-  <mc:AlternateContent>
-    <mc:Choice Requires="p14">
-      <p:transition spd="slow" p14:dur="2000"/>
-    </mc:Choice>
-    <mc:Fallback>
-      <p:transition spd="slow"/>
-    </mc:Fallback>
-  </mc:AlternateContent>
-</p:sld>
-</file>
-
-<file path=ppt/slides/slide8.xml><?xml version="1.0" encoding="utf-8"?>
-<p:sld xmlns:a="http://schemas.openxmlformats.org/drawingml/2006/main" xmlns:p="http://schemas.openxmlformats.org/presentationml/2006/main" xmlns:r="http://schemas.openxmlformats.org/officeDocument/2006/relationships" xmlns:p14="http://schemas.microsoft.com/office/powerpoint/2010/main" xmlns:p15="http://schemas.microsoft.com/office/powerpoint/2012/main" xmlns:mc="http://schemas.openxmlformats.org/markup-compatibility/2006">
-  <p:cSld>
-    <p:spTree>
-      <p:nvGrpSpPr>
-        <p:cNvPr id="1" name=""/>
-        <p:cNvGrpSpPr/>
-        <p:nvPr/>
-      </p:nvGrpSpPr>
-      <p:grpSpPr>
-        <a:xfrm>
-          <a:off x="0" y="0"/>
-          <a:ext cx="0" cy="0"/>
-          <a:chOff x="0" y="0"/>
-          <a:chExt cx="0" cy="0"/>
-        </a:xfrm>
-      </p:grpSpPr>
-      <p:sp>
-        <p:nvSpPr>
-          <p:cNvPr id="87" name="PlaceHolder 1"/>
-          <p:cNvSpPr>
-            <a:spLocks noGrp="1"/>
-          </p:cNvSpPr>
-          <p:nvPr>
-            <p:ph type="subTitle"/>
-          </p:nvPr>
-        </p:nvSpPr>
-        <p:spPr>
-          <a:xfrm>
-            <a:off x="799920" y="1980000"/>
-            <a:ext cx="6399360" cy="2773080"/>
-          </a:xfrm>
-          <a:prstGeom prst="rect">
-            <a:avLst/>
-          </a:prstGeom>
-          <a:noFill/>
-          <a:ln w="0">
-            <a:noFill/>
-          </a:ln>
-        </p:spPr>
-        <p:txBody>
-          <a:bodyPr lIns="91440" tIns="45720" rIns="91440" bIns="45720" anchor="t">
-            <a:noAutofit/>
-          </a:bodyPr>
-          <a:p>
-            <a:pPr marL="216000" indent="-216000" algn="l" defTabSz="457200">
-              <a:lnSpc>
-                <a:spcPct val="100000"/>
-              </a:lnSpc>
-              <a:spcBef>
-                <a:spcPts val="1191"/>
-              </a:spcBef>
-              <a:spcAft>
-                <a:spcPts val="992"/>
-              </a:spcAft>
-              <a:buClr>
-                <a:srgbClr val="000000"/>
-              </a:buClr>
-              <a:buSzPct val="45000"/>
-              <a:buFont typeface="Wingdings" charset="2"/>
-              <a:buChar char=""/>
-              <a:tabLst>
-                <a:tab pos="0" algn="l"/>
-              </a:tabLst>
-            </a:pPr>
-            <a:r>
-              <a:rPr lang="pt-BR" sz="3200" b="0" u="none" strike="noStrike">
-                <a:solidFill>
-                  <a:schemeClr val="dk1">
-                    <a:tint val="75000"/>
-                  </a:schemeClr>
-                </a:solidFill>
-                <a:effectLst/>
-                <a:uFillTx/>
-                <a:latin typeface="Calibri"/>
-                <a:ea typeface="Microsoft YaHei"/>
-              </a:rPr>
-              <a:t>{{proximasprint}}</a:t>
-            </a:r>
-            <a:endParaRPr lang="pt-BR" sz="3200" b="0" u="none" strike="noStrike">
-              <a:solidFill>
-                <a:srgbClr val="000000"/>
-              </a:solidFill>
-              <a:effectLst/>
-              <a:uFillTx/>
-              <a:latin typeface="Arial"/>
-            </a:endParaRPr>
-          </a:p>
-        </p:txBody>
-      </p:sp>
-      <p:pic>
-        <p:nvPicPr>
-          <p:cNvPr id="88" name=""/>
-          <p:cNvPicPr/>
-          <p:nvPr/>
-        </p:nvPicPr>
-        <p:blipFill>
-          <a:blip r:embed="rId1"/>
-          <a:stretch/>
-        </p:blipFill>
-        <p:spPr>
-          <a:xfrm>
-            <a:off x="0" y="-28800"/>
-            <a:ext cx="9142560" cy="1647720"/>
-          </a:xfrm>
-          <a:prstGeom prst="rect">
-            <a:avLst/>
-          </a:prstGeom>
-          <a:noFill/>
-          <a:ln w="0">
-            <a:noFill/>
-          </a:ln>
-        </p:spPr>
-      </p:pic>
-      <p:sp>
-        <p:nvSpPr>
-          <p:cNvPr id="89" name="Title 12"/>
-          <p:cNvSpPr/>
-          <p:nvPr/>
-        </p:nvSpPr>
-        <p:spPr>
-          <a:xfrm>
-            <a:off x="915120" y="180360"/>
-            <a:ext cx="8228160" cy="1141560"/>
-          </a:xfrm>
-          <a:prstGeom prst="rect">
-            <a:avLst/>
-          </a:prstGeom>
-          <a:noFill/>
-          <a:ln w="0">
-            <a:noFill/>
-          </a:ln>
-        </p:spPr>
-        <p:style>
-          <a:lnRef idx="0"/>
-          <a:fillRef idx="0"/>
-          <a:effectRef idx="0"/>
-          <a:fontRef idx="minor"/>
-        </p:style>
-        <p:txBody>
-          <a:bodyPr lIns="90000" tIns="45000" rIns="90000" bIns="45000" anchor="ctr">
-            <a:noAutofit/>
-          </a:bodyPr>
-          <a:p>
-            <a:pPr algn="ctr" defTabSz="457200">
-              <a:lnSpc>
-                <a:spcPct val="100000"/>
-              </a:lnSpc>
-            </a:pPr>
-            <a:r>
-              <a:rPr lang="en-US" sz="4400" b="0" u="none" strike="noStrike">
-                <a:solidFill>
-                  <a:srgbClr val="EA7500"/>
-                </a:solidFill>
-                <a:effectLst/>
-                <a:uFillTx/>
-                <a:latin typeface="Calibri"/>
-              </a:rPr>
-              <a:t>Planejamento da </a:t>
-            </a:r>
-            <a:br>
-              <a:rPr sz="4400"/>
-            </a:br>
-            <a:r>
-              <a:rPr lang="en-US" sz="4400" b="0" u="none" strike="noStrike">
-                <a:solidFill>
-                  <a:srgbClr val="EA7500"/>
-                </a:solidFill>
-                <a:effectLst/>
-                <a:uFillTx/>
-                <a:latin typeface="Calibri"/>
-              </a:rPr>
-              <a:t>próxima Sprint</a:t>
-            </a:r>
-            <a:endParaRPr lang="pt-BR" sz="4400" b="0" u="none" strike="noStrike">
-              <a:solidFill>
-                <a:srgbClr val="000000"/>
-              </a:solidFill>
-              <a:effectLst/>
-              <a:uFillTx/>
-              <a:latin typeface="Arial"/>
-            </a:endParaRPr>
-          </a:p>
-        </p:txBody>
-      </p:sp>
-    </p:spTree>
-  </p:cSld>
-  <mc:AlternateContent>
-    <mc:Choice Requires="p14">
-      <p:transition spd="slow" p14:dur="2000"/>
-    </mc:Choice>
-    <mc:Fallback>
-      <p:transition spd="slow"/>
-    </mc:Fallback>
-  </mc:AlternateContent>
-</p:sld>
-</file>
-
-<file path=ppt/slides/slide9.xml><?xml version="1.0" encoding="utf-8"?>
-<p:sld xmlns:a="http://schemas.openxmlformats.org/drawingml/2006/main" xmlns:p="http://schemas.openxmlformats.org/presentationml/2006/main" xmlns:r="http://schemas.openxmlformats.org/officeDocument/2006/relationships" xmlns:p14="http://schemas.microsoft.com/office/powerpoint/2010/main" xmlns:p15="http://schemas.microsoft.com/office/powerpoint/2012/main" xmlns:mc="http://schemas.openxmlformats.org/markup-compatibility/2006">
-  <p:cSld>
-    <p:spTree>
-      <p:nvGrpSpPr>
-        <p:cNvPr id="1" name=""/>
-        <p:cNvGrpSpPr/>
-        <p:nvPr/>
-      </p:nvGrpSpPr>
-      <p:grpSpPr>
-        <a:xfrm>
-          <a:off x="0" y="0"/>
-          <a:ext cx="0" cy="0"/>
-          <a:chOff x="0" y="0"/>
-          <a:chExt cx="0" cy="0"/>
-        </a:xfrm>
-      </p:grpSpPr>
-      <p:sp>
-        <p:nvSpPr>
-          <p:cNvPr id="90" name="PlaceHolder 1"/>
-          <p:cNvSpPr>
-            <a:spLocks noGrp="1"/>
-          </p:cNvSpPr>
-          <p:nvPr>
-            <p:ph/>
-          </p:nvPr>
-        </p:nvSpPr>
-        <p:spPr>
-          <a:xfrm>
-            <a:off x="457200" y="1558440"/>
-            <a:ext cx="8228160" cy="4524480"/>
-          </a:xfrm>
-          <a:prstGeom prst="rect">
-            <a:avLst/>
-          </a:prstGeom>
-          <a:noFill/>
-          <a:ln w="0">
-            <a:noFill/>
-          </a:ln>
-        </p:spPr>
-        <p:txBody>
-          <a:bodyPr lIns="91440" tIns="45720" rIns="91440" bIns="45720" anchor="t">
-            <a:noAutofit/>
-          </a:bodyPr>
-          <a:p>
-            <a:pPr indent="0" algn="l" defTabSz="457200">
-              <a:lnSpc>
-                <a:spcPct val="100000"/>
-              </a:lnSpc>
-              <a:spcBef>
-                <a:spcPts val="641"/>
-              </a:spcBef>
-              <a:buNone/>
-              <a:tabLst>
-                <a:tab pos="0" algn="l"/>
-              </a:tabLst>
-            </a:pPr>
-            <a:endParaRPr lang="en-US" sz="3200" b="0" u="none" strike="noStrike">
-              <a:solidFill>
-                <a:schemeClr val="dk1"/>
-              </a:solidFill>
-              <a:effectLst/>
-              <a:uFillTx/>
-              <a:latin typeface="Calibri"/>
-            </a:endParaRPr>
-          </a:p>
-          <a:p>
-            <a:pPr marL="343080" indent="-343080" algn="l" defTabSz="457200">
-              <a:lnSpc>
-                <a:spcPct val="100000"/>
-              </a:lnSpc>
-              <a:spcBef>
-                <a:spcPts val="641"/>
-              </a:spcBef>
-              <a:buClr>
-                <a:srgbClr val="000000"/>
-              </a:buClr>
-              <a:buFont typeface="Arial"/>
-              <a:buChar char="•"/>
-              <a:tabLst>
-                <a:tab pos="0" algn="l"/>
-              </a:tabLst>
-            </a:pPr>
-            <a:r>
-              <a:rPr lang="en-US" sz="2800" b="0" u="none" strike="noStrike">
-                <a:solidFill>
-                  <a:schemeClr val="dk1"/>
-                </a:solidFill>
-                <a:effectLst/>
-                <a:uFillTx/>
-                <a:latin typeface="Calibri"/>
-                <a:ea typeface="Microsoft YaHei"/>
-              </a:rPr>
-              <a:t>{{proximo_objetivos}} </a:t>
-            </a:r>
-            <a:endParaRPr lang="en-US" sz="2800" b="0" u="none" strike="noStrike">
-              <a:solidFill>
-                <a:schemeClr val="dk1"/>
-              </a:solidFill>
-              <a:effectLst/>
-              <a:uFillTx/>
-              <a:latin typeface="Calibri"/>
-            </a:endParaRPr>
-          </a:p>
-        </p:txBody>
-      </p:sp>
-      <p:pic>
-        <p:nvPicPr>
-          <p:cNvPr id="91" name=""/>
-          <p:cNvPicPr/>
-          <p:nvPr/>
-        </p:nvPicPr>
-        <p:blipFill>
-          <a:blip r:embed="rId1"/>
-          <a:stretch/>
-        </p:blipFill>
-        <p:spPr>
-          <a:xfrm>
-            <a:off x="360" y="-28800"/>
-            <a:ext cx="9142560" cy="1647720"/>
-          </a:xfrm>
-          <a:prstGeom prst="rect">
-            <a:avLst/>
-          </a:prstGeom>
-          <a:noFill/>
-          <a:ln w="0">
-            <a:noFill/>
-          </a:ln>
-        </p:spPr>
-      </p:pic>
-      <p:sp>
-        <p:nvSpPr>
-          <p:cNvPr id="92" name="Title 10"/>
-          <p:cNvSpPr/>
-          <p:nvPr/>
-        </p:nvSpPr>
-        <p:spPr>
-          <a:xfrm>
-            <a:off x="915120" y="180000"/>
-            <a:ext cx="8228160" cy="1141560"/>
-          </a:xfrm>
-          <a:prstGeom prst="rect">
-            <a:avLst/>
-          </a:prstGeom>
-          <a:noFill/>
-          <a:ln w="0">
-            <a:noFill/>
-          </a:ln>
-        </p:spPr>
-        <p:style>
-          <a:lnRef idx="0"/>
-          <a:fillRef idx="0"/>
-          <a:effectRef idx="0"/>
-          <a:fontRef idx="minor"/>
-        </p:style>
-        <p:txBody>
-          <a:bodyPr lIns="90000" tIns="45000" rIns="90000" bIns="45000" anchor="ctr">
-            <a:noAutofit/>
-          </a:bodyPr>
-          <a:p>
-            <a:pPr algn="ctr" defTabSz="457200">
-              <a:lnSpc>
-                <a:spcPct val="100000"/>
-              </a:lnSpc>
-            </a:pPr>
-            <a:r>
-              <a:rPr lang="en-US" sz="4400" b="0" u="none" strike="noStrike">
-                <a:solidFill>
-                  <a:srgbClr val="EA7500"/>
-                </a:solidFill>
-                <a:effectLst/>
-                <a:uFillTx/>
-                <a:latin typeface="Calibri"/>
-              </a:rPr>
-              <a:t>Objetivo da Próxima Sprint</a:t>
-            </a:r>
-            <a:endParaRPr lang="pt-BR" sz="4400" b="0" u="none" strike="noStrike">
-              <a:solidFill>
-                <a:srgbClr val="000000"/>
-              </a:solidFill>
-              <a:effectLst/>
-              <a:uFillTx/>
-              <a:latin typeface="Arial"/>
-            </a:endParaRPr>
-          </a:p>
-        </p:txBody>
-      </p:sp>
-    </p:spTree>
-  </p:cSld>
-  <mc:AlternateContent>
-    <mc:Choice Requires="p14">
-      <p:transition spd="slow" p14:dur="2000"/>
-    </mc:Choice>
-    <mc:Fallback>
-      <p:transition spd="slow"/>
-    </mc:Fallback>
-  </mc:AlternateContent>
+  <p:clrMapOvr>
+    <a:masterClrMapping/>
+  </p:clrMapOvr>
 </p:sld>
 </file>
 
 <file path=ppt/theme/theme1.xml><?xml version="1.0" encoding="utf-8"?>
-<a:theme xmlns:a="http://schemas.openxmlformats.org/drawingml/2006/main" xmlns:r="http://schemas.openxmlformats.org/officeDocument/2006/relationships" name="Office Theme">
+<a:theme xmlns:a="http://schemas.openxmlformats.org/drawingml/2006/main" name="Office Theme">
   <a:themeElements>
     <a:clrScheme name="Office">
       <a:dk1>
@@ -11126,12 +12929,12 @@
     </a:clrScheme>
     <a:fontScheme name="Office">
       <a:majorFont>
-        <a:latin typeface="Calibri" pitchFamily="0" charset="1"/>
+        <a:latin typeface="Calibri"/>
         <a:ea typeface=""/>
         <a:cs typeface=""/>
       </a:majorFont>
       <a:minorFont>
-        <a:latin typeface="Calibri" pitchFamily="0" charset="1"/>
+        <a:latin typeface="Calibri"/>
         <a:ea typeface=""/>
         <a:cs typeface=""/>
       </a:minorFont>
@@ -11160,7 +12963,7 @@
             </a:gs>
           </a:gsLst>
           <a:lin ang="16200000" scaled="1"/>
-          <a:tileRect l="0" t="0" r="0" b="0"/>
+          <a:tileRect/>
         </a:gradFill>
         <a:gradFill>
           <a:gsLst>
@@ -11178,7 +12981,7 @@
             </a:gs>
           </a:gsLst>
           <a:lin ang="16200000" scaled="0"/>
-          <a:tileRect l="0" t="0" r="0" b="0"/>
+          <a:tileRect/>
         </a:gradFill>
       </a:fillStyleLst>
       <a:lnStyleLst>
@@ -11229,7 +13032,7 @@
           <a:path path="circle">
             <a:fillToRect l="50000" t="-80000" r="50000" b="180000"/>
           </a:path>
-          <a:tileRect l="0" t="0" r="0" b="0"/>
+          <a:tileRect/>
         </a:gradFill>
         <a:gradFill>
           <a:gsLst>
@@ -11247,10 +13050,12 @@
           <a:path path="circle">
             <a:fillToRect l="50000" t="50000" r="50000" b="50000"/>
           </a:path>
-          <a:tileRect l="0" t="0" r="0" b="0"/>
+          <a:tileRect/>
         </a:gradFill>
       </a:bgFillStyleLst>
     </a:fmtScheme>
   </a:themeElements>
+  <a:objectDefaults/>
+  <a:extraClrSchemeLst/>
 </a:theme>
 </file>
--- a/artefatos/gerente_de_projetos/report_templates/template_sprint_review_interno.pptx
+++ b/artefatos/gerente_de_projetos/report_templates/template_sprint_review_interno.pptx
@@ -12,11 +12,10 @@
     <p:sldId id="267" r:id="rId6"/>
     <p:sldId id="259" r:id="rId7"/>
     <p:sldId id="260" r:id="rId8"/>
-    <p:sldId id="261" r:id="rId9"/>
-    <p:sldId id="262" r:id="rId10"/>
-    <p:sldId id="263" r:id="rId11"/>
-    <p:sldId id="264" r:id="rId12"/>
-    <p:sldId id="265" r:id="rId13"/>
+    <p:sldId id="262" r:id="rId9"/>
+    <p:sldId id="263" r:id="rId10"/>
+    <p:sldId id="264" r:id="rId11"/>
+    <p:sldId id="265" r:id="rId12"/>
   </p:sldIdLst>
   <p:sldSz cx="9144000" cy="6858000" type="screen4x3"/>
   <p:notesSz cx="7559675" cy="10691813"/>
@@ -8581,229 +8580,6 @@
       </p:grpSpPr>
       <p:sp>
         <p:nvSpPr>
-          <p:cNvPr id="87" name="PlaceHolder 1"/>
-          <p:cNvSpPr>
-            <a:spLocks noGrp="1"/>
-          </p:cNvSpPr>
-          <p:nvPr>
-            <p:ph type="subTitle"/>
-          </p:nvPr>
-        </p:nvSpPr>
-        <p:spPr>
-          <a:xfrm>
-            <a:off x="799919" y="1828081"/>
-            <a:ext cx="7857383" cy="4690706"/>
-          </a:xfrm>
-          <a:prstGeom prst="rect">
-            <a:avLst/>
-          </a:prstGeom>
-          <a:noFill/>
-          <a:ln w="0">
-            <a:noFill/>
-          </a:ln>
-        </p:spPr>
-        <p:txBody>
-          <a:bodyPr lIns="91440" tIns="45720" rIns="91440" bIns="45720" anchor="t">
-            <a:noAutofit/>
-          </a:bodyPr>
-          <a:lstStyle/>
-          <a:p>
-            <a:pPr marL="216000" indent="-216000" algn="l" defTabSz="457200">
-              <a:lnSpc>
-                <a:spcPct val="100000"/>
-              </a:lnSpc>
-              <a:spcBef>
-                <a:spcPts val="1191"/>
-              </a:spcBef>
-              <a:spcAft>
-                <a:spcPts val="992"/>
-              </a:spcAft>
-              <a:buClr>
-                <a:srgbClr val="000000"/>
-              </a:buClr>
-              <a:buSzPct val="45000"/>
-              <a:buFont typeface="Wingdings" charset="2"/>
-              <a:buChar char=""/>
-              <a:tabLst>
-                <a:tab pos="0" algn="l"/>
-              </a:tabLst>
-            </a:pPr>
-            <a:r>
-              <a:rPr lang="pt-BR" sz="2000" b="0" u="none" strike="noStrike" dirty="0">
-                <a:solidFill>
-                  <a:schemeClr val="tx1"/>
-                </a:solidFill>
-                <a:effectLst/>
-                <a:uFillTx/>
-                <a:latin typeface="Calibri"/>
-                <a:ea typeface="Microsoft YaHei"/>
-              </a:rPr>
-              <a:t>{{</a:t>
-            </a:r>
-            <a:r>
-              <a:rPr lang="pt-BR" sz="2400" b="0" u="none" strike="noStrike" dirty="0">
-                <a:solidFill>
-                  <a:schemeClr val="tx1"/>
-                </a:solidFill>
-                <a:effectLst/>
-                <a:uFillTx/>
-                <a:latin typeface="Calibri"/>
-                <a:ea typeface="Microsoft YaHei"/>
-              </a:rPr>
-              <a:t>proximasprint:6</a:t>
-            </a:r>
-            <a:r>
-              <a:rPr lang="pt-BR" sz="2000" b="0" u="none" strike="noStrike" dirty="0">
-                <a:solidFill>
-                  <a:schemeClr val="tx1"/>
-                </a:solidFill>
-                <a:effectLst/>
-                <a:uFillTx/>
-                <a:latin typeface="Calibri"/>
-                <a:ea typeface="Microsoft YaHei"/>
-              </a:rPr>
-              <a:t>}}</a:t>
-            </a:r>
-            <a:endParaRPr lang="pt-BR" sz="2000" b="0" u="none" strike="noStrike" dirty="0">
-              <a:solidFill>
-                <a:schemeClr val="tx1"/>
-              </a:solidFill>
-              <a:effectLst/>
-              <a:uFillTx/>
-              <a:latin typeface="Arial"/>
-            </a:endParaRPr>
-          </a:p>
-        </p:txBody>
-      </p:sp>
-      <p:pic>
-        <p:nvPicPr>
-          <p:cNvPr id="88" name="Imagem 87"/>
-          <p:cNvPicPr/>
-          <p:nvPr/>
-        </p:nvPicPr>
-        <p:blipFill>
-          <a:blip r:embed="rId2"/>
-          <a:stretch/>
-        </p:blipFill>
-        <p:spPr>
-          <a:xfrm>
-            <a:off x="0" y="-28800"/>
-            <a:ext cx="9142560" cy="1647720"/>
-          </a:xfrm>
-          <a:prstGeom prst="rect">
-            <a:avLst/>
-          </a:prstGeom>
-          <a:noFill/>
-          <a:ln w="0">
-            <a:noFill/>
-          </a:ln>
-        </p:spPr>
-      </p:pic>
-      <p:sp>
-        <p:nvSpPr>
-          <p:cNvPr id="89" name="Title 12"/>
-          <p:cNvSpPr/>
-          <p:nvPr/>
-        </p:nvSpPr>
-        <p:spPr>
-          <a:xfrm>
-            <a:off x="915120" y="180360"/>
-            <a:ext cx="8228160" cy="1141560"/>
-          </a:xfrm>
-          <a:prstGeom prst="rect">
-            <a:avLst/>
-          </a:prstGeom>
-          <a:noFill/>
-          <a:ln w="0">
-            <a:noFill/>
-          </a:ln>
-        </p:spPr>
-        <p:style>
-          <a:lnRef idx="0">
-            <a:scrgbClr r="0" g="0" b="0"/>
-          </a:lnRef>
-          <a:fillRef idx="0">
-            <a:scrgbClr r="0" g="0" b="0"/>
-          </a:fillRef>
-          <a:effectRef idx="0">
-            <a:scrgbClr r="0" g="0" b="0"/>
-          </a:effectRef>
-          <a:fontRef idx="minor"/>
-        </p:style>
-        <p:txBody>
-          <a:bodyPr lIns="90000" tIns="45000" rIns="90000" bIns="45000" anchor="ctr">
-            <a:noAutofit/>
-          </a:bodyPr>
-          <a:lstStyle/>
-          <a:p>
-            <a:pPr algn="ctr" defTabSz="457200">
-              <a:lnSpc>
-                <a:spcPct val="100000"/>
-              </a:lnSpc>
-            </a:pPr>
-            <a:r>
-              <a:rPr lang="en-US" sz="4400" b="0" u="none" strike="noStrike">
-                <a:solidFill>
-                  <a:srgbClr val="EA7500"/>
-                </a:solidFill>
-                <a:effectLst/>
-                <a:uFillTx/>
-                <a:latin typeface="Calibri"/>
-              </a:rPr>
-              <a:t>Planejamento da </a:t>
-            </a:r>
-            <a:br>
-              <a:rPr sz="4400"/>
-            </a:br>
-            <a:r>
-              <a:rPr lang="en-US" sz="4400" b="0" u="none" strike="noStrike">
-                <a:solidFill>
-                  <a:srgbClr val="EA7500"/>
-                </a:solidFill>
-                <a:effectLst/>
-                <a:uFillTx/>
-                <a:latin typeface="Calibri"/>
-              </a:rPr>
-              <a:t>próxima Sprint</a:t>
-            </a:r>
-            <a:endParaRPr lang="pt-BR" sz="4400" b="0" u="none" strike="noStrike">
-              <a:solidFill>
-                <a:srgbClr val="000000"/>
-              </a:solidFill>
-              <a:effectLst/>
-              <a:uFillTx/>
-              <a:latin typeface="Arial"/>
-            </a:endParaRPr>
-          </a:p>
-        </p:txBody>
-      </p:sp>
-    </p:spTree>
-  </p:cSld>
-  <p:clrMapOvr>
-    <a:masterClrMapping/>
-  </p:clrMapOvr>
-</p:sld>
-</file>
-
-<file path=ppt/slides/slide11.xml><?xml version="1.0" encoding="utf-8"?>
-<p:sld xmlns:a="http://schemas.openxmlformats.org/drawingml/2006/main" xmlns:r="http://schemas.openxmlformats.org/officeDocument/2006/relationships" xmlns:p="http://schemas.openxmlformats.org/presentationml/2006/main">
-  <p:cSld>
-    <p:spTree>
-      <p:nvGrpSpPr>
-        <p:cNvPr id="1" name=""/>
-        <p:cNvGrpSpPr/>
-        <p:nvPr/>
-      </p:nvGrpSpPr>
-      <p:grpSpPr>
-        <a:xfrm>
-          <a:off x="0" y="0"/>
-          <a:ext cx="0" cy="0"/>
-          <a:chOff x="0" y="0"/>
-          <a:chExt cx="0" cy="0"/>
-        </a:xfrm>
-      </p:grpSpPr>
-      <p:sp>
-        <p:nvSpPr>
           <p:cNvPr id="90" name="PlaceHolder 1"/>
           <p:cNvSpPr>
             <a:spLocks noGrp="1"/>
@@ -9045,7 +8821,7 @@
 </p:sld>
 </file>
 
-<file path=ppt/slides/slide12.xml><?xml version="1.0" encoding="utf-8"?>
+<file path=ppt/slides/slide11.xml><?xml version="1.0" encoding="utf-8"?>
 <p:sld xmlns:a="http://schemas.openxmlformats.org/drawingml/2006/main" xmlns:r="http://schemas.openxmlformats.org/officeDocument/2006/relationships" xmlns:p="http://schemas.openxmlformats.org/presentationml/2006/main">
   <p:cSld>
     <p:spTree>
@@ -10095,8 +9871,8 @@
         </p:nvSpPr>
         <p:spPr>
           <a:xfrm>
-            <a:off x="457919" y="1827720"/>
-            <a:ext cx="8685361" cy="4850280"/>
+            <a:off x="457919" y="1618920"/>
+            <a:ext cx="8685361" cy="5059080"/>
           </a:xfrm>
           <a:prstGeom prst="rect">
             <a:avLst/>
@@ -10174,7 +9950,7 @@
               </a:tabLst>
             </a:pPr>
             <a:r>
-              <a:rPr lang="en-US" sz="2500" b="1" dirty="0">
+              <a:rPr lang="en-US" sz="2400" b="1" dirty="0">
                 <a:solidFill>
                   <a:schemeClr val="dk1"/>
                 </a:solidFill>
@@ -10184,7 +9960,7 @@
               <a:t>Anterior à esse sprint</a:t>
             </a:r>
             <a:r>
-              <a:rPr lang="en-US" sz="2500" dirty="0">
+              <a:rPr lang="en-US" sz="2400" dirty="0">
                 <a:solidFill>
                   <a:schemeClr val="dk1"/>
                 </a:solidFill>
@@ -10194,17 +9970,17 @@
               <a:t>: {{</a:t>
             </a:r>
             <a:r>
-              <a:rPr lang="en-US" sz="2500" dirty="0" err="1">
+              <a:rPr lang="en-US" sz="2400" dirty="0" err="1">
                 <a:solidFill>
                   <a:schemeClr val="dk1"/>
                 </a:solidFill>
                 <a:latin typeface="Calibri"/>
                 <a:ea typeface="Microsoft YaHei"/>
               </a:rPr>
-              <a:t>cobertura_sprint.media_projeto.antes</a:t>
-            </a:r>
-            <a:r>
-              <a:rPr lang="en-US" sz="2500" dirty="0">
+              <a:t>cobertura_sprint.cobertura_ponderada.antes</a:t>
+            </a:r>
+            <a:r>
+              <a:rPr lang="en-US" sz="2400" dirty="0">
                 <a:solidFill>
                   <a:schemeClr val="dk1"/>
                 </a:solidFill>
@@ -10230,7 +10006,7 @@
               </a:tabLst>
             </a:pPr>
             <a:r>
-              <a:rPr lang="en-US" sz="2500" b="1" dirty="0" err="1">
+              <a:rPr lang="en-US" sz="2400" b="1" dirty="0" err="1">
                 <a:solidFill>
                   <a:schemeClr val="dk1"/>
                 </a:solidFill>
@@ -10240,7 +10016,7 @@
               <a:t>Após</a:t>
             </a:r>
             <a:r>
-              <a:rPr lang="en-US" sz="2500" b="1" dirty="0">
+              <a:rPr lang="en-US" sz="2400" b="1" dirty="0">
                 <a:solidFill>
                   <a:schemeClr val="dk1"/>
                 </a:solidFill>
@@ -10250,7 +10026,7 @@
               <a:t> esse sprint</a:t>
             </a:r>
             <a:r>
-              <a:rPr lang="en-US" sz="2500" dirty="0">
+              <a:rPr lang="en-US" sz="2400" dirty="0">
                 <a:solidFill>
                   <a:schemeClr val="dk1"/>
                 </a:solidFill>
@@ -10260,17 +10036,17 @@
               <a:t>: {{</a:t>
             </a:r>
             <a:r>
-              <a:rPr lang="en-US" sz="2500" dirty="0" err="1">
+              <a:rPr lang="en-US" sz="2400" dirty="0" err="1">
                 <a:solidFill>
                   <a:schemeClr val="dk1"/>
                 </a:solidFill>
                 <a:latin typeface="Calibri"/>
                 <a:ea typeface="Microsoft YaHei"/>
               </a:rPr>
-              <a:t>cobertura_sprint.media_projeto.depois</a:t>
-            </a:r>
-            <a:r>
-              <a:rPr lang="en-US" sz="2500" dirty="0">
+              <a:t>cobertura_sprint.cobertura_ponderada.depois</a:t>
+            </a:r>
+            <a:r>
+              <a:rPr lang="en-US" sz="2400" dirty="0">
                 <a:solidFill>
                   <a:schemeClr val="dk1"/>
                 </a:solidFill>
@@ -10296,7 +10072,7 @@
               </a:tabLst>
             </a:pPr>
             <a:r>
-              <a:rPr lang="en-US" sz="2500" b="1" dirty="0" err="1">
+              <a:rPr lang="en-US" sz="2400" b="1" dirty="0" err="1">
                 <a:solidFill>
                   <a:schemeClr val="dk1"/>
                 </a:solidFill>
@@ -10306,7 +10082,7 @@
               <a:t>Diferença</a:t>
             </a:r>
             <a:r>
-              <a:rPr lang="en-US" sz="2500" dirty="0">
+              <a:rPr lang="en-US" sz="2400" dirty="0">
                 <a:solidFill>
                   <a:schemeClr val="dk1"/>
                 </a:solidFill>
@@ -10316,17 +10092,47 @@
               <a:t>: {{</a:t>
             </a:r>
             <a:r>
-              <a:rPr lang="en-US" sz="2500" dirty="0" err="1">
+              <a:rPr lang="en-US" sz="2400" dirty="0" err="1">
                 <a:solidFill>
                   <a:schemeClr val="dk1"/>
                 </a:solidFill>
                 <a:latin typeface="Calibri"/>
                 <a:ea typeface="Microsoft YaHei"/>
               </a:rPr>
-              <a:t>cobertura_sprint.media_projeto.delta_pp</a:t>
-            </a:r>
-            <a:r>
-              <a:rPr lang="en-US" sz="2500" dirty="0">
+              <a:t>cobertura_</a:t>
+            </a:r>
+            <a:r>
+              <a:rPr lang="en-US" sz="2400" err="1">
+                <a:solidFill>
+                  <a:schemeClr val="dk1"/>
+                </a:solidFill>
+                <a:latin typeface="Calibri"/>
+                <a:ea typeface="Microsoft YaHei"/>
+              </a:rPr>
+              <a:t>sprint</a:t>
+            </a:r>
+            <a:r>
+              <a:rPr lang="en-US" sz="2400">
+                <a:solidFill>
+                  <a:schemeClr val="dk1"/>
+                </a:solidFill>
+                <a:latin typeface="Calibri"/>
+                <a:ea typeface="Microsoft YaHei"/>
+              </a:rPr>
+              <a:t>.cobertura</a:t>
+            </a:r>
+            <a:r>
+              <a:rPr lang="en-US" sz="2400" dirty="0" err="1">
+                <a:solidFill>
+                  <a:schemeClr val="dk1"/>
+                </a:solidFill>
+                <a:latin typeface="Calibri"/>
+                <a:ea typeface="Microsoft YaHei"/>
+              </a:rPr>
+              <a:t>_ponderada.delta_pp</a:t>
+            </a:r>
+            <a:r>
+              <a:rPr lang="en-US" sz="2400" dirty="0">
                 <a:solidFill>
                   <a:schemeClr val="dk1"/>
                 </a:solidFill>
@@ -10413,7 +10219,7 @@
               </a:tabLst>
             </a:pPr>
             <a:r>
-              <a:rPr lang="en-US" sz="2500" b="1" dirty="0">
+              <a:rPr lang="en-US" sz="2400" b="1" dirty="0">
                 <a:solidFill>
                   <a:schemeClr val="dk1"/>
                 </a:solidFill>
@@ -10423,7 +10229,7 @@
               <a:t>Total de </a:t>
             </a:r>
             <a:r>
-              <a:rPr lang="en-US" sz="2500" b="1" dirty="0" err="1">
+              <a:rPr lang="en-US" sz="2400" b="1" dirty="0" err="1">
                 <a:solidFill>
                   <a:schemeClr val="dk1"/>
                 </a:solidFill>
@@ -10433,7 +10239,7 @@
               <a:t>requisitos</a:t>
             </a:r>
             <a:r>
-              <a:rPr lang="en-US" sz="2500" b="1" dirty="0">
+              <a:rPr lang="en-US" sz="2400" b="1" dirty="0">
                 <a:solidFill>
                   <a:schemeClr val="dk1"/>
                 </a:solidFill>
@@ -10443,7 +10249,7 @@
               <a:t> </a:t>
             </a:r>
             <a:r>
-              <a:rPr lang="en-US" sz="2500" b="1" dirty="0" err="1">
+              <a:rPr lang="en-US" sz="2400" b="1" dirty="0" err="1">
                 <a:solidFill>
                   <a:schemeClr val="dk1"/>
                 </a:solidFill>
@@ -10453,7 +10259,7 @@
               <a:t>avançados</a:t>
             </a:r>
             <a:r>
-              <a:rPr lang="en-US" sz="2500" dirty="0">
+              <a:rPr lang="en-US" sz="2400" dirty="0">
                 <a:solidFill>
                   <a:schemeClr val="dk1"/>
                 </a:solidFill>
@@ -10463,7 +10269,7 @@
               <a:t>: {{</a:t>
             </a:r>
             <a:r>
-              <a:rPr lang="en-US" sz="2500" dirty="0" err="1">
+              <a:rPr lang="en-US" sz="2400" dirty="0" err="1">
                 <a:solidFill>
                   <a:schemeClr val="dk1"/>
                 </a:solidFill>
@@ -10473,7 +10279,7 @@
               <a:t>cobertura_sprint.reqs_avancados</a:t>
             </a:r>
             <a:r>
-              <a:rPr lang="en-US" sz="2500" dirty="0">
+              <a:rPr lang="en-US" sz="2400" dirty="0">
                 <a:solidFill>
                   <a:schemeClr val="dk1"/>
                 </a:solidFill>
@@ -10499,7 +10305,7 @@
               </a:tabLst>
             </a:pPr>
             <a:r>
-              <a:rPr lang="en-US" sz="2500" b="1" dirty="0">
+              <a:rPr lang="en-US" sz="2400" b="1" dirty="0">
                 <a:solidFill>
                   <a:schemeClr val="dk1"/>
                 </a:solidFill>
@@ -10509,7 +10315,7 @@
               <a:t>Total de </a:t>
             </a:r>
             <a:r>
-              <a:rPr lang="en-US" sz="2500" b="1" dirty="0" err="1">
+              <a:rPr lang="en-US" sz="2400" b="1" dirty="0" err="1">
                 <a:solidFill>
                   <a:schemeClr val="dk1"/>
                 </a:solidFill>
@@ -10519,7 +10325,7 @@
               <a:t>requisitos</a:t>
             </a:r>
             <a:r>
-              <a:rPr lang="en-US" sz="2500" b="1" dirty="0">
+              <a:rPr lang="en-US" sz="2400" b="1" dirty="0">
                 <a:solidFill>
                   <a:schemeClr val="dk1"/>
                 </a:solidFill>
@@ -10529,7 +10335,7 @@
               <a:t> </a:t>
             </a:r>
             <a:r>
-              <a:rPr lang="en-US" sz="2500" b="1" dirty="0" err="1">
+              <a:rPr lang="en-US" sz="2400" b="1" dirty="0" err="1">
                 <a:solidFill>
                   <a:schemeClr val="dk1"/>
                 </a:solidFill>
@@ -10539,7 +10345,7 @@
               <a:t>iniciados</a:t>
             </a:r>
             <a:r>
-              <a:rPr lang="en-US" sz="2500" dirty="0">
+              <a:rPr lang="en-US" sz="2400" dirty="0">
                 <a:solidFill>
                   <a:schemeClr val="dk1"/>
                 </a:solidFill>
@@ -10549,7 +10355,7 @@
               <a:t>: {{</a:t>
             </a:r>
             <a:r>
-              <a:rPr lang="en-US" sz="2500" dirty="0" err="1">
+              <a:rPr lang="en-US" sz="2400" dirty="0" err="1">
                 <a:solidFill>
                   <a:schemeClr val="dk1"/>
                 </a:solidFill>
@@ -10559,7 +10365,7 @@
               <a:t>cobertura_sprint.reqs_novos_iniciados</a:t>
             </a:r>
             <a:r>
-              <a:rPr lang="en-US" sz="2500" dirty="0">
+              <a:rPr lang="en-US" sz="2400" dirty="0">
                 <a:solidFill>
                   <a:schemeClr val="dk1"/>
                 </a:solidFill>
@@ -10785,157 +10591,10 @@
               </a:buClr>
               <a:buSzPct val="45000"/>
             </a:pPr>
+            <a:r>
+              <a:t>{{GRAFICO:cobertura_ponderada}}</a:t>
+            </a:r>
             <a:endParaRPr dirty="0"/>
-          </a:p>
-          <a:p>
-            <a:pPr algn="l" defTabSz="457200">
-              <a:lnSpc>
-                <a:spcPct val="100000"/>
-              </a:lnSpc>
-              <a:spcBef>
-                <a:spcPts val="641"/>
-              </a:spcBef>
-              <a:buClr>
-                <a:srgbClr val="000000"/>
-              </a:buClr>
-              <a:buSzPct val="45000"/>
-              <a:tabLst>
-                <a:tab pos="0" algn="l"/>
-              </a:tabLst>
-            </a:pPr>
-            <a:r>
-              <a:rPr lang="en-US" sz="2600" b="1" dirty="0" err="1">
-                <a:solidFill>
-                  <a:schemeClr val="tx2"/>
-                </a:solidFill>
-              </a:rPr>
-              <a:t>Evolução</a:t>
-            </a:r>
-            <a:r>
-              <a:rPr lang="en-US" sz="2600" b="1" dirty="0">
-                <a:solidFill>
-                  <a:schemeClr val="tx2"/>
-                </a:solidFill>
-              </a:rPr>
-              <a:t> de </a:t>
-            </a:r>
-            <a:r>
-              <a:rPr lang="en-US" sz="2600" b="1" dirty="0" err="1">
-                <a:solidFill>
-                  <a:schemeClr val="tx2"/>
-                </a:solidFill>
-              </a:rPr>
-              <a:t>desenvolvimento</a:t>
-            </a:r>
-            <a:r>
-              <a:rPr lang="en-US" sz="2600" b="1" dirty="0">
-                <a:solidFill>
-                  <a:schemeClr val="tx2"/>
-                </a:solidFill>
-              </a:rPr>
-              <a:t> </a:t>
-            </a:r>
-            <a:r>
-              <a:rPr lang="en-US" sz="2600" b="1" dirty="0" err="1">
-                <a:solidFill>
-                  <a:schemeClr val="tx2"/>
-                </a:solidFill>
-              </a:rPr>
-              <a:t>por</a:t>
-            </a:r>
-            <a:r>
-              <a:rPr lang="en-US" sz="2600" b="1" dirty="0">
-                <a:solidFill>
-                  <a:schemeClr val="tx2"/>
-                </a:solidFill>
-              </a:rPr>
-              <a:t> </a:t>
-            </a:r>
-            <a:r>
-              <a:rPr lang="en-US" sz="2600" b="1" dirty="0" err="1">
-                <a:solidFill>
-                  <a:schemeClr val="tx2"/>
-                </a:solidFill>
-              </a:rPr>
-              <a:t>requisito</a:t>
-            </a:r>
-            <a:r>
-              <a:rPr lang="en-US" sz="2600" b="1" dirty="0">
-                <a:solidFill>
-                  <a:schemeClr val="tx2"/>
-                </a:solidFill>
-              </a:rPr>
-              <a:t>:</a:t>
-            </a:r>
-          </a:p>
-          <a:p>
-            <a:pPr marL="864000" lvl="1" indent="-324000" algn="l" defTabSz="457200">
-              <a:spcBef>
-                <a:spcPts val="561"/>
-              </a:spcBef>
-              <a:buClr>
-                <a:srgbClr val="000000"/>
-              </a:buClr>
-              <a:buSzPct val="45000"/>
-              <a:buFont typeface="Wingdings" charset="2"/>
-              <a:buChar char=""/>
-              <a:tabLst>
-                <a:tab pos="0" algn="l"/>
-              </a:tabLst>
-            </a:pPr>
-            <a:r>
-              <a:rPr lang="en-US" sz="2600" dirty="0">
-                <a:solidFill>
-                  <a:schemeClr val="dk1"/>
-                </a:solidFill>
-                <a:latin typeface="Calibri"/>
-                <a:ea typeface="Microsoft YaHei"/>
-              </a:rPr>
-              <a:t>{{</a:t>
-            </a:r>
-            <a:r>
-              <a:rPr lang="en-US" sz="2600" dirty="0" err="1">
-                <a:solidFill>
-                  <a:schemeClr val="dk1"/>
-                </a:solidFill>
-                <a:latin typeface="Calibri"/>
-                <a:ea typeface="Microsoft YaHei"/>
-              </a:rPr>
-              <a:t>cobertura_sprint.por_req</a:t>
-            </a:r>
-            <a:r>
-              <a:rPr lang="en-US" sz="2600" dirty="0">
-                <a:solidFill>
-                  <a:schemeClr val="dk1"/>
-                </a:solidFill>
-                <a:latin typeface="Calibri"/>
-                <a:ea typeface="Microsoft YaHei"/>
-              </a:rPr>
-              <a:t>}}</a:t>
-            </a:r>
-          </a:p>
-          <a:p>
-            <a:pPr marL="864000" lvl="1" indent="-324000" algn="l" defTabSz="457200">
-              <a:spcBef>
-                <a:spcPts val="561"/>
-              </a:spcBef>
-              <a:buClr>
-                <a:srgbClr val="000000"/>
-              </a:buClr>
-              <a:buSzPct val="45000"/>
-              <a:buFont typeface="Wingdings" charset="2"/>
-              <a:buChar char=""/>
-              <a:tabLst>
-                <a:tab pos="0" algn="l"/>
-              </a:tabLst>
-            </a:pPr>
-            <a:endParaRPr lang="en-US" sz="2600" dirty="0">
-              <a:solidFill>
-                <a:schemeClr val="dk1"/>
-              </a:solidFill>
-              <a:latin typeface="Calibri"/>
-              <a:ea typeface="Microsoft YaHei"/>
-            </a:endParaRPr>
           </a:p>
         </p:txBody>
       </p:sp>
@@ -11066,6 +10725,17 @@
               </a:lnSpc>
             </a:pPr>
             <a:r>
+              <a:rPr lang="en-US" sz="4400" b="0" u="none" strike="noStrike" dirty="0" err="1">
+                <a:solidFill>
+                  <a:srgbClr val="EA7500"/>
+                </a:solidFill>
+                <a:effectLst/>
+                <a:uFillTx/>
+                <a:latin typeface="Calibri"/>
+              </a:rPr>
+              <a:t>por</a:t>
+            </a:r>
+            <a:r>
               <a:rPr lang="en-US" sz="4400" b="0" u="none" strike="noStrike" dirty="0">
                 <a:solidFill>
                   <a:srgbClr val="EA7500"/>
@@ -11074,7 +10744,18 @@
                 <a:uFillTx/>
                 <a:latin typeface="Calibri"/>
               </a:rPr>
-              <a:t> da Sprint</a:t>
+              <a:t> </a:t>
+            </a:r>
+            <a:r>
+              <a:rPr lang="en-US" sz="4400" b="0" u="none" strike="noStrike" dirty="0" err="1">
+                <a:solidFill>
+                  <a:srgbClr val="EA7500"/>
+                </a:solidFill>
+                <a:effectLst/>
+                <a:uFillTx/>
+                <a:latin typeface="Calibri"/>
+              </a:rPr>
+              <a:t>requisito</a:t>
             </a:r>
             <a:endParaRPr lang="pt-BR" sz="4400" b="0" u="none" strike="noStrike" dirty="0">
               <a:solidFill>
@@ -12374,225 +12055,6 @@
       </p:grpSpPr>
       <p:sp>
         <p:nvSpPr>
-          <p:cNvPr id="80" name="PlaceHolder 1"/>
-          <p:cNvSpPr>
-            <a:spLocks noGrp="1"/>
-          </p:cNvSpPr>
-          <p:nvPr>
-            <p:ph/>
-          </p:nvPr>
-        </p:nvSpPr>
-        <p:spPr>
-          <a:xfrm>
-            <a:off x="457920" y="1321560"/>
-            <a:ext cx="8228160" cy="5356440"/>
-          </a:xfrm>
-          <a:prstGeom prst="rect">
-            <a:avLst/>
-          </a:prstGeom>
-          <a:noFill/>
-          <a:ln w="0">
-            <a:noFill/>
-          </a:ln>
-        </p:spPr>
-        <p:txBody>
-          <a:bodyPr lIns="91440" tIns="45720" rIns="91440" bIns="45720" anchor="t">
-            <a:noAutofit/>
-          </a:bodyPr>
-          <a:lstStyle/>
-          <a:p>
-            <a:pPr indent="0" algn="l" defTabSz="457200">
-              <a:lnSpc>
-                <a:spcPct val="100000"/>
-              </a:lnSpc>
-              <a:spcBef>
-                <a:spcPts val="641"/>
-              </a:spcBef>
-              <a:buNone/>
-              <a:tabLst>
-                <a:tab pos="0" algn="l"/>
-              </a:tabLst>
-            </a:pPr>
-            <a:endParaRPr lang="en-US" sz="3200" b="0" u="none" strike="noStrike" dirty="0">
-              <a:solidFill>
-                <a:schemeClr val="dk1"/>
-              </a:solidFill>
-              <a:effectLst/>
-              <a:uFillTx/>
-              <a:latin typeface="Calibri"/>
-            </a:endParaRPr>
-          </a:p>
-          <a:p>
-            <a:pPr marL="343080" indent="-343080" algn="l" defTabSz="457200">
-              <a:lnSpc>
-                <a:spcPct val="100000"/>
-              </a:lnSpc>
-              <a:spcBef>
-                <a:spcPts val="1191"/>
-              </a:spcBef>
-              <a:spcAft>
-                <a:spcPts val="992"/>
-              </a:spcAft>
-              <a:buClr>
-                <a:srgbClr val="000000"/>
-              </a:buClr>
-              <a:buFont typeface="Arial"/>
-              <a:buChar char="•"/>
-              <a:tabLst>
-                <a:tab pos="0" algn="l"/>
-              </a:tabLst>
-            </a:pPr>
-            <a:r>
-              <a:rPr lang="en-US" sz="2000" b="0" u="none" strike="noStrike" dirty="0">
-                <a:solidFill>
-                  <a:schemeClr val="dk1"/>
-                </a:solidFill>
-                <a:effectLst/>
-                <a:uFillTx/>
-                <a:latin typeface="Calibri"/>
-              </a:rPr>
-              <a:t>{{insights:3}}</a:t>
-            </a:r>
-          </a:p>
-        </p:txBody>
-      </p:sp>
-      <p:pic>
-        <p:nvPicPr>
-          <p:cNvPr id="81" name="Imagem 80"/>
-          <p:cNvPicPr/>
-          <p:nvPr/>
-        </p:nvPicPr>
-        <p:blipFill>
-          <a:blip r:embed="rId2"/>
-          <a:stretch/>
-        </p:blipFill>
-        <p:spPr>
-          <a:xfrm>
-            <a:off x="720" y="-28800"/>
-            <a:ext cx="9142560" cy="1647720"/>
-          </a:xfrm>
-          <a:prstGeom prst="rect">
-            <a:avLst/>
-          </a:prstGeom>
-          <a:noFill/>
-          <a:ln w="0">
-            <a:noFill/>
-          </a:ln>
-        </p:spPr>
-      </p:pic>
-      <p:sp>
-        <p:nvSpPr>
-          <p:cNvPr id="82" name="Title 6"/>
-          <p:cNvSpPr/>
-          <p:nvPr/>
-        </p:nvSpPr>
-        <p:spPr>
-          <a:xfrm>
-            <a:off x="915480" y="180000"/>
-            <a:ext cx="8228160" cy="1141560"/>
-          </a:xfrm>
-          <a:prstGeom prst="rect">
-            <a:avLst/>
-          </a:prstGeom>
-          <a:noFill/>
-          <a:ln w="0">
-            <a:noFill/>
-          </a:ln>
-        </p:spPr>
-        <p:style>
-          <a:lnRef idx="0">
-            <a:scrgbClr r="0" g="0" b="0"/>
-          </a:lnRef>
-          <a:fillRef idx="0">
-            <a:scrgbClr r="0" g="0" b="0"/>
-          </a:fillRef>
-          <a:effectRef idx="0">
-            <a:scrgbClr r="0" g="0" b="0"/>
-          </a:effectRef>
-          <a:fontRef idx="minor"/>
-        </p:style>
-        <p:txBody>
-          <a:bodyPr lIns="90000" tIns="45000" rIns="90000" bIns="45000" anchor="ctr">
-            <a:noAutofit/>
-          </a:bodyPr>
-          <a:lstStyle/>
-          <a:p>
-            <a:pPr algn="ctr" defTabSz="457200">
-              <a:lnSpc>
-                <a:spcPct val="100000"/>
-              </a:lnSpc>
-            </a:pPr>
-            <a:r>
-              <a:rPr lang="en-US" sz="4400" b="0" u="none" strike="noStrike" dirty="0" err="1">
-                <a:solidFill>
-                  <a:srgbClr val="EA7500"/>
-                </a:solidFill>
-                <a:effectLst/>
-                <a:uFillTx/>
-                <a:latin typeface="Calibri"/>
-              </a:rPr>
-              <a:t>Informações</a:t>
-            </a:r>
-            <a:r>
-              <a:rPr lang="en-US" sz="4400" b="0" u="none" strike="noStrike" dirty="0">
-                <a:solidFill>
-                  <a:srgbClr val="EA7500"/>
-                </a:solidFill>
-                <a:effectLst/>
-                <a:uFillTx/>
-                <a:latin typeface="Calibri"/>
-              </a:rPr>
-              <a:t> </a:t>
-            </a:r>
-            <a:r>
-              <a:rPr lang="en-US" sz="4400" b="0" u="none" strike="noStrike" dirty="0" err="1">
-                <a:solidFill>
-                  <a:srgbClr val="EA7500"/>
-                </a:solidFill>
-                <a:effectLst/>
-                <a:uFillTx/>
-                <a:latin typeface="Calibri"/>
-              </a:rPr>
-              <a:t>adicionais</a:t>
-            </a:r>
-            <a:endParaRPr lang="pt-BR" sz="4400" b="0" u="none" strike="noStrike" dirty="0">
-              <a:solidFill>
-                <a:srgbClr val="000000"/>
-              </a:solidFill>
-              <a:effectLst/>
-              <a:uFillTx/>
-              <a:latin typeface="Arial"/>
-            </a:endParaRPr>
-          </a:p>
-        </p:txBody>
-      </p:sp>
-    </p:spTree>
-  </p:cSld>
-  <p:clrMapOvr>
-    <a:masterClrMapping/>
-  </p:clrMapOvr>
-</p:sld>
-</file>
-
-<file path=ppt/slides/slide9.xml><?xml version="1.0" encoding="utf-8"?>
-<p:sld xmlns:a="http://schemas.openxmlformats.org/drawingml/2006/main" xmlns:r="http://schemas.openxmlformats.org/officeDocument/2006/relationships" xmlns:p="http://schemas.openxmlformats.org/presentationml/2006/main">
-  <p:cSld>
-    <p:spTree>
-      <p:nvGrpSpPr>
-        <p:cNvPr id="1" name=""/>
-        <p:cNvGrpSpPr/>
-        <p:nvPr/>
-      </p:nvGrpSpPr>
-      <p:grpSpPr>
-        <a:xfrm>
-          <a:off x="0" y="0"/>
-          <a:ext cx="0" cy="0"/>
-          <a:chOff x="0" y="0"/>
-          <a:chExt cx="0" cy="0"/>
-        </a:xfrm>
-      </p:grpSpPr>
-      <p:sp>
-        <p:nvSpPr>
           <p:cNvPr id="83" name="PlaceHolder 1"/>
           <p:cNvSpPr>
             <a:spLocks noGrp="1"/>
@@ -12803,6 +12265,229 @@
       <p:sp>
         <p:nvSpPr>
           <p:cNvPr id="86" name="Title 1"/>
+          <p:cNvSpPr/>
+          <p:nvPr/>
+        </p:nvSpPr>
+        <p:spPr>
+          <a:xfrm>
+            <a:off x="915120" y="180360"/>
+            <a:ext cx="8228160" cy="1141560"/>
+          </a:xfrm>
+          <a:prstGeom prst="rect">
+            <a:avLst/>
+          </a:prstGeom>
+          <a:noFill/>
+          <a:ln w="0">
+            <a:noFill/>
+          </a:ln>
+        </p:spPr>
+        <p:style>
+          <a:lnRef idx="0">
+            <a:scrgbClr r="0" g="0" b="0"/>
+          </a:lnRef>
+          <a:fillRef idx="0">
+            <a:scrgbClr r="0" g="0" b="0"/>
+          </a:fillRef>
+          <a:effectRef idx="0">
+            <a:scrgbClr r="0" g="0" b="0"/>
+          </a:effectRef>
+          <a:fontRef idx="minor"/>
+        </p:style>
+        <p:txBody>
+          <a:bodyPr lIns="90000" tIns="45000" rIns="90000" bIns="45000" anchor="ctr">
+            <a:noAutofit/>
+          </a:bodyPr>
+          <a:lstStyle/>
+          <a:p>
+            <a:pPr algn="ctr" defTabSz="457200">
+              <a:lnSpc>
+                <a:spcPct val="100000"/>
+              </a:lnSpc>
+            </a:pPr>
+            <a:r>
+              <a:rPr lang="en-US" sz="4400" b="0" u="none" strike="noStrike">
+                <a:solidFill>
+                  <a:srgbClr val="EA7500"/>
+                </a:solidFill>
+                <a:effectLst/>
+                <a:uFillTx/>
+                <a:latin typeface="Calibri"/>
+              </a:rPr>
+              <a:t>Planejamento da </a:t>
+            </a:r>
+            <a:br>
+              <a:rPr sz="4400"/>
+            </a:br>
+            <a:r>
+              <a:rPr lang="en-US" sz="4400" b="0" u="none" strike="noStrike">
+                <a:solidFill>
+                  <a:srgbClr val="EA7500"/>
+                </a:solidFill>
+                <a:effectLst/>
+                <a:uFillTx/>
+                <a:latin typeface="Calibri"/>
+              </a:rPr>
+              <a:t>próxima Sprint</a:t>
+            </a:r>
+            <a:endParaRPr lang="pt-BR" sz="4400" b="0" u="none" strike="noStrike">
+              <a:solidFill>
+                <a:srgbClr val="000000"/>
+              </a:solidFill>
+              <a:effectLst/>
+              <a:uFillTx/>
+              <a:latin typeface="Arial"/>
+            </a:endParaRPr>
+          </a:p>
+        </p:txBody>
+      </p:sp>
+    </p:spTree>
+  </p:cSld>
+  <p:clrMapOvr>
+    <a:masterClrMapping/>
+  </p:clrMapOvr>
+</p:sld>
+</file>
+
+<file path=ppt/slides/slide9.xml><?xml version="1.0" encoding="utf-8"?>
+<p:sld xmlns:a="http://schemas.openxmlformats.org/drawingml/2006/main" xmlns:r="http://schemas.openxmlformats.org/officeDocument/2006/relationships" xmlns:p="http://schemas.openxmlformats.org/presentationml/2006/main">
+  <p:cSld>
+    <p:spTree>
+      <p:nvGrpSpPr>
+        <p:cNvPr id="1" name=""/>
+        <p:cNvGrpSpPr/>
+        <p:nvPr/>
+      </p:nvGrpSpPr>
+      <p:grpSpPr>
+        <a:xfrm>
+          <a:off x="0" y="0"/>
+          <a:ext cx="0" cy="0"/>
+          <a:chOff x="0" y="0"/>
+          <a:chExt cx="0" cy="0"/>
+        </a:xfrm>
+      </p:grpSpPr>
+      <p:sp>
+        <p:nvSpPr>
+          <p:cNvPr id="87" name="PlaceHolder 1"/>
+          <p:cNvSpPr>
+            <a:spLocks noGrp="1"/>
+          </p:cNvSpPr>
+          <p:nvPr>
+            <p:ph type="subTitle"/>
+          </p:nvPr>
+        </p:nvSpPr>
+        <p:spPr>
+          <a:xfrm>
+            <a:off x="799919" y="1828081"/>
+            <a:ext cx="7857383" cy="4690706"/>
+          </a:xfrm>
+          <a:prstGeom prst="rect">
+            <a:avLst/>
+          </a:prstGeom>
+          <a:noFill/>
+          <a:ln w="0">
+            <a:noFill/>
+          </a:ln>
+        </p:spPr>
+        <p:txBody>
+          <a:bodyPr lIns="91440" tIns="45720" rIns="91440" bIns="45720" anchor="t">
+            <a:noAutofit/>
+          </a:bodyPr>
+          <a:lstStyle/>
+          <a:p>
+            <a:pPr marL="216000" indent="-216000" algn="l" defTabSz="457200">
+              <a:lnSpc>
+                <a:spcPct val="100000"/>
+              </a:lnSpc>
+              <a:spcBef>
+                <a:spcPts val="1191"/>
+              </a:spcBef>
+              <a:spcAft>
+                <a:spcPts val="992"/>
+              </a:spcAft>
+              <a:buClr>
+                <a:srgbClr val="000000"/>
+              </a:buClr>
+              <a:buSzPct val="45000"/>
+              <a:buFont typeface="Wingdings" charset="2"/>
+              <a:buChar char=""/>
+              <a:tabLst>
+                <a:tab pos="0" algn="l"/>
+              </a:tabLst>
+            </a:pPr>
+            <a:r>
+              <a:rPr lang="pt-BR" sz="2000" b="0" u="none" strike="noStrike" dirty="0">
+                <a:solidFill>
+                  <a:schemeClr val="tx1"/>
+                </a:solidFill>
+                <a:effectLst/>
+                <a:uFillTx/>
+                <a:latin typeface="Calibri"/>
+                <a:ea typeface="Microsoft YaHei"/>
+              </a:rPr>
+              <a:t>{{</a:t>
+            </a:r>
+            <a:r>
+              <a:rPr lang="pt-BR" sz="2400" b="0" u="none" strike="noStrike" dirty="0">
+                <a:solidFill>
+                  <a:schemeClr val="tx1"/>
+                </a:solidFill>
+                <a:effectLst/>
+                <a:uFillTx/>
+                <a:latin typeface="Calibri"/>
+                <a:ea typeface="Microsoft YaHei"/>
+              </a:rPr>
+              <a:t>proximasprint:6</a:t>
+            </a:r>
+            <a:r>
+              <a:rPr lang="pt-BR" sz="2000" b="0" u="none" strike="noStrike" dirty="0">
+                <a:solidFill>
+                  <a:schemeClr val="tx1"/>
+                </a:solidFill>
+                <a:effectLst/>
+                <a:uFillTx/>
+                <a:latin typeface="Calibri"/>
+                <a:ea typeface="Microsoft YaHei"/>
+              </a:rPr>
+              <a:t>}}</a:t>
+            </a:r>
+            <a:endParaRPr lang="pt-BR" sz="2000" b="0" u="none" strike="noStrike" dirty="0">
+              <a:solidFill>
+                <a:schemeClr val="tx1"/>
+              </a:solidFill>
+              <a:effectLst/>
+              <a:uFillTx/>
+              <a:latin typeface="Arial"/>
+            </a:endParaRPr>
+          </a:p>
+        </p:txBody>
+      </p:sp>
+      <p:pic>
+        <p:nvPicPr>
+          <p:cNvPr id="88" name="Imagem 87"/>
+          <p:cNvPicPr/>
+          <p:nvPr/>
+        </p:nvPicPr>
+        <p:blipFill>
+          <a:blip r:embed="rId2"/>
+          <a:stretch/>
+        </p:blipFill>
+        <p:spPr>
+          <a:xfrm>
+            <a:off x="0" y="-28800"/>
+            <a:ext cx="9142560" cy="1647720"/>
+          </a:xfrm>
+          <a:prstGeom prst="rect">
+            <a:avLst/>
+          </a:prstGeom>
+          <a:noFill/>
+          <a:ln w="0">
+            <a:noFill/>
+          </a:ln>
+        </p:spPr>
+      </p:pic>
+      <p:sp>
+        <p:nvSpPr>
+          <p:cNvPr id="89" name="Title 12"/>
           <p:cNvSpPr/>
           <p:nvPr/>
         </p:nvSpPr>
